--- a/CLASE-03/01-CLASE-03-CKA.pptx
+++ b/CLASE-03/01-CLASE-03-CKA.pptx
@@ -3206,80 +3206,30 @@
           </a:p>
         </p:txBody>
       </p:sp>
-      <p:sp>
-        <p:nvSpPr>
-          <p:cNvPr id="4" name="Freeform 3"/>
-          <p:cNvSpPr/>
-          <p:nvPr/>
-        </p:nvSpPr>
-        <p:spPr>
-          <a:xfrm>
-            <a:off x="9720832" y="400000"/>
-            <a:ext cx="2242335" cy="2186114"/>
-          </a:xfrm>
-          <a:custGeom>
-            <a:avLst/>
-            <a:gdLst/>
-            <a:ahLst/>
-            <a:cxnLst/>
-            <a:rect l="l" t="t" r="r" b="b"/>
-            <a:pathLst>
-              <a:path w="2242335" h="2186114">
-                <a:moveTo>
-                  <a:pt x="1121168" y="0"/>
-                </a:moveTo>
-                <a:lnTo>
-                  <a:pt x="2020274" y="432986"/>
-                </a:lnTo>
-                <a:lnTo>
-                  <a:pt x="2242335" y="1405899"/>
-                </a:lnTo>
-                <a:lnTo>
-                  <a:pt x="1620134" y="2186114"/>
-                </a:lnTo>
-                <a:lnTo>
-                  <a:pt x="622201" y="2186114"/>
-                </a:lnTo>
-                <a:lnTo>
-                  <a:pt x="0" y="1405899"/>
-                </a:lnTo>
-                <a:lnTo>
-                  <a:pt x="222061" y="432986"/>
-                </a:lnTo>
-                <a:close/>
-              </a:path>
-            </a:pathLst>
-          </a:custGeom>
-          <a:noFill/>
-          <a:ln w="28575">
-            <a:solidFill>
-              <a:srgbClr val="26354E"/>
-            </a:solidFill>
-          </a:ln>
-          <a:effectLst/>
-        </p:spPr>
-        <p:style>
-          <a:lnRef idx="1">
-            <a:schemeClr val="accent1"/>
-          </a:lnRef>
-          <a:fillRef idx="3">
-            <a:schemeClr val="accent1"/>
-          </a:fillRef>
-          <a:effectRef idx="2">
-            <a:schemeClr val="accent1"/>
-          </a:effectRef>
-          <a:fontRef idx="minor">
-            <a:schemeClr val="lt1"/>
-          </a:fontRef>
-        </p:style>
-        <p:txBody>
-          <a:bodyPr rtlCol="0" anchor="ctr"/>
-          <a:lstStyle/>
-          <a:p>
-            <a:pPr algn="ctr"/>
-          </a:p>
-        </p:txBody>
-      </p:sp>
+      <p:pic>
+        <p:nvPicPr>
+          <p:cNvPr id="4" name="Picture 3" descr="kubernetes.png"/>
+          <p:cNvPicPr>
+            <a:picLocks noChangeAspect="1"/>
+          </p:cNvPicPr>
+          <p:nvPr/>
+        </p:nvPicPr>
+        <p:blipFill>
+          <a:blip r:embed="rId2"/>
+          <a:stretch>
+            <a:fillRect/>
+          </a:stretch>
+        </p:blipFill>
+        <p:spPr>
+          <a:xfrm>
+            <a:off x="9642000" y="1000000"/>
+            <a:ext cx="1650000" cy="1650000"/>
+          </a:xfrm>
+          <a:prstGeom prst="rect">
+            <a:avLst/>
+          </a:prstGeom>
+        </p:spPr>
+      </p:pic>
       <p:sp>
         <p:nvSpPr>
           <p:cNvPr id="5" name="TextBox 4"/>
@@ -4251,7 +4201,7 @@
         <p:spPr>
           <a:xfrm>
             <a:off x="620000" y="560000"/>
-            <a:ext cx="10952000" cy="620000"/>
+            <a:ext cx="10052000" cy="620000"/>
           </a:xfrm>
           <a:prstGeom prst="rect">
             <a:avLst/>
@@ -4472,20 +4422,44 @@
           </a:p>
         </p:txBody>
       </p:sp>
-      <p:sp>
-        <p:nvSpPr>
-          <p:cNvPr id="8" name="Rounded Rectangle 7"/>
+      <p:pic>
+        <p:nvPicPr>
+          <p:cNvPr id="8" name="Picture 7" descr="pv.png"/>
+          <p:cNvPicPr>
+            <a:picLocks noChangeAspect="1"/>
+          </p:cNvPicPr>
+          <p:nvPr/>
+        </p:nvPicPr>
+        <p:blipFill>
+          <a:blip r:embed="rId2"/>
+          <a:stretch>
+            <a:fillRect/>
+          </a:stretch>
+        </p:blipFill>
+        <p:spPr>
+          <a:xfrm>
+            <a:off x="10932000" y="275000"/>
+            <a:ext cx="640000" cy="640000"/>
+          </a:xfrm>
+          <a:prstGeom prst="rect">
+            <a:avLst/>
+          </a:prstGeom>
+        </p:spPr>
+      </p:pic>
+      <p:sp>
+        <p:nvSpPr>
+          <p:cNvPr id="9" name="Rounded Rectangle 8"/>
           <p:cNvSpPr/>
           <p:nvPr/>
         </p:nvSpPr>
         <p:spPr>
           <a:xfrm>
-            <a:off x="620000" y="1790000"/>
-            <a:ext cx="2070400" cy="720000"/>
+            <a:off x="620000" y="1830000"/>
+            <a:ext cx="2022400" cy="760000"/>
           </a:xfrm>
           <a:prstGeom prst="roundRect">
             <a:avLst>
-              <a:gd name="adj" fmla="val 12000"/>
+              <a:gd name="adj" fmla="val 11000"/>
             </a:avLst>
           </a:prstGeom>
           <a:solidFill>
@@ -4524,60 +4498,14 @@
       </p:sp>
       <p:sp>
         <p:nvSpPr>
-          <p:cNvPr id="9" name="TextBox 8"/>
-          <p:cNvSpPr txBox="1"/>
-          <p:nvPr/>
-        </p:nvSpPr>
-        <p:spPr>
-          <a:xfrm>
-            <a:off x="690000" y="1790000"/>
-            <a:ext cx="1930400" cy="720000"/>
-          </a:xfrm>
-          <a:prstGeom prst="rect">
-            <a:avLst/>
-          </a:prstGeom>
-          <a:noFill/>
-        </p:spPr>
-        <p:txBody>
-          <a:bodyPr wrap="square" anchor="ctr" lIns="0" rIns="0" tIns="0" bIns="0">
-            <a:noAutofit/>
-          </a:bodyPr>
-          <a:lstStyle/>
-          <a:p>
-            <a:pPr algn="ctr" marL="0" indent="0">
-              <a:lnSpc>
-                <a:spcPct val="112000"/>
-              </a:lnSpc>
-              <a:spcBef>
-                <a:spcPts val="0"/>
-              </a:spcBef>
-              <a:spcAft>
-                <a:spcPts val="0"/>
-              </a:spcAft>
-              <a:buNone/>
-            </a:pPr>
-            <a:r>
-              <a:rPr sz="1100" b="1" i="0">
-                <a:solidFill>
-                  <a:srgbClr val="F3F6FC"/>
-                </a:solidFill>
-                <a:latin typeface="Segoe UI Semibold"/>
-              </a:rPr>
-              <a:t>StorageClass</a:t>
-            </a:r>
-          </a:p>
-        </p:txBody>
-      </p:sp>
-      <p:sp>
-        <p:nvSpPr>
           <p:cNvPr id="10" name="TextBox 9"/>
           <p:cNvSpPr txBox="1"/>
           <p:nvPr/>
         </p:nvSpPr>
         <p:spPr>
           <a:xfrm>
-            <a:off x="2650400" y="1790000"/>
-            <a:ext cx="230000" cy="720000"/>
+            <a:off x="690000" y="1830000"/>
+            <a:ext cx="1882400" cy="760000"/>
           </a:xfrm>
           <a:prstGeom prst="rect">
             <a:avLst/>
@@ -4592,42 +4520,79 @@
           <a:p>
             <a:pPr algn="ctr" marL="0" indent="0">
               <a:lnSpc>
-                <a:spcPct val="100000"/>
-              </a:lnSpc>
-              <a:spcBef>
-                <a:spcPts val="0"/>
-              </a:spcBef>
-              <a:spcAft>
-                <a:spcPts val="0"/>
-              </a:spcAft>
-              <a:buNone/>
-            </a:pPr>
-            <a:r>
-              <a:rPr sz="1500" b="0" i="0">
-                <a:solidFill>
-                  <a:srgbClr val="74A6FF"/>
-                </a:solidFill>
-                <a:latin typeface="Segoe UI"/>
-              </a:rPr>
-              <a:t>→</a:t>
-            </a:r>
-          </a:p>
-        </p:txBody>
-      </p:sp>
-      <p:sp>
-        <p:nvSpPr>
-          <p:cNvPr id="11" name="Rounded Rectangle 10"/>
+                <a:spcPct val="112000"/>
+              </a:lnSpc>
+              <a:spcBef>
+                <a:spcPts val="0"/>
+              </a:spcBef>
+              <a:spcAft>
+                <a:spcPts val="0"/>
+              </a:spcAft>
+              <a:buNone/>
+            </a:pPr>
+            <a:r>
+              <a:rPr sz="1100" b="1" i="0">
+                <a:solidFill>
+                  <a:srgbClr val="F3F6FC"/>
+                </a:solidFill>
+                <a:latin typeface="Segoe UI Semibold"/>
+              </a:rPr>
+              <a:t>StorageClass</a:t>
+            </a:r>
+          </a:p>
+        </p:txBody>
+      </p:sp>
+      <p:cxnSp>
+        <p:nvCxnSpPr>
+          <p:cNvPr id="11" name="Connector 10"/>
+          <p:cNvCxnSpPr/>
+          <p:nvPr/>
+        </p:nvCxnSpPr>
+        <p:spPr>
+          <a:xfrm>
+            <a:off x="2666400" y="2210000"/>
+            <a:ext cx="162000" cy="0"/>
+          </a:xfrm>
+          <a:prstGeom prst="line">
+            <a:avLst/>
+          </a:prstGeom>
+          <a:ln w="22225">
+            <a:solidFill>
+              <a:srgbClr val="74A6FF"/>
+            </a:solidFill>
+            <a:tailEnd type="triangle" w="med" len="med"/>
+          </a:ln>
+          <a:effectLst/>
+        </p:spPr>
+        <p:style>
+          <a:lnRef idx="2">
+            <a:schemeClr val="accent1"/>
+          </a:lnRef>
+          <a:fillRef idx="0">
+            <a:schemeClr val="accent1"/>
+          </a:fillRef>
+          <a:effectRef idx="1">
+            <a:schemeClr val="accent1"/>
+          </a:effectRef>
+          <a:fontRef idx="minor">
+            <a:schemeClr val="tx1"/>
+          </a:fontRef>
+        </p:style>
+      </p:cxnSp>
+      <p:sp>
+        <p:nvSpPr>
+          <p:cNvPr id="12" name="Rounded Rectangle 11"/>
           <p:cNvSpPr/>
           <p:nvPr/>
         </p:nvSpPr>
         <p:spPr>
           <a:xfrm>
-            <a:off x="2840400" y="1790000"/>
-            <a:ext cx="2070400" cy="720000"/>
+            <a:off x="2852400" y="1830000"/>
+            <a:ext cx="2022400" cy="760000"/>
           </a:xfrm>
           <a:prstGeom prst="roundRect">
             <a:avLst>
-              <a:gd name="adj" fmla="val 12000"/>
+              <a:gd name="adj" fmla="val 11000"/>
             </a:avLst>
           </a:prstGeom>
           <a:solidFill>
@@ -4666,60 +4631,14 @@
       </p:sp>
       <p:sp>
         <p:nvSpPr>
-          <p:cNvPr id="12" name="TextBox 11"/>
-          <p:cNvSpPr txBox="1"/>
-          <p:nvPr/>
-        </p:nvSpPr>
-        <p:spPr>
-          <a:xfrm>
-            <a:off x="2910400" y="1790000"/>
-            <a:ext cx="1930400" cy="720000"/>
-          </a:xfrm>
-          <a:prstGeom prst="rect">
-            <a:avLst/>
-          </a:prstGeom>
-          <a:noFill/>
-        </p:spPr>
-        <p:txBody>
-          <a:bodyPr wrap="square" anchor="ctr" lIns="0" rIns="0" tIns="0" bIns="0">
-            <a:noAutofit/>
-          </a:bodyPr>
-          <a:lstStyle/>
-          <a:p>
-            <a:pPr algn="ctr" marL="0" indent="0">
-              <a:lnSpc>
-                <a:spcPct val="112000"/>
-              </a:lnSpc>
-              <a:spcBef>
-                <a:spcPts val="0"/>
-              </a:spcBef>
-              <a:spcAft>
-                <a:spcPts val="0"/>
-              </a:spcAft>
-              <a:buNone/>
-            </a:pPr>
-            <a:r>
-              <a:rPr sz="1100" b="1" i="0">
-                <a:solidFill>
-                  <a:srgbClr val="F3F6FC"/>
-                </a:solidFill>
-                <a:latin typeface="Segoe UI Semibold"/>
-              </a:rPr>
-              <a:t>PersistentVolume</a:t>
-            </a:r>
-          </a:p>
-        </p:txBody>
-      </p:sp>
-      <p:sp>
-        <p:nvSpPr>
           <p:cNvPr id="13" name="TextBox 12"/>
           <p:cNvSpPr txBox="1"/>
           <p:nvPr/>
         </p:nvSpPr>
         <p:spPr>
           <a:xfrm>
-            <a:off x="4870800" y="1790000"/>
-            <a:ext cx="230000" cy="720000"/>
+            <a:off x="2922400" y="1830000"/>
+            <a:ext cx="1882400" cy="760000"/>
           </a:xfrm>
           <a:prstGeom prst="rect">
             <a:avLst/>
@@ -4734,42 +4653,79 @@
           <a:p>
             <a:pPr algn="ctr" marL="0" indent="0">
               <a:lnSpc>
-                <a:spcPct val="100000"/>
-              </a:lnSpc>
-              <a:spcBef>
-                <a:spcPts val="0"/>
-              </a:spcBef>
-              <a:spcAft>
-                <a:spcPts val="0"/>
-              </a:spcAft>
-              <a:buNone/>
-            </a:pPr>
-            <a:r>
-              <a:rPr sz="1500" b="0" i="0">
-                <a:solidFill>
-                  <a:srgbClr val="74A6FF"/>
-                </a:solidFill>
-                <a:latin typeface="Segoe UI"/>
-              </a:rPr>
-              <a:t>→</a:t>
-            </a:r>
-          </a:p>
-        </p:txBody>
-      </p:sp>
-      <p:sp>
-        <p:nvSpPr>
-          <p:cNvPr id="14" name="Rounded Rectangle 13"/>
+                <a:spcPct val="112000"/>
+              </a:lnSpc>
+              <a:spcBef>
+                <a:spcPts val="0"/>
+              </a:spcBef>
+              <a:spcAft>
+                <a:spcPts val="0"/>
+              </a:spcAft>
+              <a:buNone/>
+            </a:pPr>
+            <a:r>
+              <a:rPr sz="1100" b="1" i="0">
+                <a:solidFill>
+                  <a:srgbClr val="F3F6FC"/>
+                </a:solidFill>
+                <a:latin typeface="Segoe UI Semibold"/>
+              </a:rPr>
+              <a:t>PersistentVolume</a:t>
+            </a:r>
+          </a:p>
+        </p:txBody>
+      </p:sp>
+      <p:cxnSp>
+        <p:nvCxnSpPr>
+          <p:cNvPr id="14" name="Connector 13"/>
+          <p:cNvCxnSpPr/>
+          <p:nvPr/>
+        </p:nvCxnSpPr>
+        <p:spPr>
+          <a:xfrm>
+            <a:off x="4898800" y="2210000"/>
+            <a:ext cx="162000" cy="0"/>
+          </a:xfrm>
+          <a:prstGeom prst="line">
+            <a:avLst/>
+          </a:prstGeom>
+          <a:ln w="22225">
+            <a:solidFill>
+              <a:srgbClr val="74A6FF"/>
+            </a:solidFill>
+            <a:tailEnd type="triangle" w="med" len="med"/>
+          </a:ln>
+          <a:effectLst/>
+        </p:spPr>
+        <p:style>
+          <a:lnRef idx="2">
+            <a:schemeClr val="accent1"/>
+          </a:lnRef>
+          <a:fillRef idx="0">
+            <a:schemeClr val="accent1"/>
+          </a:fillRef>
+          <a:effectRef idx="1">
+            <a:schemeClr val="accent1"/>
+          </a:effectRef>
+          <a:fontRef idx="minor">
+            <a:schemeClr val="tx1"/>
+          </a:fontRef>
+        </p:style>
+      </p:cxnSp>
+      <p:sp>
+        <p:nvSpPr>
+          <p:cNvPr id="15" name="Rounded Rectangle 14"/>
           <p:cNvSpPr/>
           <p:nvPr/>
         </p:nvSpPr>
         <p:spPr>
           <a:xfrm>
-            <a:off x="5060800" y="1790000"/>
-            <a:ext cx="2070400" cy="720000"/>
+            <a:off x="5084800" y="1830000"/>
+            <a:ext cx="2022400" cy="760000"/>
           </a:xfrm>
           <a:prstGeom prst="roundRect">
             <a:avLst>
-              <a:gd name="adj" fmla="val 12000"/>
+              <a:gd name="adj" fmla="val 11000"/>
             </a:avLst>
           </a:prstGeom>
           <a:solidFill>
@@ -4808,60 +4764,14 @@
       </p:sp>
       <p:sp>
         <p:nvSpPr>
-          <p:cNvPr id="15" name="TextBox 14"/>
-          <p:cNvSpPr txBox="1"/>
-          <p:nvPr/>
-        </p:nvSpPr>
-        <p:spPr>
-          <a:xfrm>
-            <a:off x="5130800" y="1790000"/>
-            <a:ext cx="1930400" cy="720000"/>
-          </a:xfrm>
-          <a:prstGeom prst="rect">
-            <a:avLst/>
-          </a:prstGeom>
-          <a:noFill/>
-        </p:spPr>
-        <p:txBody>
-          <a:bodyPr wrap="square" anchor="ctr" lIns="0" rIns="0" tIns="0" bIns="0">
-            <a:noAutofit/>
-          </a:bodyPr>
-          <a:lstStyle/>
-          <a:p>
-            <a:pPr algn="ctr" marL="0" indent="0">
-              <a:lnSpc>
-                <a:spcPct val="112000"/>
-              </a:lnSpc>
-              <a:spcBef>
-                <a:spcPts val="0"/>
-              </a:spcBef>
-              <a:spcAft>
-                <a:spcPts val="0"/>
-              </a:spcAft>
-              <a:buNone/>
-            </a:pPr>
-            <a:r>
-              <a:rPr sz="1100" b="1" i="0">
-                <a:solidFill>
-                  <a:srgbClr val="F3F6FC"/>
-                </a:solidFill>
-                <a:latin typeface="Segoe UI Semibold"/>
-              </a:rPr>
-              <a:t>PersistentVolumeClaim</a:t>
-            </a:r>
-          </a:p>
-        </p:txBody>
-      </p:sp>
-      <p:sp>
-        <p:nvSpPr>
           <p:cNvPr id="16" name="TextBox 15"/>
           <p:cNvSpPr txBox="1"/>
           <p:nvPr/>
         </p:nvSpPr>
         <p:spPr>
           <a:xfrm>
-            <a:off x="7091200" y="1790000"/>
-            <a:ext cx="230000" cy="720000"/>
+            <a:off x="5154800" y="1830000"/>
+            <a:ext cx="1882400" cy="760000"/>
           </a:xfrm>
           <a:prstGeom prst="rect">
             <a:avLst/>
@@ -4876,42 +4786,79 @@
           <a:p>
             <a:pPr algn="ctr" marL="0" indent="0">
               <a:lnSpc>
-                <a:spcPct val="100000"/>
-              </a:lnSpc>
-              <a:spcBef>
-                <a:spcPts val="0"/>
-              </a:spcBef>
-              <a:spcAft>
-                <a:spcPts val="0"/>
-              </a:spcAft>
-              <a:buNone/>
-            </a:pPr>
-            <a:r>
-              <a:rPr sz="1500" b="0" i="0">
-                <a:solidFill>
-                  <a:srgbClr val="74A6FF"/>
-                </a:solidFill>
-                <a:latin typeface="Segoe UI"/>
-              </a:rPr>
-              <a:t>→</a:t>
-            </a:r>
-          </a:p>
-        </p:txBody>
-      </p:sp>
-      <p:sp>
-        <p:nvSpPr>
-          <p:cNvPr id="17" name="Rounded Rectangle 16"/>
+                <a:spcPct val="112000"/>
+              </a:lnSpc>
+              <a:spcBef>
+                <a:spcPts val="0"/>
+              </a:spcBef>
+              <a:spcAft>
+                <a:spcPts val="0"/>
+              </a:spcAft>
+              <a:buNone/>
+            </a:pPr>
+            <a:r>
+              <a:rPr sz="1100" b="1" i="0">
+                <a:solidFill>
+                  <a:srgbClr val="F3F6FC"/>
+                </a:solidFill>
+                <a:latin typeface="Segoe UI Semibold"/>
+              </a:rPr>
+              <a:t>PersistentVolumeClaim</a:t>
+            </a:r>
+          </a:p>
+        </p:txBody>
+      </p:sp>
+      <p:cxnSp>
+        <p:nvCxnSpPr>
+          <p:cNvPr id="17" name="Connector 16"/>
+          <p:cNvCxnSpPr/>
+          <p:nvPr/>
+        </p:nvCxnSpPr>
+        <p:spPr>
+          <a:xfrm>
+            <a:off x="7131200" y="2210000"/>
+            <a:ext cx="162000" cy="0"/>
+          </a:xfrm>
+          <a:prstGeom prst="line">
+            <a:avLst/>
+          </a:prstGeom>
+          <a:ln w="22225">
+            <a:solidFill>
+              <a:srgbClr val="74A6FF"/>
+            </a:solidFill>
+            <a:tailEnd type="triangle" w="med" len="med"/>
+          </a:ln>
+          <a:effectLst/>
+        </p:spPr>
+        <p:style>
+          <a:lnRef idx="2">
+            <a:schemeClr val="accent1"/>
+          </a:lnRef>
+          <a:fillRef idx="0">
+            <a:schemeClr val="accent1"/>
+          </a:fillRef>
+          <a:effectRef idx="1">
+            <a:schemeClr val="accent1"/>
+          </a:effectRef>
+          <a:fontRef idx="minor">
+            <a:schemeClr val="tx1"/>
+          </a:fontRef>
+        </p:style>
+      </p:cxnSp>
+      <p:sp>
+        <p:nvSpPr>
+          <p:cNvPr id="18" name="Rounded Rectangle 17"/>
           <p:cNvSpPr/>
           <p:nvPr/>
         </p:nvSpPr>
         <p:spPr>
           <a:xfrm>
-            <a:off x="7281200" y="1790000"/>
-            <a:ext cx="2070400" cy="720000"/>
+            <a:off x="7317200" y="1830000"/>
+            <a:ext cx="2022400" cy="760000"/>
           </a:xfrm>
           <a:prstGeom prst="roundRect">
             <a:avLst>
-              <a:gd name="adj" fmla="val 12000"/>
+              <a:gd name="adj" fmla="val 11000"/>
             </a:avLst>
           </a:prstGeom>
           <a:solidFill>
@@ -4950,60 +4897,14 @@
       </p:sp>
       <p:sp>
         <p:nvSpPr>
-          <p:cNvPr id="18" name="TextBox 17"/>
-          <p:cNvSpPr txBox="1"/>
-          <p:nvPr/>
-        </p:nvSpPr>
-        <p:spPr>
-          <a:xfrm>
-            <a:off x="7351200" y="1790000"/>
-            <a:ext cx="1930400" cy="720000"/>
-          </a:xfrm>
-          <a:prstGeom prst="rect">
-            <a:avLst/>
-          </a:prstGeom>
-          <a:noFill/>
-        </p:spPr>
-        <p:txBody>
-          <a:bodyPr wrap="square" anchor="ctr" lIns="0" rIns="0" tIns="0" bIns="0">
-            <a:noAutofit/>
-          </a:bodyPr>
-          <a:lstStyle/>
-          <a:p>
-            <a:pPr algn="ctr" marL="0" indent="0">
-              <a:lnSpc>
-                <a:spcPct val="112000"/>
-              </a:lnSpc>
-              <a:spcBef>
-                <a:spcPts val="0"/>
-              </a:spcBef>
-              <a:spcAft>
-                <a:spcPts val="0"/>
-              </a:spcAft>
-              <a:buNone/>
-            </a:pPr>
-            <a:r>
-              <a:rPr sz="1100" b="1" i="0">
-                <a:solidFill>
-                  <a:srgbClr val="F3F6FC"/>
-                </a:solidFill>
-                <a:latin typeface="Segoe UI Semibold"/>
-              </a:rPr>
-              <a:t>Pod</a:t>
-            </a:r>
-          </a:p>
-        </p:txBody>
-      </p:sp>
-      <p:sp>
-        <p:nvSpPr>
           <p:cNvPr id="19" name="TextBox 18"/>
           <p:cNvSpPr txBox="1"/>
           <p:nvPr/>
         </p:nvSpPr>
         <p:spPr>
           <a:xfrm>
-            <a:off x="9311600" y="1790000"/>
-            <a:ext cx="230000" cy="720000"/>
+            <a:off x="7387200" y="1830000"/>
+            <a:ext cx="1882400" cy="760000"/>
           </a:xfrm>
           <a:prstGeom prst="rect">
             <a:avLst/>
@@ -5018,42 +4919,79 @@
           <a:p>
             <a:pPr algn="ctr" marL="0" indent="0">
               <a:lnSpc>
-                <a:spcPct val="100000"/>
-              </a:lnSpc>
-              <a:spcBef>
-                <a:spcPts val="0"/>
-              </a:spcBef>
-              <a:spcAft>
-                <a:spcPts val="0"/>
-              </a:spcAft>
-              <a:buNone/>
-            </a:pPr>
-            <a:r>
-              <a:rPr sz="1500" b="0" i="0">
-                <a:solidFill>
-                  <a:srgbClr val="74A6FF"/>
-                </a:solidFill>
-                <a:latin typeface="Segoe UI"/>
-              </a:rPr>
-              <a:t>→</a:t>
-            </a:r>
-          </a:p>
-        </p:txBody>
-      </p:sp>
-      <p:sp>
-        <p:nvSpPr>
-          <p:cNvPr id="20" name="Rounded Rectangle 19"/>
+                <a:spcPct val="112000"/>
+              </a:lnSpc>
+              <a:spcBef>
+                <a:spcPts val="0"/>
+              </a:spcBef>
+              <a:spcAft>
+                <a:spcPts val="0"/>
+              </a:spcAft>
+              <a:buNone/>
+            </a:pPr>
+            <a:r>
+              <a:rPr sz="1100" b="1" i="0">
+                <a:solidFill>
+                  <a:srgbClr val="F3F6FC"/>
+                </a:solidFill>
+                <a:latin typeface="Segoe UI Semibold"/>
+              </a:rPr>
+              <a:t>Pod</a:t>
+            </a:r>
+          </a:p>
+        </p:txBody>
+      </p:sp>
+      <p:cxnSp>
+        <p:nvCxnSpPr>
+          <p:cNvPr id="20" name="Connector 19"/>
+          <p:cNvCxnSpPr/>
+          <p:nvPr/>
+        </p:nvCxnSpPr>
+        <p:spPr>
+          <a:xfrm>
+            <a:off x="9363600" y="2210000"/>
+            <a:ext cx="162000" cy="0"/>
+          </a:xfrm>
+          <a:prstGeom prst="line">
+            <a:avLst/>
+          </a:prstGeom>
+          <a:ln w="22225">
+            <a:solidFill>
+              <a:srgbClr val="74A6FF"/>
+            </a:solidFill>
+            <a:tailEnd type="triangle" w="med" len="med"/>
+          </a:ln>
+          <a:effectLst/>
+        </p:spPr>
+        <p:style>
+          <a:lnRef idx="2">
+            <a:schemeClr val="accent1"/>
+          </a:lnRef>
+          <a:fillRef idx="0">
+            <a:schemeClr val="accent1"/>
+          </a:fillRef>
+          <a:effectRef idx="1">
+            <a:schemeClr val="accent1"/>
+          </a:effectRef>
+          <a:fontRef idx="minor">
+            <a:schemeClr val="tx1"/>
+          </a:fontRef>
+        </p:style>
+      </p:cxnSp>
+      <p:sp>
+        <p:nvSpPr>
+          <p:cNvPr id="21" name="Rounded Rectangle 20"/>
           <p:cNvSpPr/>
           <p:nvPr/>
         </p:nvSpPr>
         <p:spPr>
           <a:xfrm>
-            <a:off x="9501600" y="1790000"/>
-            <a:ext cx="2070400" cy="720000"/>
+            <a:off x="9549600" y="1830000"/>
+            <a:ext cx="2022400" cy="760000"/>
           </a:xfrm>
           <a:prstGeom prst="roundRect">
             <a:avLst>
-              <a:gd name="adj" fmla="val 12000"/>
+              <a:gd name="adj" fmla="val 11000"/>
             </a:avLst>
           </a:prstGeom>
           <a:solidFill>
@@ -5092,14 +5030,14 @@
       </p:sp>
       <p:sp>
         <p:nvSpPr>
-          <p:cNvPr id="21" name="TextBox 20"/>
+          <p:cNvPr id="22" name="TextBox 21"/>
           <p:cNvSpPr txBox="1"/>
           <p:nvPr/>
         </p:nvSpPr>
         <p:spPr>
           <a:xfrm>
-            <a:off x="9571600" y="1790000"/>
-            <a:ext cx="1930400" cy="720000"/>
+            <a:off x="9619600" y="1830000"/>
+            <a:ext cx="1882400" cy="760000"/>
           </a:xfrm>
           <a:prstGeom prst="rect">
             <a:avLst/>
@@ -5138,13 +5076,13 @@
       </p:sp>
       <p:sp>
         <p:nvSpPr>
-          <p:cNvPr id="22" name="Rounded Rectangle 21"/>
+          <p:cNvPr id="23" name="Rounded Rectangle 22"/>
           <p:cNvSpPr/>
           <p:nvPr/>
         </p:nvSpPr>
         <p:spPr>
           <a:xfrm>
-            <a:off x="620000" y="2830000"/>
+            <a:off x="620000" y="2950000"/>
             <a:ext cx="10952000" cy="1820000"/>
           </a:xfrm>
           <a:prstGeom prst="roundRect">
@@ -5188,13 +5126,13 @@
       </p:sp>
       <p:sp>
         <p:nvSpPr>
-          <p:cNvPr id="23" name="Rectangle 22"/>
+          <p:cNvPr id="24" name="Rectangle 23"/>
           <p:cNvSpPr/>
           <p:nvPr/>
         </p:nvSpPr>
         <p:spPr>
           <a:xfrm>
-            <a:off x="650000" y="2854000"/>
+            <a:off x="650000" y="2974000"/>
             <a:ext cx="40000" cy="1772000"/>
           </a:xfrm>
           <a:prstGeom prst="rect">
@@ -5234,13 +5172,13 @@
       </p:sp>
       <p:sp>
         <p:nvSpPr>
-          <p:cNvPr id="24" name="TextBox 23"/>
+          <p:cNvPr id="25" name="TextBox 24"/>
           <p:cNvSpPr txBox="1"/>
           <p:nvPr/>
         </p:nvSpPr>
         <p:spPr>
           <a:xfrm>
-            <a:off x="880000" y="3070000"/>
+            <a:off x="880000" y="3190000"/>
             <a:ext cx="10432000" cy="1420000"/>
           </a:xfrm>
           <a:prstGeom prst="rect">
@@ -5455,7 +5393,7 @@
         <p:spPr>
           <a:xfrm>
             <a:off x="620000" y="560000"/>
-            <a:ext cx="10952000" cy="620000"/>
+            <a:ext cx="10052000" cy="620000"/>
           </a:xfrm>
           <a:prstGeom prst="rect">
             <a:avLst/>
@@ -5676,9 +5614,33 @@
           </a:p>
         </p:txBody>
       </p:sp>
-      <p:sp>
-        <p:nvSpPr>
-          <p:cNvPr id="8" name="Rectangle 7"/>
+      <p:pic>
+        <p:nvPicPr>
+          <p:cNvPr id="8" name="Picture 7" descr="pv.png"/>
+          <p:cNvPicPr>
+            <a:picLocks noChangeAspect="1"/>
+          </p:cNvPicPr>
+          <p:nvPr/>
+        </p:nvPicPr>
+        <p:blipFill>
+          <a:blip r:embed="rId2"/>
+          <a:stretch>
+            <a:fillRect/>
+          </a:stretch>
+        </p:blipFill>
+        <p:spPr>
+          <a:xfrm>
+            <a:off x="10932000" y="275000"/>
+            <a:ext cx="640000" cy="640000"/>
+          </a:xfrm>
+          <a:prstGeom prst="rect">
+            <a:avLst/>
+          </a:prstGeom>
+        </p:spPr>
+      </p:pic>
+      <p:sp>
+        <p:nvSpPr>
+          <p:cNvPr id="9" name="Rectangle 8"/>
           <p:cNvSpPr/>
           <p:nvPr/>
         </p:nvSpPr>
@@ -5724,7 +5686,7 @@
       </p:sp>
       <p:sp>
         <p:nvSpPr>
-          <p:cNvPr id="9" name="Rectangle 8"/>
+          <p:cNvPr id="10" name="Rectangle 9"/>
           <p:cNvSpPr/>
           <p:nvPr/>
         </p:nvSpPr>
@@ -5770,7 +5732,7 @@
       </p:sp>
       <p:sp>
         <p:nvSpPr>
-          <p:cNvPr id="10" name="TextBox 9"/>
+          <p:cNvPr id="11" name="TextBox 10"/>
           <p:cNvSpPr txBox="1"/>
           <p:nvPr/>
         </p:nvSpPr>
@@ -5816,7 +5778,7 @@
       </p:sp>
       <p:sp>
         <p:nvSpPr>
-          <p:cNvPr id="11" name="TextBox 10"/>
+          <p:cNvPr id="12" name="TextBox 11"/>
           <p:cNvSpPr txBox="1"/>
           <p:nvPr/>
         </p:nvSpPr>
@@ -5862,7 +5824,7 @@
       </p:sp>
       <p:sp>
         <p:nvSpPr>
-          <p:cNvPr id="12" name="TextBox 11"/>
+          <p:cNvPr id="13" name="TextBox 12"/>
           <p:cNvSpPr txBox="1"/>
           <p:nvPr/>
         </p:nvSpPr>
@@ -5908,7 +5870,7 @@
       </p:sp>
       <p:sp>
         <p:nvSpPr>
-          <p:cNvPr id="13" name="Rectangle 12"/>
+          <p:cNvPr id="14" name="Rectangle 13"/>
           <p:cNvSpPr/>
           <p:nvPr/>
         </p:nvSpPr>
@@ -5954,7 +5916,7 @@
       </p:sp>
       <p:sp>
         <p:nvSpPr>
-          <p:cNvPr id="14" name="TextBox 13"/>
+          <p:cNvPr id="15" name="TextBox 14"/>
           <p:cNvSpPr txBox="1"/>
           <p:nvPr/>
         </p:nvSpPr>
@@ -6000,7 +5962,7 @@
       </p:sp>
       <p:sp>
         <p:nvSpPr>
-          <p:cNvPr id="15" name="TextBox 14"/>
+          <p:cNvPr id="16" name="TextBox 15"/>
           <p:cNvSpPr txBox="1"/>
           <p:nvPr/>
         </p:nvSpPr>
@@ -6046,7 +6008,7 @@
       </p:sp>
       <p:sp>
         <p:nvSpPr>
-          <p:cNvPr id="16" name="TextBox 15"/>
+          <p:cNvPr id="17" name="TextBox 16"/>
           <p:cNvSpPr txBox="1"/>
           <p:nvPr/>
         </p:nvSpPr>
@@ -6092,7 +6054,7 @@
       </p:sp>
       <p:sp>
         <p:nvSpPr>
-          <p:cNvPr id="17" name="Rectangle 16"/>
+          <p:cNvPr id="18" name="Rectangle 17"/>
           <p:cNvSpPr/>
           <p:nvPr/>
         </p:nvSpPr>
@@ -6138,7 +6100,7 @@
       </p:sp>
       <p:sp>
         <p:nvSpPr>
-          <p:cNvPr id="18" name="Rectangle 17"/>
+          <p:cNvPr id="19" name="Rectangle 18"/>
           <p:cNvSpPr/>
           <p:nvPr/>
         </p:nvSpPr>
@@ -6184,7 +6146,7 @@
       </p:sp>
       <p:sp>
         <p:nvSpPr>
-          <p:cNvPr id="19" name="TextBox 18"/>
+          <p:cNvPr id="20" name="TextBox 19"/>
           <p:cNvSpPr txBox="1"/>
           <p:nvPr/>
         </p:nvSpPr>
@@ -6230,7 +6192,7 @@
       </p:sp>
       <p:sp>
         <p:nvSpPr>
-          <p:cNvPr id="20" name="TextBox 19"/>
+          <p:cNvPr id="21" name="TextBox 20"/>
           <p:cNvSpPr txBox="1"/>
           <p:nvPr/>
         </p:nvSpPr>
@@ -6276,7 +6238,7 @@
       </p:sp>
       <p:sp>
         <p:nvSpPr>
-          <p:cNvPr id="21" name="TextBox 20"/>
+          <p:cNvPr id="22" name="TextBox 21"/>
           <p:cNvSpPr txBox="1"/>
           <p:nvPr/>
         </p:nvSpPr>
@@ -6322,7 +6284,7 @@
       </p:sp>
       <p:sp>
         <p:nvSpPr>
-          <p:cNvPr id="22" name="Rectangle 21"/>
+          <p:cNvPr id="23" name="Rectangle 22"/>
           <p:cNvSpPr/>
           <p:nvPr/>
         </p:nvSpPr>
@@ -6368,7 +6330,7 @@
       </p:sp>
       <p:sp>
         <p:nvSpPr>
-          <p:cNvPr id="23" name="TextBox 22"/>
+          <p:cNvPr id="24" name="TextBox 23"/>
           <p:cNvSpPr txBox="1"/>
           <p:nvPr/>
         </p:nvSpPr>
@@ -6414,7 +6376,7 @@
       </p:sp>
       <p:sp>
         <p:nvSpPr>
-          <p:cNvPr id="24" name="TextBox 23"/>
+          <p:cNvPr id="25" name="TextBox 24"/>
           <p:cNvSpPr txBox="1"/>
           <p:nvPr/>
         </p:nvSpPr>
@@ -6460,7 +6422,7 @@
       </p:sp>
       <p:sp>
         <p:nvSpPr>
-          <p:cNvPr id="25" name="TextBox 24"/>
+          <p:cNvPr id="26" name="TextBox 25"/>
           <p:cNvSpPr txBox="1"/>
           <p:nvPr/>
         </p:nvSpPr>
@@ -6506,7 +6468,7 @@
       </p:sp>
       <p:sp>
         <p:nvSpPr>
-          <p:cNvPr id="26" name="Rectangle 25"/>
+          <p:cNvPr id="27" name="Rectangle 26"/>
           <p:cNvSpPr/>
           <p:nvPr/>
         </p:nvSpPr>
@@ -6552,7 +6514,7 @@
       </p:sp>
       <p:sp>
         <p:nvSpPr>
-          <p:cNvPr id="27" name="Rectangle 26"/>
+          <p:cNvPr id="28" name="Rectangle 27"/>
           <p:cNvSpPr/>
           <p:nvPr/>
         </p:nvSpPr>
@@ -6598,7 +6560,7 @@
       </p:sp>
       <p:sp>
         <p:nvSpPr>
-          <p:cNvPr id="28" name="TextBox 27"/>
+          <p:cNvPr id="29" name="TextBox 28"/>
           <p:cNvSpPr txBox="1"/>
           <p:nvPr/>
         </p:nvSpPr>
@@ -6644,7 +6606,7 @@
       </p:sp>
       <p:sp>
         <p:nvSpPr>
-          <p:cNvPr id="29" name="TextBox 28"/>
+          <p:cNvPr id="30" name="TextBox 29"/>
           <p:cNvSpPr txBox="1"/>
           <p:nvPr/>
         </p:nvSpPr>
@@ -6690,7 +6652,7 @@
       </p:sp>
       <p:sp>
         <p:nvSpPr>
-          <p:cNvPr id="30" name="TextBox 29"/>
+          <p:cNvPr id="31" name="TextBox 30"/>
           <p:cNvSpPr txBox="1"/>
           <p:nvPr/>
         </p:nvSpPr>
@@ -6736,7 +6698,7 @@
       </p:sp>
       <p:sp>
         <p:nvSpPr>
-          <p:cNvPr id="31" name="Rectangle 30"/>
+          <p:cNvPr id="32" name="Rectangle 31"/>
           <p:cNvSpPr/>
           <p:nvPr/>
         </p:nvSpPr>
@@ -6782,7 +6744,7 @@
       </p:sp>
       <p:sp>
         <p:nvSpPr>
-          <p:cNvPr id="32" name="TextBox 31"/>
+          <p:cNvPr id="33" name="TextBox 32"/>
           <p:cNvSpPr txBox="1"/>
           <p:nvPr/>
         </p:nvSpPr>
@@ -6828,7 +6790,7 @@
       </p:sp>
       <p:sp>
         <p:nvSpPr>
-          <p:cNvPr id="33" name="TextBox 32"/>
+          <p:cNvPr id="34" name="TextBox 33"/>
           <p:cNvSpPr txBox="1"/>
           <p:nvPr/>
         </p:nvSpPr>
@@ -6874,7 +6836,7 @@
       </p:sp>
       <p:sp>
         <p:nvSpPr>
-          <p:cNvPr id="34" name="TextBox 33"/>
+          <p:cNvPr id="35" name="TextBox 34"/>
           <p:cNvSpPr txBox="1"/>
           <p:nvPr/>
         </p:nvSpPr>
@@ -6920,7 +6882,7 @@
       </p:sp>
       <p:sp>
         <p:nvSpPr>
-          <p:cNvPr id="35" name="Rounded Rectangle 34"/>
+          <p:cNvPr id="36" name="Rounded Rectangle 35"/>
           <p:cNvSpPr/>
           <p:nvPr/>
         </p:nvSpPr>
@@ -6970,7 +6932,7 @@
       </p:sp>
       <p:sp>
         <p:nvSpPr>
-          <p:cNvPr id="36" name="Rectangle 35"/>
+          <p:cNvPr id="37" name="Rectangle 36"/>
           <p:cNvSpPr/>
           <p:nvPr/>
         </p:nvSpPr>
@@ -7016,7 +6978,7 @@
       </p:sp>
       <p:sp>
         <p:nvSpPr>
-          <p:cNvPr id="37" name="TextBox 36"/>
+          <p:cNvPr id="38" name="TextBox 37"/>
           <p:cNvSpPr txBox="1"/>
           <p:nvPr/>
         </p:nvSpPr>
@@ -7141,7 +7103,7 @@
         <p:spPr>
           <a:xfrm>
             <a:off x="620000" y="560000"/>
-            <a:ext cx="10952000" cy="620000"/>
+            <a:ext cx="10052000" cy="620000"/>
           </a:xfrm>
           <a:prstGeom prst="rect">
             <a:avLst/>
@@ -7362,9 +7324,33 @@
           </a:p>
         </p:txBody>
       </p:sp>
-      <p:sp>
-        <p:nvSpPr>
-          <p:cNvPr id="8" name="Oval 7"/>
+      <p:pic>
+        <p:nvPicPr>
+          <p:cNvPr id="8" name="Picture 7" descr="pod.png"/>
+          <p:cNvPicPr>
+            <a:picLocks noChangeAspect="1"/>
+          </p:cNvPicPr>
+          <p:nvPr/>
+        </p:nvPicPr>
+        <p:blipFill>
+          <a:blip r:embed="rId2"/>
+          <a:stretch>
+            <a:fillRect/>
+          </a:stretch>
+        </p:blipFill>
+        <p:spPr>
+          <a:xfrm>
+            <a:off x="10932000" y="275000"/>
+            <a:ext cx="640000" cy="640000"/>
+          </a:xfrm>
+          <a:prstGeom prst="rect">
+            <a:avLst/>
+          </a:prstGeom>
+        </p:spPr>
+      </p:pic>
+      <p:sp>
+        <p:nvSpPr>
+          <p:cNvPr id="9" name="Oval 8"/>
           <p:cNvSpPr/>
           <p:nvPr/>
         </p:nvSpPr>
@@ -7408,7 +7394,7 @@
       </p:sp>
       <p:sp>
         <p:nvSpPr>
-          <p:cNvPr id="9" name="TextBox 8"/>
+          <p:cNvPr id="10" name="TextBox 9"/>
           <p:cNvSpPr txBox="1"/>
           <p:nvPr/>
         </p:nvSpPr>
@@ -7454,7 +7440,7 @@
       </p:sp>
       <p:sp>
         <p:nvSpPr>
-          <p:cNvPr id="10" name="Oval 9"/>
+          <p:cNvPr id="11" name="Oval 10"/>
           <p:cNvSpPr/>
           <p:nvPr/>
         </p:nvSpPr>
@@ -7498,7 +7484,7 @@
       </p:sp>
       <p:sp>
         <p:nvSpPr>
-          <p:cNvPr id="11" name="TextBox 10"/>
+          <p:cNvPr id="12" name="TextBox 11"/>
           <p:cNvSpPr txBox="1"/>
           <p:nvPr/>
         </p:nvSpPr>
@@ -7544,7 +7530,7 @@
       </p:sp>
       <p:sp>
         <p:nvSpPr>
-          <p:cNvPr id="12" name="Oval 11"/>
+          <p:cNvPr id="13" name="Oval 12"/>
           <p:cNvSpPr/>
           <p:nvPr/>
         </p:nvSpPr>
@@ -7588,7 +7574,7 @@
       </p:sp>
       <p:sp>
         <p:nvSpPr>
-          <p:cNvPr id="13" name="TextBox 12"/>
+          <p:cNvPr id="14" name="TextBox 13"/>
           <p:cNvSpPr txBox="1"/>
           <p:nvPr/>
         </p:nvSpPr>
@@ -7634,7 +7620,7 @@
       </p:sp>
       <p:sp>
         <p:nvSpPr>
-          <p:cNvPr id="14" name="Oval 13"/>
+          <p:cNvPr id="15" name="Oval 14"/>
           <p:cNvSpPr/>
           <p:nvPr/>
         </p:nvSpPr>
@@ -7678,7 +7664,7 @@
       </p:sp>
       <p:sp>
         <p:nvSpPr>
-          <p:cNvPr id="15" name="TextBox 14"/>
+          <p:cNvPr id="16" name="TextBox 15"/>
           <p:cNvSpPr txBox="1"/>
           <p:nvPr/>
         </p:nvSpPr>
@@ -7724,7 +7710,7 @@
       </p:sp>
       <p:sp>
         <p:nvSpPr>
-          <p:cNvPr id="16" name="Rounded Rectangle 15"/>
+          <p:cNvPr id="17" name="Rounded Rectangle 16"/>
           <p:cNvSpPr/>
           <p:nvPr/>
         </p:nvSpPr>
@@ -7774,7 +7760,7 @@
       </p:sp>
       <p:sp>
         <p:nvSpPr>
-          <p:cNvPr id="17" name="Rectangle 16"/>
+          <p:cNvPr id="18" name="Rectangle 17"/>
           <p:cNvSpPr/>
           <p:nvPr/>
         </p:nvSpPr>
@@ -7820,7 +7806,7 @@
       </p:sp>
       <p:sp>
         <p:nvSpPr>
-          <p:cNvPr id="18" name="TextBox 17"/>
+          <p:cNvPr id="19" name="TextBox 18"/>
           <p:cNvSpPr txBox="1"/>
           <p:nvPr/>
         </p:nvSpPr>
@@ -8017,7 +8003,7 @@
         <p:spPr>
           <a:xfrm>
             <a:off x="620000" y="560000"/>
-            <a:ext cx="10952000" cy="620000"/>
+            <a:ext cx="10052000" cy="620000"/>
           </a:xfrm>
           <a:prstGeom prst="rect">
             <a:avLst/>
@@ -8238,9 +8224,33 @@
           </a:p>
         </p:txBody>
       </p:sp>
-      <p:sp>
-        <p:nvSpPr>
-          <p:cNvPr id="8" name="TextBox 7"/>
+      <p:pic>
+        <p:nvPicPr>
+          <p:cNvPr id="8" name="Picture 7" descr="pod.png"/>
+          <p:cNvPicPr>
+            <a:picLocks noChangeAspect="1"/>
+          </p:cNvPicPr>
+          <p:nvPr/>
+        </p:nvPicPr>
+        <p:blipFill>
+          <a:blip r:embed="rId2"/>
+          <a:stretch>
+            <a:fillRect/>
+          </a:stretch>
+        </p:blipFill>
+        <p:spPr>
+          <a:xfrm>
+            <a:off x="10932000" y="275000"/>
+            <a:ext cx="640000" cy="640000"/>
+          </a:xfrm>
+          <a:prstGeom prst="rect">
+            <a:avLst/>
+          </a:prstGeom>
+        </p:spPr>
+      </p:pic>
+      <p:sp>
+        <p:nvSpPr>
+          <p:cNvPr id="9" name="TextBox 8"/>
           <p:cNvSpPr txBox="1"/>
           <p:nvPr/>
         </p:nvSpPr>
@@ -8286,7 +8296,7 @@
       </p:sp>
       <p:sp>
         <p:nvSpPr>
-          <p:cNvPr id="9" name="Rounded Rectangle 8"/>
+          <p:cNvPr id="10" name="Rounded Rectangle 9"/>
           <p:cNvSpPr/>
           <p:nvPr/>
         </p:nvSpPr>
@@ -8336,7 +8346,7 @@
       </p:sp>
       <p:sp>
         <p:nvSpPr>
-          <p:cNvPr id="10" name="Rectangle 9"/>
+          <p:cNvPr id="11" name="Rectangle 10"/>
           <p:cNvSpPr/>
           <p:nvPr/>
         </p:nvSpPr>
@@ -8382,7 +8392,7 @@
       </p:sp>
       <p:sp>
         <p:nvSpPr>
-          <p:cNvPr id="11" name="TextBox 10"/>
+          <p:cNvPr id="12" name="TextBox 11"/>
           <p:cNvSpPr txBox="1"/>
           <p:nvPr/>
         </p:nvSpPr>
@@ -9123,7 +9133,149 @@
       </p:sp>
       <p:sp>
         <p:nvSpPr>
-          <p:cNvPr id="14" name="Rounded Rectangle 13"/>
+          <p:cNvPr id="14" name="Freeform 13"/>
+          <p:cNvSpPr/>
+          <p:nvPr/>
+        </p:nvSpPr>
+        <p:spPr>
+          <a:xfrm>
+            <a:off x="9590000" y="1418800"/>
+            <a:ext cx="784000" cy="842800"/>
+          </a:xfrm>
+          <a:custGeom>
+            <a:avLst/>
+            <a:gdLst/>
+            <a:ahLst/>
+            <a:cxnLst/>
+            <a:rect l="l" t="t" r="r" b="b"/>
+            <a:pathLst>
+              <a:path w="784000" h="842800">
+                <a:moveTo>
+                  <a:pt x="235200" y="0"/>
+                </a:moveTo>
+                <a:lnTo>
+                  <a:pt x="235200" y="333200"/>
+                </a:lnTo>
+                <a:lnTo>
+                  <a:pt x="0" y="842800"/>
+                </a:lnTo>
+                <a:lnTo>
+                  <a:pt x="784000" y="842800"/>
+                </a:lnTo>
+                <a:lnTo>
+                  <a:pt x="548800" y="333200"/>
+                </a:lnTo>
+                <a:lnTo>
+                  <a:pt x="548800" y="0"/>
+                </a:lnTo>
+              </a:path>
+            </a:pathLst>
+          </a:custGeom>
+          <a:noFill/>
+          <a:ln w="33020">
+            <a:solidFill>
+              <a:srgbClr val="74A6FF"/>
+            </a:solidFill>
+          </a:ln>
+          <a:effectLst/>
+        </p:spPr>
+        <p:style>
+          <a:lnRef idx="1">
+            <a:schemeClr val="accent1"/>
+          </a:lnRef>
+          <a:fillRef idx="3">
+            <a:schemeClr val="accent1"/>
+          </a:fillRef>
+          <a:effectRef idx="2">
+            <a:schemeClr val="accent1"/>
+          </a:effectRef>
+          <a:fontRef idx="minor">
+            <a:schemeClr val="lt1"/>
+          </a:fontRef>
+        </p:style>
+        <p:txBody>
+          <a:bodyPr rtlCol="0" anchor="ctr"/>
+          <a:lstStyle/>
+          <a:p>
+            <a:pPr algn="ctr"/>
+          </a:p>
+        </p:txBody>
+      </p:sp>
+      <p:cxnSp>
+        <p:nvCxnSpPr>
+          <p:cNvPr id="15" name="Connector 14"/>
+          <p:cNvCxnSpPr/>
+          <p:nvPr/>
+        </p:nvCxnSpPr>
+        <p:spPr>
+          <a:xfrm>
+            <a:off x="9766400" y="1418800"/>
+            <a:ext cx="431200" cy="0"/>
+          </a:xfrm>
+          <a:prstGeom prst="line">
+            <a:avLst/>
+          </a:prstGeom>
+          <a:ln w="33020">
+            <a:solidFill>
+              <a:srgbClr val="74A6FF"/>
+            </a:solidFill>
+          </a:ln>
+          <a:effectLst/>
+        </p:spPr>
+        <p:style>
+          <a:lnRef idx="2">
+            <a:schemeClr val="accent1"/>
+          </a:lnRef>
+          <a:fillRef idx="0">
+            <a:schemeClr val="accent1"/>
+          </a:fillRef>
+          <a:effectRef idx="1">
+            <a:schemeClr val="accent1"/>
+          </a:effectRef>
+          <a:fontRef idx="minor">
+            <a:schemeClr val="tx1"/>
+          </a:fontRef>
+        </p:style>
+      </p:cxnSp>
+      <p:cxnSp>
+        <p:nvCxnSpPr>
+          <p:cNvPr id="16" name="Connector 15"/>
+          <p:cNvCxnSpPr/>
+          <p:nvPr/>
+        </p:nvCxnSpPr>
+        <p:spPr>
+          <a:xfrm>
+            <a:off x="9727200" y="2006800"/>
+            <a:ext cx="509600" cy="0"/>
+          </a:xfrm>
+          <a:prstGeom prst="line">
+            <a:avLst/>
+          </a:prstGeom>
+          <a:ln w="33020">
+            <a:solidFill>
+              <a:srgbClr val="74A6FF"/>
+            </a:solidFill>
+          </a:ln>
+          <a:effectLst/>
+        </p:spPr>
+        <p:style>
+          <a:lnRef idx="2">
+            <a:schemeClr val="accent1"/>
+          </a:lnRef>
+          <a:fillRef idx="0">
+            <a:schemeClr val="accent1"/>
+          </a:fillRef>
+          <a:effectRef idx="1">
+            <a:schemeClr val="accent1"/>
+          </a:effectRef>
+          <a:fontRef idx="minor">
+            <a:schemeClr val="tx1"/>
+          </a:fontRef>
+        </p:style>
+      </p:cxnSp>
+      <p:sp>
+        <p:nvSpPr>
+          <p:cNvPr id="17" name="Rounded Rectangle 16"/>
           <p:cNvSpPr/>
           <p:nvPr/>
         </p:nvSpPr>
@@ -9173,7 +9325,7 @@
       </p:sp>
       <p:sp>
         <p:nvSpPr>
-          <p:cNvPr id="15" name="Rectangle 14"/>
+          <p:cNvPr id="18" name="Rectangle 17"/>
           <p:cNvSpPr/>
           <p:nvPr/>
         </p:nvSpPr>
@@ -9219,7 +9371,7 @@
       </p:sp>
       <p:sp>
         <p:nvSpPr>
-          <p:cNvPr id="16" name="TextBox 15"/>
+          <p:cNvPr id="19" name="TextBox 18"/>
           <p:cNvSpPr txBox="1"/>
           <p:nvPr/>
         </p:nvSpPr>
@@ -9288,7 +9440,7 @@
       </p:sp>
       <p:sp>
         <p:nvSpPr>
-          <p:cNvPr id="17" name="Rectangle 16"/>
+          <p:cNvPr id="20" name="Rectangle 19"/>
           <p:cNvSpPr/>
           <p:nvPr/>
         </p:nvSpPr>
@@ -9334,7 +9486,7 @@
       </p:sp>
       <p:sp>
         <p:nvSpPr>
-          <p:cNvPr id="18" name="TextBox 17"/>
+          <p:cNvPr id="21" name="TextBox 20"/>
           <p:cNvSpPr txBox="1"/>
           <p:nvPr/>
         </p:nvSpPr>
@@ -9403,7 +9555,7 @@
       </p:sp>
       <p:sp>
         <p:nvSpPr>
-          <p:cNvPr id="19" name="Rectangle 18"/>
+          <p:cNvPr id="22" name="Rectangle 21"/>
           <p:cNvSpPr/>
           <p:nvPr/>
         </p:nvSpPr>
@@ -9449,7 +9601,7 @@
       </p:sp>
       <p:sp>
         <p:nvSpPr>
-          <p:cNvPr id="20" name="TextBox 19"/>
+          <p:cNvPr id="23" name="TextBox 22"/>
           <p:cNvSpPr txBox="1"/>
           <p:nvPr/>
         </p:nvSpPr>
@@ -9518,7 +9670,7 @@
       </p:sp>
       <p:sp>
         <p:nvSpPr>
-          <p:cNvPr id="21" name="Rectangle 20"/>
+          <p:cNvPr id="24" name="Rectangle 23"/>
           <p:cNvSpPr/>
           <p:nvPr/>
         </p:nvSpPr>
@@ -9564,7 +9716,7 @@
       </p:sp>
       <p:sp>
         <p:nvSpPr>
-          <p:cNvPr id="22" name="TextBox 21"/>
+          <p:cNvPr id="25" name="TextBox 24"/>
           <p:cNvSpPr txBox="1"/>
           <p:nvPr/>
         </p:nvSpPr>
@@ -9610,7 +9762,7 @@
       </p:sp>
       <p:sp>
         <p:nvSpPr>
-          <p:cNvPr id="23" name="TextBox 22"/>
+          <p:cNvPr id="26" name="TextBox 25"/>
           <p:cNvSpPr txBox="1"/>
           <p:nvPr/>
         </p:nvSpPr>
@@ -9724,80 +9876,30 @@
           </a:p>
         </p:txBody>
       </p:sp>
-      <p:sp>
-        <p:nvSpPr>
-          <p:cNvPr id="3" name="Freeform 2"/>
-          <p:cNvSpPr/>
-          <p:nvPr/>
-        </p:nvSpPr>
-        <p:spPr>
-          <a:xfrm>
-            <a:off x="9479608" y="4208000"/>
-            <a:ext cx="2924783" cy="2851453"/>
-          </a:xfrm>
-          <a:custGeom>
-            <a:avLst/>
-            <a:gdLst/>
-            <a:ahLst/>
-            <a:cxnLst/>
-            <a:rect l="l" t="t" r="r" b="b"/>
-            <a:pathLst>
-              <a:path w="2924783" h="2851453">
-                <a:moveTo>
-                  <a:pt x="1462392" y="0"/>
-                </a:moveTo>
-                <a:lnTo>
-                  <a:pt x="2635139" y="564765"/>
-                </a:lnTo>
-                <a:lnTo>
-                  <a:pt x="2924783" y="1833781"/>
-                </a:lnTo>
-                <a:lnTo>
-                  <a:pt x="2113217" y="2851453"/>
-                </a:lnTo>
-                <a:lnTo>
-                  <a:pt x="811566" y="2851453"/>
-                </a:lnTo>
-                <a:lnTo>
-                  <a:pt x="0" y="1833781"/>
-                </a:lnTo>
-                <a:lnTo>
-                  <a:pt x="289644" y="564765"/>
-                </a:lnTo>
-                <a:close/>
-              </a:path>
-            </a:pathLst>
-          </a:custGeom>
-          <a:noFill/>
-          <a:ln w="31750">
-            <a:solidFill>
-              <a:srgbClr val="26354E"/>
-            </a:solidFill>
-          </a:ln>
-          <a:effectLst/>
-        </p:spPr>
-        <p:style>
-          <a:lnRef idx="1">
-            <a:schemeClr val="accent1"/>
-          </a:lnRef>
-          <a:fillRef idx="3">
-            <a:schemeClr val="accent1"/>
-          </a:fillRef>
-          <a:effectRef idx="2">
-            <a:schemeClr val="accent1"/>
-          </a:effectRef>
-          <a:fontRef idx="minor">
-            <a:schemeClr val="lt1"/>
-          </a:fontRef>
-        </p:style>
-        <p:txBody>
-          <a:bodyPr rtlCol="0" anchor="ctr"/>
-          <a:lstStyle/>
-          <a:p>
-            <a:pPr algn="ctr"/>
-          </a:p>
-        </p:txBody>
-      </p:sp>
+      <p:pic>
+        <p:nvPicPr>
+          <p:cNvPr id="3" name="Picture 2" descr="sts.png"/>
+          <p:cNvPicPr>
+            <a:picLocks noChangeAspect="1"/>
+          </p:cNvPicPr>
+          <p:nvPr/>
+        </p:nvPicPr>
+        <p:blipFill>
+          <a:blip r:embed="rId2"/>
+          <a:stretch>
+            <a:fillRect/>
+          </a:stretch>
+        </p:blipFill>
+        <p:spPr>
+          <a:xfrm>
+            <a:off x="8842000" y="2150000"/>
+            <a:ext cx="1800000" cy="1800000"/>
+          </a:xfrm>
+          <a:prstGeom prst="rect">
+            <a:avLst/>
+          </a:prstGeom>
+        </p:spPr>
+      </p:pic>
       <p:sp>
         <p:nvSpPr>
           <p:cNvPr id="4" name="TextBox 3"/>
@@ -10247,7 +10349,7 @@
         <p:spPr>
           <a:xfrm>
             <a:off x="620000" y="560000"/>
-            <a:ext cx="10952000" cy="620000"/>
+            <a:ext cx="10052000" cy="620000"/>
           </a:xfrm>
           <a:prstGeom prst="rect">
             <a:avLst/>
@@ -10630,52 +10732,30 @@
           </a:p>
         </p:txBody>
       </p:sp>
-      <p:sp>
-        <p:nvSpPr>
-          <p:cNvPr id="11" name="TextBox 10"/>
-          <p:cNvSpPr txBox="1"/>
-          <p:nvPr/>
-        </p:nvSpPr>
-        <p:spPr>
-          <a:xfrm>
-            <a:off x="1260000" y="2368000"/>
-            <a:ext cx="4626000" cy="340000"/>
-          </a:xfrm>
-          <a:prstGeom prst="rect">
-            <a:avLst/>
-          </a:prstGeom>
-          <a:noFill/>
-        </p:spPr>
-        <p:txBody>
-          <a:bodyPr wrap="square" anchor="ctr" lIns="0" rIns="0" tIns="0" bIns="0">
-            <a:noAutofit/>
-          </a:bodyPr>
-          <a:lstStyle/>
-          <a:p>
-            <a:pPr algn="l" marL="0" indent="0">
-              <a:lnSpc>
-                <a:spcPct val="105000"/>
-              </a:lnSpc>
-              <a:spcBef>
-                <a:spcPts val="0"/>
-              </a:spcBef>
-              <a:spcAft>
-                <a:spcPts val="0"/>
-              </a:spcAft>
-              <a:buNone/>
-            </a:pPr>
-            <a:r>
-              <a:rPr sz="1500" b="1" i="0">
-                <a:solidFill>
-                  <a:srgbClr val="F3F6FC"/>
-                </a:solidFill>
-                <a:latin typeface="Segoe UI Semibold"/>
-              </a:rPr>
-              <a:t>Nombre estable</a:t>
-            </a:r>
-          </a:p>
-        </p:txBody>
-      </p:sp>
+      <p:pic>
+        <p:nvPicPr>
+          <p:cNvPr id="11" name="Picture 10" descr="sts.png"/>
+          <p:cNvPicPr>
+            <a:picLocks noChangeAspect="1"/>
+          </p:cNvPicPr>
+          <p:nvPr/>
+        </p:nvPicPr>
+        <p:blipFill>
+          <a:blip r:embed="rId2"/>
+          <a:stretch>
+            <a:fillRect/>
+          </a:stretch>
+        </p:blipFill>
+        <p:spPr>
+          <a:xfrm>
+            <a:off x="5376000" y="2374000"/>
+            <a:ext cx="330000" cy="330000"/>
+          </a:xfrm>
+          <a:prstGeom prst="rect">
+            <a:avLst/>
+          </a:prstGeom>
+        </p:spPr>
+      </p:pic>
       <p:sp>
         <p:nvSpPr>
           <p:cNvPr id="12" name="TextBox 11"/>
@@ -10684,6 +10764,52 @@
         </p:nvSpPr>
         <p:spPr>
           <a:xfrm>
+            <a:off x="1260000" y="2368000"/>
+            <a:ext cx="4256000" cy="340000"/>
+          </a:xfrm>
+          <a:prstGeom prst="rect">
+            <a:avLst/>
+          </a:prstGeom>
+          <a:noFill/>
+        </p:spPr>
+        <p:txBody>
+          <a:bodyPr wrap="square" anchor="ctr" lIns="0" rIns="0" tIns="0" bIns="0">
+            <a:noAutofit/>
+          </a:bodyPr>
+          <a:lstStyle/>
+          <a:p>
+            <a:pPr algn="l" marL="0" indent="0">
+              <a:lnSpc>
+                <a:spcPct val="105000"/>
+              </a:lnSpc>
+              <a:spcBef>
+                <a:spcPts val="0"/>
+              </a:spcBef>
+              <a:spcAft>
+                <a:spcPts val="0"/>
+              </a:spcAft>
+              <a:buNone/>
+            </a:pPr>
+            <a:r>
+              <a:rPr sz="1500" b="1" i="0">
+                <a:solidFill>
+                  <a:srgbClr val="F3F6FC"/>
+                </a:solidFill>
+                <a:latin typeface="Segoe UI Semibold"/>
+              </a:rPr>
+              <a:t>Nombre estable</a:t>
+            </a:r>
+          </a:p>
+        </p:txBody>
+      </p:sp>
+      <p:sp>
+        <p:nvSpPr>
+          <p:cNvPr id="13" name="TextBox 12"/>
+          <p:cNvSpPr txBox="1"/>
+          <p:nvPr/>
+        </p:nvSpPr>
+        <p:spPr>
+          <a:xfrm>
             <a:off x="850000" y="2788000"/>
             <a:ext cx="4856000" cy="602000"/>
           </a:xfrm>
@@ -10724,7 +10850,7 @@
       </p:sp>
       <p:sp>
         <p:nvSpPr>
-          <p:cNvPr id="13" name="Rounded Rectangle 12"/>
+          <p:cNvPr id="14" name="Rounded Rectangle 13"/>
           <p:cNvSpPr/>
           <p:nvPr/>
         </p:nvSpPr>
@@ -10774,7 +10900,7 @@
       </p:sp>
       <p:sp>
         <p:nvSpPr>
-          <p:cNvPr id="14" name="Rectangle 13"/>
+          <p:cNvPr id="15" name="Rectangle 14"/>
           <p:cNvSpPr/>
           <p:nvPr/>
         </p:nvSpPr>
@@ -10820,7 +10946,7 @@
       </p:sp>
       <p:sp>
         <p:nvSpPr>
-          <p:cNvPr id="15" name="Oval 14"/>
+          <p:cNvPr id="16" name="Oval 15"/>
           <p:cNvSpPr/>
           <p:nvPr/>
         </p:nvSpPr>
@@ -10884,16 +11010,40 @@
           </a:p>
         </p:txBody>
       </p:sp>
-      <p:sp>
-        <p:nvSpPr>
-          <p:cNvPr id="16" name="TextBox 15"/>
+      <p:pic>
+        <p:nvPicPr>
+          <p:cNvPr id="17" name="Picture 16" descr="sts.png"/>
+          <p:cNvPicPr>
+            <a:picLocks noChangeAspect="1"/>
+          </p:cNvPicPr>
+          <p:nvPr/>
+        </p:nvPicPr>
+        <p:blipFill>
+          <a:blip r:embed="rId2"/>
+          <a:stretch>
+            <a:fillRect/>
+          </a:stretch>
+        </p:blipFill>
+        <p:spPr>
+          <a:xfrm>
+            <a:off x="11012000" y="2374000"/>
+            <a:ext cx="330000" cy="330000"/>
+          </a:xfrm>
+          <a:prstGeom prst="rect">
+            <a:avLst/>
+          </a:prstGeom>
+        </p:spPr>
+      </p:pic>
+      <p:sp>
+        <p:nvSpPr>
+          <p:cNvPr id="18" name="TextBox 17"/>
           <p:cNvSpPr txBox="1"/>
           <p:nvPr/>
         </p:nvSpPr>
         <p:spPr>
           <a:xfrm>
             <a:off x="6896000" y="2368000"/>
-            <a:ext cx="4626000" cy="340000"/>
+            <a:ext cx="4256000" cy="340000"/>
           </a:xfrm>
           <a:prstGeom prst="rect">
             <a:avLst/>
@@ -10932,7 +11082,7 @@
       </p:sp>
       <p:sp>
         <p:nvSpPr>
-          <p:cNvPr id="17" name="TextBox 16"/>
+          <p:cNvPr id="19" name="TextBox 18"/>
           <p:cNvSpPr txBox="1"/>
           <p:nvPr/>
         </p:nvSpPr>
@@ -10978,7 +11128,7 @@
       </p:sp>
       <p:sp>
         <p:nvSpPr>
-          <p:cNvPr id="18" name="Rounded Rectangle 17"/>
+          <p:cNvPr id="20" name="Rounded Rectangle 19"/>
           <p:cNvSpPr/>
           <p:nvPr/>
         </p:nvSpPr>
@@ -11028,7 +11178,7 @@
       </p:sp>
       <p:sp>
         <p:nvSpPr>
-          <p:cNvPr id="19" name="Rectangle 18"/>
+          <p:cNvPr id="21" name="Rectangle 20"/>
           <p:cNvSpPr/>
           <p:nvPr/>
         </p:nvSpPr>
@@ -11074,7 +11224,7 @@
       </p:sp>
       <p:sp>
         <p:nvSpPr>
-          <p:cNvPr id="20" name="Oval 19"/>
+          <p:cNvPr id="22" name="Oval 21"/>
           <p:cNvSpPr/>
           <p:nvPr/>
         </p:nvSpPr>
@@ -11138,16 +11288,40 @@
           </a:p>
         </p:txBody>
       </p:sp>
-      <p:sp>
-        <p:nvSpPr>
-          <p:cNvPr id="21" name="TextBox 20"/>
+      <p:pic>
+        <p:nvPicPr>
+          <p:cNvPr id="23" name="Picture 22" descr="pv.png"/>
+          <p:cNvPicPr>
+            <a:picLocks noChangeAspect="1"/>
+          </p:cNvPicPr>
+          <p:nvPr/>
+        </p:nvPicPr>
+        <p:blipFill>
+          <a:blip r:embed="rId3"/>
+          <a:stretch>
+            <a:fillRect/>
+          </a:stretch>
+        </p:blipFill>
+        <p:spPr>
+          <a:xfrm>
+            <a:off x="5376000" y="3946000"/>
+            <a:ext cx="330000" cy="330000"/>
+          </a:xfrm>
+          <a:prstGeom prst="rect">
+            <a:avLst/>
+          </a:prstGeom>
+        </p:spPr>
+      </p:pic>
+      <p:sp>
+        <p:nvSpPr>
+          <p:cNvPr id="24" name="TextBox 23"/>
           <p:cNvSpPr txBox="1"/>
           <p:nvPr/>
         </p:nvSpPr>
         <p:spPr>
           <a:xfrm>
             <a:off x="1260000" y="3940000"/>
-            <a:ext cx="4626000" cy="340000"/>
+            <a:ext cx="4256000" cy="340000"/>
           </a:xfrm>
           <a:prstGeom prst="rect">
             <a:avLst/>
@@ -11186,7 +11360,7 @@
       </p:sp>
       <p:sp>
         <p:nvSpPr>
-          <p:cNvPr id="22" name="TextBox 21"/>
+          <p:cNvPr id="25" name="TextBox 24"/>
           <p:cNvSpPr txBox="1"/>
           <p:nvPr/>
         </p:nvSpPr>
@@ -11232,7 +11406,7 @@
       </p:sp>
       <p:sp>
         <p:nvSpPr>
-          <p:cNvPr id="23" name="Rounded Rectangle 22"/>
+          <p:cNvPr id="26" name="Rounded Rectangle 25"/>
           <p:cNvSpPr/>
           <p:nvPr/>
         </p:nvSpPr>
@@ -11282,7 +11456,7 @@
       </p:sp>
       <p:sp>
         <p:nvSpPr>
-          <p:cNvPr id="24" name="Rectangle 23"/>
+          <p:cNvPr id="27" name="Rectangle 26"/>
           <p:cNvSpPr/>
           <p:nvPr/>
         </p:nvSpPr>
@@ -11328,7 +11502,7 @@
       </p:sp>
       <p:sp>
         <p:nvSpPr>
-          <p:cNvPr id="25" name="Oval 24"/>
+          <p:cNvPr id="28" name="Oval 27"/>
           <p:cNvSpPr/>
           <p:nvPr/>
         </p:nvSpPr>
@@ -11392,16 +11566,40 @@
           </a:p>
         </p:txBody>
       </p:sp>
-      <p:sp>
-        <p:nvSpPr>
-          <p:cNvPr id="26" name="TextBox 25"/>
+      <p:pic>
+        <p:nvPicPr>
+          <p:cNvPr id="29" name="Picture 28" descr="pod.png"/>
+          <p:cNvPicPr>
+            <a:picLocks noChangeAspect="1"/>
+          </p:cNvPicPr>
+          <p:nvPr/>
+        </p:nvPicPr>
+        <p:blipFill>
+          <a:blip r:embed="rId4"/>
+          <a:stretch>
+            <a:fillRect/>
+          </a:stretch>
+        </p:blipFill>
+        <p:spPr>
+          <a:xfrm>
+            <a:off x="11012000" y="3946000"/>
+            <a:ext cx="330000" cy="330000"/>
+          </a:xfrm>
+          <a:prstGeom prst="rect">
+            <a:avLst/>
+          </a:prstGeom>
+        </p:spPr>
+      </p:pic>
+      <p:sp>
+        <p:nvSpPr>
+          <p:cNvPr id="30" name="TextBox 29"/>
           <p:cNvSpPr txBox="1"/>
           <p:nvPr/>
         </p:nvSpPr>
         <p:spPr>
           <a:xfrm>
             <a:off x="6896000" y="3940000"/>
-            <a:ext cx="4626000" cy="340000"/>
+            <a:ext cx="4256000" cy="340000"/>
           </a:xfrm>
           <a:prstGeom prst="rect">
             <a:avLst/>
@@ -11440,7 +11638,7 @@
       </p:sp>
       <p:sp>
         <p:nvSpPr>
-          <p:cNvPr id="27" name="TextBox 26"/>
+          <p:cNvPr id="31" name="TextBox 30"/>
           <p:cNvSpPr txBox="1"/>
           <p:nvPr/>
         </p:nvSpPr>
@@ -11486,7 +11684,7 @@
       </p:sp>
       <p:sp>
         <p:nvSpPr>
-          <p:cNvPr id="28" name="Rounded Rectangle 27"/>
+          <p:cNvPr id="32" name="Rounded Rectangle 31"/>
           <p:cNvSpPr/>
           <p:nvPr/>
         </p:nvSpPr>
@@ -11536,7 +11734,7 @@
       </p:sp>
       <p:sp>
         <p:nvSpPr>
-          <p:cNvPr id="29" name="Rectangle 28"/>
+          <p:cNvPr id="33" name="Rectangle 32"/>
           <p:cNvSpPr/>
           <p:nvPr/>
         </p:nvSpPr>
@@ -11582,7 +11780,7 @@
       </p:sp>
       <p:sp>
         <p:nvSpPr>
-          <p:cNvPr id="30" name="TextBox 29"/>
+          <p:cNvPr id="34" name="TextBox 33"/>
           <p:cNvSpPr txBox="1"/>
           <p:nvPr/>
         </p:nvSpPr>
@@ -11707,7 +11905,7 @@
         <p:spPr>
           <a:xfrm>
             <a:off x="620000" y="560000"/>
-            <a:ext cx="10952000" cy="620000"/>
+            <a:ext cx="10052000" cy="620000"/>
           </a:xfrm>
           <a:prstGeom prst="rect">
             <a:avLst/>
@@ -11930,7 +12128,255 @@
       </p:sp>
       <p:sp>
         <p:nvSpPr>
-          <p:cNvPr id="8" name="TextBox 7"/>
+          <p:cNvPr id="8" name="Freeform 7"/>
+          <p:cNvSpPr/>
+          <p:nvPr/>
+        </p:nvSpPr>
+        <p:spPr>
+          <a:xfrm>
+            <a:off x="11034400" y="300600"/>
+            <a:ext cx="448000" cy="588800"/>
+          </a:xfrm>
+          <a:custGeom>
+            <a:avLst/>
+            <a:gdLst/>
+            <a:ahLst/>
+            <a:cxnLst/>
+            <a:rect l="l" t="t" r="r" b="b"/>
+            <a:pathLst>
+              <a:path w="448000" h="588800">
+                <a:moveTo>
+                  <a:pt x="0" y="0"/>
+                </a:moveTo>
+                <a:lnTo>
+                  <a:pt x="345600" y="0"/>
+                </a:lnTo>
+                <a:lnTo>
+                  <a:pt x="448000" y="102400"/>
+                </a:lnTo>
+                <a:lnTo>
+                  <a:pt x="448000" y="588800"/>
+                </a:lnTo>
+                <a:lnTo>
+                  <a:pt x="0" y="588800"/>
+                </a:lnTo>
+                <a:close/>
+              </a:path>
+            </a:pathLst>
+          </a:custGeom>
+          <a:noFill/>
+          <a:ln w="38100">
+            <a:solidFill>
+              <a:srgbClr val="74A6FF"/>
+            </a:solidFill>
+          </a:ln>
+          <a:effectLst/>
+        </p:spPr>
+        <p:style>
+          <a:lnRef idx="1">
+            <a:schemeClr val="accent1"/>
+          </a:lnRef>
+          <a:fillRef idx="3">
+            <a:schemeClr val="accent1"/>
+          </a:fillRef>
+          <a:effectRef idx="2">
+            <a:schemeClr val="accent1"/>
+          </a:effectRef>
+          <a:fontRef idx="minor">
+            <a:schemeClr val="lt1"/>
+          </a:fontRef>
+        </p:style>
+        <p:txBody>
+          <a:bodyPr rtlCol="0" anchor="ctr"/>
+          <a:lstStyle/>
+          <a:p>
+            <a:pPr algn="ctr"/>
+          </a:p>
+        </p:txBody>
+      </p:sp>
+      <p:cxnSp>
+        <p:nvCxnSpPr>
+          <p:cNvPr id="9" name="Connector 8"/>
+          <p:cNvCxnSpPr/>
+          <p:nvPr/>
+        </p:nvCxnSpPr>
+        <p:spPr>
+          <a:xfrm>
+            <a:off x="11380000" y="300600"/>
+            <a:ext cx="0" cy="102400"/>
+          </a:xfrm>
+          <a:prstGeom prst="line">
+            <a:avLst/>
+          </a:prstGeom>
+          <a:ln w="38100">
+            <a:solidFill>
+              <a:srgbClr val="74A6FF"/>
+            </a:solidFill>
+          </a:ln>
+          <a:effectLst/>
+        </p:spPr>
+        <p:style>
+          <a:lnRef idx="2">
+            <a:schemeClr val="accent1"/>
+          </a:lnRef>
+          <a:fillRef idx="0">
+            <a:schemeClr val="accent1"/>
+          </a:fillRef>
+          <a:effectRef idx="1">
+            <a:schemeClr val="accent1"/>
+          </a:effectRef>
+          <a:fontRef idx="minor">
+            <a:schemeClr val="tx1"/>
+          </a:fontRef>
+        </p:style>
+      </p:cxnSp>
+      <p:cxnSp>
+        <p:nvCxnSpPr>
+          <p:cNvPr id="10" name="Connector 9"/>
+          <p:cNvCxnSpPr/>
+          <p:nvPr/>
+        </p:nvCxnSpPr>
+        <p:spPr>
+          <a:xfrm>
+            <a:off x="11380000" y="403000"/>
+            <a:ext cx="102400" cy="0"/>
+          </a:xfrm>
+          <a:prstGeom prst="line">
+            <a:avLst/>
+          </a:prstGeom>
+          <a:ln w="38100">
+            <a:solidFill>
+              <a:srgbClr val="74A6FF"/>
+            </a:solidFill>
+          </a:ln>
+          <a:effectLst/>
+        </p:spPr>
+        <p:style>
+          <a:lnRef idx="2">
+            <a:schemeClr val="accent1"/>
+          </a:lnRef>
+          <a:fillRef idx="0">
+            <a:schemeClr val="accent1"/>
+          </a:fillRef>
+          <a:effectRef idx="1">
+            <a:schemeClr val="accent1"/>
+          </a:effectRef>
+          <a:fontRef idx="minor">
+            <a:schemeClr val="tx1"/>
+          </a:fontRef>
+        </p:style>
+      </p:cxnSp>
+      <p:cxnSp>
+        <p:nvCxnSpPr>
+          <p:cNvPr id="11" name="Connector 10"/>
+          <p:cNvCxnSpPr/>
+          <p:nvPr/>
+        </p:nvCxnSpPr>
+        <p:spPr>
+          <a:xfrm>
+            <a:off x="11111200" y="543800"/>
+            <a:ext cx="281600" cy="0"/>
+          </a:xfrm>
+          <a:prstGeom prst="line">
+            <a:avLst/>
+          </a:prstGeom>
+          <a:ln w="38100">
+            <a:solidFill>
+              <a:srgbClr val="74A6FF"/>
+            </a:solidFill>
+          </a:ln>
+          <a:effectLst/>
+        </p:spPr>
+        <p:style>
+          <a:lnRef idx="2">
+            <a:schemeClr val="accent1"/>
+          </a:lnRef>
+          <a:fillRef idx="0">
+            <a:schemeClr val="accent1"/>
+          </a:fillRef>
+          <a:effectRef idx="1">
+            <a:schemeClr val="accent1"/>
+          </a:effectRef>
+          <a:fontRef idx="minor">
+            <a:schemeClr val="tx1"/>
+          </a:fontRef>
+        </p:style>
+      </p:cxnSp>
+      <p:cxnSp>
+        <p:nvCxnSpPr>
+          <p:cNvPr id="12" name="Connector 11"/>
+          <p:cNvCxnSpPr/>
+          <p:nvPr/>
+        </p:nvCxnSpPr>
+        <p:spPr>
+          <a:xfrm>
+            <a:off x="11111200" y="646200"/>
+            <a:ext cx="281600" cy="0"/>
+          </a:xfrm>
+          <a:prstGeom prst="line">
+            <a:avLst/>
+          </a:prstGeom>
+          <a:ln w="38100">
+            <a:solidFill>
+              <a:srgbClr val="74A6FF"/>
+            </a:solidFill>
+          </a:ln>
+          <a:effectLst/>
+        </p:spPr>
+        <p:style>
+          <a:lnRef idx="2">
+            <a:schemeClr val="accent1"/>
+          </a:lnRef>
+          <a:fillRef idx="0">
+            <a:schemeClr val="accent1"/>
+          </a:fillRef>
+          <a:effectRef idx="1">
+            <a:schemeClr val="accent1"/>
+          </a:effectRef>
+          <a:fontRef idx="minor">
+            <a:schemeClr val="tx1"/>
+          </a:fontRef>
+        </p:style>
+      </p:cxnSp>
+      <p:cxnSp>
+        <p:nvCxnSpPr>
+          <p:cNvPr id="13" name="Connector 12"/>
+          <p:cNvCxnSpPr/>
+          <p:nvPr/>
+        </p:nvCxnSpPr>
+        <p:spPr>
+          <a:xfrm>
+            <a:off x="11111200" y="748600"/>
+            <a:ext cx="281600" cy="0"/>
+          </a:xfrm>
+          <a:prstGeom prst="line">
+            <a:avLst/>
+          </a:prstGeom>
+          <a:ln w="38100">
+            <a:solidFill>
+              <a:srgbClr val="74A6FF"/>
+            </a:solidFill>
+          </a:ln>
+          <a:effectLst/>
+        </p:spPr>
+        <p:style>
+          <a:lnRef idx="2">
+            <a:schemeClr val="accent1"/>
+          </a:lnRef>
+          <a:fillRef idx="0">
+            <a:schemeClr val="accent1"/>
+          </a:fillRef>
+          <a:effectRef idx="1">
+            <a:schemeClr val="accent1"/>
+          </a:effectRef>
+          <a:fontRef idx="minor">
+            <a:schemeClr val="tx1"/>
+          </a:fontRef>
+        </p:style>
+      </p:cxnSp>
+      <p:sp>
+        <p:nvSpPr>
+          <p:cNvPr id="14" name="TextBox 13"/>
           <p:cNvSpPr txBox="1"/>
           <p:nvPr/>
         </p:nvSpPr>
@@ -11976,7 +12422,7 @@
       </p:sp>
       <p:sp>
         <p:nvSpPr>
-          <p:cNvPr id="9" name="Rounded Rectangle 8"/>
+          <p:cNvPr id="15" name="Rounded Rectangle 14"/>
           <p:cNvSpPr/>
           <p:nvPr/>
         </p:nvSpPr>
@@ -12026,7 +12472,7 @@
       </p:sp>
       <p:sp>
         <p:nvSpPr>
-          <p:cNvPr id="10" name="Rectangle 9"/>
+          <p:cNvPr id="16" name="Rectangle 15"/>
           <p:cNvSpPr/>
           <p:nvPr/>
         </p:nvSpPr>
@@ -12072,7 +12518,7 @@
       </p:sp>
       <p:sp>
         <p:nvSpPr>
-          <p:cNvPr id="11" name="TextBox 10"/>
+          <p:cNvPr id="17" name="TextBox 16"/>
           <p:cNvSpPr txBox="1"/>
           <p:nvPr/>
         </p:nvSpPr>
@@ -12118,7 +12564,7 @@
       </p:sp>
       <p:sp>
         <p:nvSpPr>
-          <p:cNvPr id="12" name="TextBox 11"/>
+          <p:cNvPr id="18" name="TextBox 17"/>
           <p:cNvSpPr txBox="1"/>
           <p:nvPr/>
         </p:nvSpPr>
@@ -12468,7 +12914,7 @@
       </p:sp>
       <p:sp>
         <p:nvSpPr>
-          <p:cNvPr id="13" name="Rounded Rectangle 12"/>
+          <p:cNvPr id="19" name="Rounded Rectangle 18"/>
           <p:cNvSpPr/>
           <p:nvPr/>
         </p:nvSpPr>
@@ -12518,7 +12964,7 @@
       </p:sp>
       <p:sp>
         <p:nvSpPr>
-          <p:cNvPr id="14" name="Rectangle 13"/>
+          <p:cNvPr id="20" name="Rectangle 19"/>
           <p:cNvSpPr/>
           <p:nvPr/>
         </p:nvSpPr>
@@ -12564,7 +13010,7 @@
       </p:sp>
       <p:sp>
         <p:nvSpPr>
-          <p:cNvPr id="15" name="TextBox 14"/>
+          <p:cNvPr id="21" name="TextBox 20"/>
           <p:cNvSpPr txBox="1"/>
           <p:nvPr/>
         </p:nvSpPr>
@@ -13400,7 +13846,149 @@
       </p:sp>
       <p:sp>
         <p:nvSpPr>
-          <p:cNvPr id="16" name="Rounded Rectangle 15"/>
+          <p:cNvPr id="16" name="Freeform 15"/>
+          <p:cNvSpPr/>
+          <p:nvPr/>
+        </p:nvSpPr>
+        <p:spPr>
+          <a:xfrm>
+            <a:off x="9590000" y="1418800"/>
+            <a:ext cx="784000" cy="842800"/>
+          </a:xfrm>
+          <a:custGeom>
+            <a:avLst/>
+            <a:gdLst/>
+            <a:ahLst/>
+            <a:cxnLst/>
+            <a:rect l="l" t="t" r="r" b="b"/>
+            <a:pathLst>
+              <a:path w="784000" h="842800">
+                <a:moveTo>
+                  <a:pt x="235200" y="0"/>
+                </a:moveTo>
+                <a:lnTo>
+                  <a:pt x="235200" y="333200"/>
+                </a:lnTo>
+                <a:lnTo>
+                  <a:pt x="0" y="842800"/>
+                </a:lnTo>
+                <a:lnTo>
+                  <a:pt x="784000" y="842800"/>
+                </a:lnTo>
+                <a:lnTo>
+                  <a:pt x="548800" y="333200"/>
+                </a:lnTo>
+                <a:lnTo>
+                  <a:pt x="548800" y="0"/>
+                </a:lnTo>
+              </a:path>
+            </a:pathLst>
+          </a:custGeom>
+          <a:noFill/>
+          <a:ln w="33020">
+            <a:solidFill>
+              <a:srgbClr val="74A6FF"/>
+            </a:solidFill>
+          </a:ln>
+          <a:effectLst/>
+        </p:spPr>
+        <p:style>
+          <a:lnRef idx="1">
+            <a:schemeClr val="accent1"/>
+          </a:lnRef>
+          <a:fillRef idx="3">
+            <a:schemeClr val="accent1"/>
+          </a:fillRef>
+          <a:effectRef idx="2">
+            <a:schemeClr val="accent1"/>
+          </a:effectRef>
+          <a:fontRef idx="minor">
+            <a:schemeClr val="lt1"/>
+          </a:fontRef>
+        </p:style>
+        <p:txBody>
+          <a:bodyPr rtlCol="0" anchor="ctr"/>
+          <a:lstStyle/>
+          <a:p>
+            <a:pPr algn="ctr"/>
+          </a:p>
+        </p:txBody>
+      </p:sp>
+      <p:cxnSp>
+        <p:nvCxnSpPr>
+          <p:cNvPr id="17" name="Connector 16"/>
+          <p:cNvCxnSpPr/>
+          <p:nvPr/>
+        </p:nvCxnSpPr>
+        <p:spPr>
+          <a:xfrm>
+            <a:off x="9766400" y="1418800"/>
+            <a:ext cx="431200" cy="0"/>
+          </a:xfrm>
+          <a:prstGeom prst="line">
+            <a:avLst/>
+          </a:prstGeom>
+          <a:ln w="33020">
+            <a:solidFill>
+              <a:srgbClr val="74A6FF"/>
+            </a:solidFill>
+          </a:ln>
+          <a:effectLst/>
+        </p:spPr>
+        <p:style>
+          <a:lnRef idx="2">
+            <a:schemeClr val="accent1"/>
+          </a:lnRef>
+          <a:fillRef idx="0">
+            <a:schemeClr val="accent1"/>
+          </a:fillRef>
+          <a:effectRef idx="1">
+            <a:schemeClr val="accent1"/>
+          </a:effectRef>
+          <a:fontRef idx="minor">
+            <a:schemeClr val="tx1"/>
+          </a:fontRef>
+        </p:style>
+      </p:cxnSp>
+      <p:cxnSp>
+        <p:nvCxnSpPr>
+          <p:cNvPr id="18" name="Connector 17"/>
+          <p:cNvCxnSpPr/>
+          <p:nvPr/>
+        </p:nvCxnSpPr>
+        <p:spPr>
+          <a:xfrm>
+            <a:off x="9727200" y="2006800"/>
+            <a:ext cx="509600" cy="0"/>
+          </a:xfrm>
+          <a:prstGeom prst="line">
+            <a:avLst/>
+          </a:prstGeom>
+          <a:ln w="33020">
+            <a:solidFill>
+              <a:srgbClr val="74A6FF"/>
+            </a:solidFill>
+          </a:ln>
+          <a:effectLst/>
+        </p:spPr>
+        <p:style>
+          <a:lnRef idx="2">
+            <a:schemeClr val="accent1"/>
+          </a:lnRef>
+          <a:fillRef idx="0">
+            <a:schemeClr val="accent1"/>
+          </a:fillRef>
+          <a:effectRef idx="1">
+            <a:schemeClr val="accent1"/>
+          </a:effectRef>
+          <a:fontRef idx="minor">
+            <a:schemeClr val="tx1"/>
+          </a:fontRef>
+        </p:style>
+      </p:cxnSp>
+      <p:sp>
+        <p:nvSpPr>
+          <p:cNvPr id="19" name="Rounded Rectangle 18"/>
           <p:cNvSpPr/>
           <p:nvPr/>
         </p:nvSpPr>
@@ -13450,7 +14038,7 @@
       </p:sp>
       <p:sp>
         <p:nvSpPr>
-          <p:cNvPr id="17" name="Rectangle 16"/>
+          <p:cNvPr id="20" name="Rectangle 19"/>
           <p:cNvSpPr/>
           <p:nvPr/>
         </p:nvSpPr>
@@ -13496,7 +14084,7 @@
       </p:sp>
       <p:sp>
         <p:nvSpPr>
-          <p:cNvPr id="18" name="TextBox 17"/>
+          <p:cNvPr id="21" name="TextBox 20"/>
           <p:cNvSpPr txBox="1"/>
           <p:nvPr/>
         </p:nvSpPr>
@@ -13565,7 +14153,7 @@
       </p:sp>
       <p:sp>
         <p:nvSpPr>
-          <p:cNvPr id="19" name="Rectangle 18"/>
+          <p:cNvPr id="22" name="Rectangle 21"/>
           <p:cNvSpPr/>
           <p:nvPr/>
         </p:nvSpPr>
@@ -13611,7 +14199,7 @@
       </p:sp>
       <p:sp>
         <p:nvSpPr>
-          <p:cNvPr id="20" name="TextBox 19"/>
+          <p:cNvPr id="23" name="TextBox 22"/>
           <p:cNvSpPr txBox="1"/>
           <p:nvPr/>
         </p:nvSpPr>
@@ -13680,7 +14268,7 @@
       </p:sp>
       <p:sp>
         <p:nvSpPr>
-          <p:cNvPr id="21" name="Rectangle 20"/>
+          <p:cNvPr id="24" name="Rectangle 23"/>
           <p:cNvSpPr/>
           <p:nvPr/>
         </p:nvSpPr>
@@ -13726,7 +14314,7 @@
       </p:sp>
       <p:sp>
         <p:nvSpPr>
-          <p:cNvPr id="22" name="TextBox 21"/>
+          <p:cNvPr id="25" name="TextBox 24"/>
           <p:cNvSpPr txBox="1"/>
           <p:nvPr/>
         </p:nvSpPr>
@@ -13795,7 +14383,7 @@
       </p:sp>
       <p:sp>
         <p:nvSpPr>
-          <p:cNvPr id="23" name="Rectangle 22"/>
+          <p:cNvPr id="26" name="Rectangle 25"/>
           <p:cNvSpPr/>
           <p:nvPr/>
         </p:nvSpPr>
@@ -13841,7 +14429,7 @@
       </p:sp>
       <p:sp>
         <p:nvSpPr>
-          <p:cNvPr id="24" name="TextBox 23"/>
+          <p:cNvPr id="27" name="TextBox 26"/>
           <p:cNvSpPr txBox="1"/>
           <p:nvPr/>
         </p:nvSpPr>
@@ -13887,7 +14475,7 @@
       </p:sp>
       <p:sp>
         <p:nvSpPr>
-          <p:cNvPr id="25" name="TextBox 24"/>
+          <p:cNvPr id="28" name="TextBox 27"/>
           <p:cNvSpPr txBox="1"/>
           <p:nvPr/>
         </p:nvSpPr>
@@ -14012,7 +14600,7 @@
         <p:spPr>
           <a:xfrm>
             <a:off x="620000" y="560000"/>
-            <a:ext cx="10952000" cy="620000"/>
+            <a:ext cx="10052000" cy="620000"/>
           </a:xfrm>
           <a:prstGeom prst="rect">
             <a:avLst/>
@@ -14233,20 +14821,44 @@
           </a:p>
         </p:txBody>
       </p:sp>
-      <p:sp>
-        <p:nvSpPr>
-          <p:cNvPr id="8" name="Rounded Rectangle 7"/>
+      <p:pic>
+        <p:nvPicPr>
+          <p:cNvPr id="8" name="Picture 7" descr="pv.png"/>
+          <p:cNvPicPr>
+            <a:picLocks noChangeAspect="1"/>
+          </p:cNvPicPr>
+          <p:nvPr/>
+        </p:nvPicPr>
+        <p:blipFill>
+          <a:blip r:embed="rId2"/>
+          <a:stretch>
+            <a:fillRect/>
+          </a:stretch>
+        </p:blipFill>
+        <p:spPr>
+          <a:xfrm>
+            <a:off x="10932000" y="275000"/>
+            <a:ext cx="640000" cy="640000"/>
+          </a:xfrm>
+          <a:prstGeom prst="rect">
+            <a:avLst/>
+          </a:prstGeom>
+        </p:spPr>
+      </p:pic>
+      <p:sp>
+        <p:nvSpPr>
+          <p:cNvPr id="9" name="Rounded Rectangle 8"/>
           <p:cNvSpPr/>
           <p:nvPr/>
         </p:nvSpPr>
         <p:spPr>
           <a:xfrm>
-            <a:off x="620000" y="1670000"/>
-            <a:ext cx="3550666" cy="660000"/>
+            <a:off x="620000" y="1710000"/>
+            <a:ext cx="3510666" cy="680000"/>
           </a:xfrm>
           <a:prstGeom prst="roundRect">
             <a:avLst>
-              <a:gd name="adj" fmla="val 12000"/>
+              <a:gd name="adj" fmla="val 11000"/>
             </a:avLst>
           </a:prstGeom>
           <a:solidFill>
@@ -14285,60 +14897,14 @@
       </p:sp>
       <p:sp>
         <p:nvSpPr>
-          <p:cNvPr id="9" name="TextBox 8"/>
-          <p:cNvSpPr txBox="1"/>
-          <p:nvPr/>
-        </p:nvSpPr>
-        <p:spPr>
-          <a:xfrm>
-            <a:off x="690000" y="1670000"/>
-            <a:ext cx="3410666" cy="660000"/>
-          </a:xfrm>
-          <a:prstGeom prst="rect">
-            <a:avLst/>
-          </a:prstGeom>
-          <a:noFill/>
-        </p:spPr>
-        <p:txBody>
-          <a:bodyPr wrap="square" anchor="ctr" lIns="0" rIns="0" tIns="0" bIns="0">
-            <a:noAutofit/>
-          </a:bodyPr>
-          <a:lstStyle/>
-          <a:p>
-            <a:pPr algn="ctr" marL="0" indent="0">
-              <a:lnSpc>
-                <a:spcPct val="112000"/>
-              </a:lnSpc>
-              <a:spcBef>
-                <a:spcPts val="0"/>
-              </a:spcBef>
-              <a:spcAft>
-                <a:spcPts val="0"/>
-              </a:spcAft>
-              <a:buNone/>
-            </a:pPr>
-            <a:r>
-              <a:rPr sz="1100" b="1" i="0">
-                <a:solidFill>
-                  <a:srgbClr val="F3F6FC"/>
-                </a:solidFill>
-                <a:latin typeface="Segoe UI Semibold"/>
-              </a:rPr>
-              <a:t>PVC</a:t>
-            </a:r>
-          </a:p>
-        </p:txBody>
-      </p:sp>
-      <p:sp>
-        <p:nvSpPr>
           <p:cNvPr id="10" name="TextBox 9"/>
           <p:cNvSpPr txBox="1"/>
           <p:nvPr/>
         </p:nvSpPr>
         <p:spPr>
           <a:xfrm>
-            <a:off x="4130666" y="1670000"/>
-            <a:ext cx="230000" cy="660000"/>
+            <a:off x="690000" y="1710000"/>
+            <a:ext cx="3370666" cy="680000"/>
           </a:xfrm>
           <a:prstGeom prst="rect">
             <a:avLst/>
@@ -14353,42 +14919,79 @@
           <a:p>
             <a:pPr algn="ctr" marL="0" indent="0">
               <a:lnSpc>
-                <a:spcPct val="100000"/>
-              </a:lnSpc>
-              <a:spcBef>
-                <a:spcPts val="0"/>
-              </a:spcBef>
-              <a:spcAft>
-                <a:spcPts val="0"/>
-              </a:spcAft>
-              <a:buNone/>
-            </a:pPr>
-            <a:r>
-              <a:rPr sz="1500" b="0" i="0">
-                <a:solidFill>
-                  <a:srgbClr val="74A6FF"/>
-                </a:solidFill>
-                <a:latin typeface="Segoe UI"/>
-              </a:rPr>
-              <a:t>→</a:t>
-            </a:r>
-          </a:p>
-        </p:txBody>
-      </p:sp>
-      <p:sp>
-        <p:nvSpPr>
-          <p:cNvPr id="11" name="Rounded Rectangle 10"/>
+                <a:spcPct val="112000"/>
+              </a:lnSpc>
+              <a:spcBef>
+                <a:spcPts val="0"/>
+              </a:spcBef>
+              <a:spcAft>
+                <a:spcPts val="0"/>
+              </a:spcAft>
+              <a:buNone/>
+            </a:pPr>
+            <a:r>
+              <a:rPr sz="1100" b="1" i="0">
+                <a:solidFill>
+                  <a:srgbClr val="F3F6FC"/>
+                </a:solidFill>
+                <a:latin typeface="Segoe UI Semibold"/>
+              </a:rPr>
+              <a:t>PVC</a:t>
+            </a:r>
+          </a:p>
+        </p:txBody>
+      </p:sp>
+      <p:cxnSp>
+        <p:nvCxnSpPr>
+          <p:cNvPr id="11" name="Connector 10"/>
+          <p:cNvCxnSpPr/>
+          <p:nvPr/>
+        </p:nvCxnSpPr>
+        <p:spPr>
+          <a:xfrm>
+            <a:off x="4154666" y="2050000"/>
+            <a:ext cx="162000" cy="0"/>
+          </a:xfrm>
+          <a:prstGeom prst="line">
+            <a:avLst/>
+          </a:prstGeom>
+          <a:ln w="22225">
+            <a:solidFill>
+              <a:srgbClr val="74A6FF"/>
+            </a:solidFill>
+            <a:tailEnd type="triangle" w="med" len="med"/>
+          </a:ln>
+          <a:effectLst/>
+        </p:spPr>
+        <p:style>
+          <a:lnRef idx="2">
+            <a:schemeClr val="accent1"/>
+          </a:lnRef>
+          <a:fillRef idx="0">
+            <a:schemeClr val="accent1"/>
+          </a:fillRef>
+          <a:effectRef idx="1">
+            <a:schemeClr val="accent1"/>
+          </a:effectRef>
+          <a:fontRef idx="minor">
+            <a:schemeClr val="tx1"/>
+          </a:fontRef>
+        </p:style>
+      </p:cxnSp>
+      <p:sp>
+        <p:nvSpPr>
+          <p:cNvPr id="12" name="Rounded Rectangle 11"/>
           <p:cNvSpPr/>
           <p:nvPr/>
         </p:nvSpPr>
         <p:spPr>
           <a:xfrm>
-            <a:off x="4320666" y="1670000"/>
-            <a:ext cx="3550666" cy="660000"/>
+            <a:off x="4340666" y="1710000"/>
+            <a:ext cx="3510666" cy="680000"/>
           </a:xfrm>
           <a:prstGeom prst="roundRect">
             <a:avLst>
-              <a:gd name="adj" fmla="val 12000"/>
+              <a:gd name="adj" fmla="val 11000"/>
             </a:avLst>
           </a:prstGeom>
           <a:solidFill>
@@ -14427,60 +15030,14 @@
       </p:sp>
       <p:sp>
         <p:nvSpPr>
-          <p:cNvPr id="12" name="TextBox 11"/>
-          <p:cNvSpPr txBox="1"/>
-          <p:nvPr/>
-        </p:nvSpPr>
-        <p:spPr>
-          <a:xfrm>
-            <a:off x="4390666" y="1670000"/>
-            <a:ext cx="3410666" cy="660000"/>
-          </a:xfrm>
-          <a:prstGeom prst="rect">
-            <a:avLst/>
-          </a:prstGeom>
-          <a:noFill/>
-        </p:spPr>
-        <p:txBody>
-          <a:bodyPr wrap="square" anchor="ctr" lIns="0" rIns="0" tIns="0" bIns="0">
-            <a:noAutofit/>
-          </a:bodyPr>
-          <a:lstStyle/>
-          <a:p>
-            <a:pPr algn="ctr" marL="0" indent="0">
-              <a:lnSpc>
-                <a:spcPct val="112000"/>
-              </a:lnSpc>
-              <a:spcBef>
-                <a:spcPts val="0"/>
-              </a:spcBef>
-              <a:spcAft>
-                <a:spcPts val="0"/>
-              </a:spcAft>
-              <a:buNone/>
-            </a:pPr>
-            <a:r>
-              <a:rPr sz="1100" b="1" i="0">
-                <a:solidFill>
-                  <a:srgbClr val="F3F6FC"/>
-                </a:solidFill>
-                <a:latin typeface="Segoe UI Semibold"/>
-              </a:rPr>
-              <a:t>StorageClass</a:t>
-            </a:r>
-          </a:p>
-        </p:txBody>
-      </p:sp>
-      <p:sp>
-        <p:nvSpPr>
           <p:cNvPr id="13" name="TextBox 12"/>
           <p:cNvSpPr txBox="1"/>
           <p:nvPr/>
         </p:nvSpPr>
         <p:spPr>
           <a:xfrm>
-            <a:off x="7831333" y="1670000"/>
-            <a:ext cx="230000" cy="660000"/>
+            <a:off x="4410666" y="1710000"/>
+            <a:ext cx="3370666" cy="680000"/>
           </a:xfrm>
           <a:prstGeom prst="rect">
             <a:avLst/>
@@ -14495,42 +15052,79 @@
           <a:p>
             <a:pPr algn="ctr" marL="0" indent="0">
               <a:lnSpc>
-                <a:spcPct val="100000"/>
-              </a:lnSpc>
-              <a:spcBef>
-                <a:spcPts val="0"/>
-              </a:spcBef>
-              <a:spcAft>
-                <a:spcPts val="0"/>
-              </a:spcAft>
-              <a:buNone/>
-            </a:pPr>
-            <a:r>
-              <a:rPr sz="1500" b="0" i="0">
-                <a:solidFill>
-                  <a:srgbClr val="74A6FF"/>
-                </a:solidFill>
-                <a:latin typeface="Segoe UI"/>
-              </a:rPr>
-              <a:t>→</a:t>
-            </a:r>
-          </a:p>
-        </p:txBody>
-      </p:sp>
-      <p:sp>
-        <p:nvSpPr>
-          <p:cNvPr id="14" name="Rounded Rectangle 13"/>
+                <a:spcPct val="112000"/>
+              </a:lnSpc>
+              <a:spcBef>
+                <a:spcPts val="0"/>
+              </a:spcBef>
+              <a:spcAft>
+                <a:spcPts val="0"/>
+              </a:spcAft>
+              <a:buNone/>
+            </a:pPr>
+            <a:r>
+              <a:rPr sz="1100" b="1" i="0">
+                <a:solidFill>
+                  <a:srgbClr val="F3F6FC"/>
+                </a:solidFill>
+                <a:latin typeface="Segoe UI Semibold"/>
+              </a:rPr>
+              <a:t>StorageClass</a:t>
+            </a:r>
+          </a:p>
+        </p:txBody>
+      </p:sp>
+      <p:cxnSp>
+        <p:nvCxnSpPr>
+          <p:cNvPr id="14" name="Connector 13"/>
+          <p:cNvCxnSpPr/>
+          <p:nvPr/>
+        </p:nvCxnSpPr>
+        <p:spPr>
+          <a:xfrm>
+            <a:off x="7875333" y="2050000"/>
+            <a:ext cx="162000" cy="0"/>
+          </a:xfrm>
+          <a:prstGeom prst="line">
+            <a:avLst/>
+          </a:prstGeom>
+          <a:ln w="22225">
+            <a:solidFill>
+              <a:srgbClr val="74A6FF"/>
+            </a:solidFill>
+            <a:tailEnd type="triangle" w="med" len="med"/>
+          </a:ln>
+          <a:effectLst/>
+        </p:spPr>
+        <p:style>
+          <a:lnRef idx="2">
+            <a:schemeClr val="accent1"/>
+          </a:lnRef>
+          <a:fillRef idx="0">
+            <a:schemeClr val="accent1"/>
+          </a:fillRef>
+          <a:effectRef idx="1">
+            <a:schemeClr val="accent1"/>
+          </a:effectRef>
+          <a:fontRef idx="minor">
+            <a:schemeClr val="tx1"/>
+          </a:fontRef>
+        </p:style>
+      </p:cxnSp>
+      <p:sp>
+        <p:nvSpPr>
+          <p:cNvPr id="15" name="Rounded Rectangle 14"/>
           <p:cNvSpPr/>
           <p:nvPr/>
         </p:nvSpPr>
         <p:spPr>
           <a:xfrm>
-            <a:off x="8021333" y="1670000"/>
-            <a:ext cx="3550666" cy="660000"/>
+            <a:off x="8061333" y="1710000"/>
+            <a:ext cx="3510666" cy="680000"/>
           </a:xfrm>
           <a:prstGeom prst="roundRect">
             <a:avLst>
-              <a:gd name="adj" fmla="val 12000"/>
+              <a:gd name="adj" fmla="val 11000"/>
             </a:avLst>
           </a:prstGeom>
           <a:solidFill>
@@ -14569,60 +15163,14 @@
       </p:sp>
       <p:sp>
         <p:nvSpPr>
-          <p:cNvPr id="15" name="TextBox 14"/>
-          <p:cNvSpPr txBox="1"/>
-          <p:nvPr/>
-        </p:nvSpPr>
-        <p:spPr>
-          <a:xfrm>
-            <a:off x="8091333" y="1670000"/>
-            <a:ext cx="3410666" cy="660000"/>
-          </a:xfrm>
-          <a:prstGeom prst="rect">
-            <a:avLst/>
-          </a:prstGeom>
-          <a:noFill/>
-        </p:spPr>
-        <p:txBody>
-          <a:bodyPr wrap="square" anchor="ctr" lIns="0" rIns="0" tIns="0" bIns="0">
-            <a:noAutofit/>
-          </a:bodyPr>
-          <a:lstStyle/>
-          <a:p>
-            <a:pPr algn="ctr" marL="0" indent="0">
-              <a:lnSpc>
-                <a:spcPct val="112000"/>
-              </a:lnSpc>
-              <a:spcBef>
-                <a:spcPts val="0"/>
-              </a:spcBef>
-              <a:spcAft>
-                <a:spcPts val="0"/>
-              </a:spcAft>
-              <a:buNone/>
-            </a:pPr>
-            <a:r>
-              <a:rPr sz="1100" b="1" i="0">
-                <a:solidFill>
-                  <a:srgbClr val="F3F6FC"/>
-                </a:solidFill>
-                <a:latin typeface="Segoe UI Semibold"/>
-              </a:rPr>
-              <a:t>PV</a:t>
-            </a:r>
-          </a:p>
-        </p:txBody>
-      </p:sp>
-      <p:sp>
-        <p:nvSpPr>
           <p:cNvPr id="16" name="TextBox 15"/>
           <p:cNvSpPr txBox="1"/>
           <p:nvPr/>
         </p:nvSpPr>
         <p:spPr>
           <a:xfrm>
-            <a:off x="9696666" y="2300000"/>
-            <a:ext cx="200000" cy="210000"/>
+            <a:off x="8131333" y="1710000"/>
+            <a:ext cx="3370666" cy="680000"/>
           </a:xfrm>
           <a:prstGeom prst="rect">
             <a:avLst/>
@@ -14637,42 +15185,79 @@
           <a:p>
             <a:pPr algn="ctr" marL="0" indent="0">
               <a:lnSpc>
-                <a:spcPct val="100000"/>
-              </a:lnSpc>
-              <a:spcBef>
-                <a:spcPts val="0"/>
-              </a:spcBef>
-              <a:spcAft>
-                <a:spcPts val="0"/>
-              </a:spcAft>
-              <a:buNone/>
-            </a:pPr>
-            <a:r>
-              <a:rPr sz="1400" b="0" i="0">
-                <a:solidFill>
-                  <a:srgbClr val="74A6FF"/>
-                </a:solidFill>
-                <a:latin typeface="Segoe UI"/>
-              </a:rPr>
-              <a:t>↓</a:t>
-            </a:r>
-          </a:p>
-        </p:txBody>
-      </p:sp>
-      <p:sp>
-        <p:nvSpPr>
-          <p:cNvPr id="17" name="Rounded Rectangle 16"/>
+                <a:spcPct val="112000"/>
+              </a:lnSpc>
+              <a:spcBef>
+                <a:spcPts val="0"/>
+              </a:spcBef>
+              <a:spcAft>
+                <a:spcPts val="0"/>
+              </a:spcAft>
+              <a:buNone/>
+            </a:pPr>
+            <a:r>
+              <a:rPr sz="1100" b="1" i="0">
+                <a:solidFill>
+                  <a:srgbClr val="F3F6FC"/>
+                </a:solidFill>
+                <a:latin typeface="Segoe UI Semibold"/>
+              </a:rPr>
+              <a:t>PV</a:t>
+            </a:r>
+          </a:p>
+        </p:txBody>
+      </p:sp>
+      <p:cxnSp>
+        <p:nvCxnSpPr>
+          <p:cNvPr id="17" name="Connector 16"/>
+          <p:cNvCxnSpPr/>
+          <p:nvPr/>
+        </p:nvCxnSpPr>
+        <p:spPr>
+          <a:xfrm>
+            <a:off x="9816666" y="2416000"/>
+            <a:ext cx="0" cy="208000"/>
+          </a:xfrm>
+          <a:prstGeom prst="line">
+            <a:avLst/>
+          </a:prstGeom>
+          <a:ln w="22225">
+            <a:solidFill>
+              <a:srgbClr val="74A6FF"/>
+            </a:solidFill>
+            <a:tailEnd type="triangle" w="med" len="med"/>
+          </a:ln>
+          <a:effectLst/>
+        </p:spPr>
+        <p:style>
+          <a:lnRef idx="2">
+            <a:schemeClr val="accent1"/>
+          </a:lnRef>
+          <a:fillRef idx="0">
+            <a:schemeClr val="accent1"/>
+          </a:fillRef>
+          <a:effectRef idx="1">
+            <a:schemeClr val="accent1"/>
+          </a:effectRef>
+          <a:fontRef idx="minor">
+            <a:schemeClr val="tx1"/>
+          </a:fontRef>
+        </p:style>
+      </p:cxnSp>
+      <p:sp>
+        <p:nvSpPr>
+          <p:cNvPr id="18" name="Rounded Rectangle 17"/>
           <p:cNvSpPr/>
           <p:nvPr/>
         </p:nvSpPr>
         <p:spPr>
           <a:xfrm>
-            <a:off x="620000" y="2480000"/>
-            <a:ext cx="3550666" cy="660000"/>
+            <a:off x="620000" y="2650000"/>
+            <a:ext cx="3510666" cy="680000"/>
           </a:xfrm>
           <a:prstGeom prst="roundRect">
             <a:avLst>
-              <a:gd name="adj" fmla="val 12000"/>
+              <a:gd name="adj" fmla="val 11000"/>
             </a:avLst>
           </a:prstGeom>
           <a:solidFill>
@@ -14711,60 +15296,14 @@
       </p:sp>
       <p:sp>
         <p:nvSpPr>
-          <p:cNvPr id="18" name="TextBox 17"/>
-          <p:cNvSpPr txBox="1"/>
-          <p:nvPr/>
-        </p:nvSpPr>
-        <p:spPr>
-          <a:xfrm>
-            <a:off x="690000" y="2480000"/>
-            <a:ext cx="3410666" cy="660000"/>
-          </a:xfrm>
-          <a:prstGeom prst="rect">
-            <a:avLst/>
-          </a:prstGeom>
-          <a:noFill/>
-        </p:spPr>
-        <p:txBody>
-          <a:bodyPr wrap="square" anchor="ctr" lIns="0" rIns="0" tIns="0" bIns="0">
-            <a:noAutofit/>
-          </a:bodyPr>
-          <a:lstStyle/>
-          <a:p>
-            <a:pPr algn="ctr" marL="0" indent="0">
-              <a:lnSpc>
-                <a:spcPct val="112000"/>
-              </a:lnSpc>
-              <a:spcBef>
-                <a:spcPts val="0"/>
-              </a:spcBef>
-              <a:spcAft>
-                <a:spcPts val="0"/>
-              </a:spcAft>
-              <a:buNone/>
-            </a:pPr>
-            <a:r>
-              <a:rPr sz="1100" b="1" i="0">
-                <a:solidFill>
-                  <a:srgbClr val="F3F6FC"/>
-                </a:solidFill>
-                <a:latin typeface="Segoe UI Semibold"/>
-              </a:rPr>
-              <a:t>AccessMode</a:t>
-            </a:r>
-          </a:p>
-        </p:txBody>
-      </p:sp>
-      <p:sp>
-        <p:nvSpPr>
           <p:cNvPr id="19" name="TextBox 18"/>
           <p:cNvSpPr txBox="1"/>
           <p:nvPr/>
         </p:nvSpPr>
         <p:spPr>
           <a:xfrm>
-            <a:off x="4130666" y="2480000"/>
-            <a:ext cx="230000" cy="660000"/>
+            <a:off x="690000" y="2650000"/>
+            <a:ext cx="3370666" cy="680000"/>
           </a:xfrm>
           <a:prstGeom prst="rect">
             <a:avLst/>
@@ -14779,42 +15318,79 @@
           <a:p>
             <a:pPr algn="ctr" marL="0" indent="0">
               <a:lnSpc>
-                <a:spcPct val="100000"/>
-              </a:lnSpc>
-              <a:spcBef>
-                <a:spcPts val="0"/>
-              </a:spcBef>
-              <a:spcAft>
-                <a:spcPts val="0"/>
-              </a:spcAft>
-              <a:buNone/>
-            </a:pPr>
-            <a:r>
-              <a:rPr sz="1500" b="0" i="0">
-                <a:solidFill>
-                  <a:srgbClr val="74A6FF"/>
-                </a:solidFill>
-                <a:latin typeface="Segoe UI"/>
-              </a:rPr>
-              <a:t>→</a:t>
-            </a:r>
-          </a:p>
-        </p:txBody>
-      </p:sp>
-      <p:sp>
-        <p:nvSpPr>
-          <p:cNvPr id="20" name="Rounded Rectangle 19"/>
+                <a:spcPct val="112000"/>
+              </a:lnSpc>
+              <a:spcBef>
+                <a:spcPts val="0"/>
+              </a:spcBef>
+              <a:spcAft>
+                <a:spcPts val="0"/>
+              </a:spcAft>
+              <a:buNone/>
+            </a:pPr>
+            <a:r>
+              <a:rPr sz="1100" b="1" i="0">
+                <a:solidFill>
+                  <a:srgbClr val="F3F6FC"/>
+                </a:solidFill>
+                <a:latin typeface="Segoe UI Semibold"/>
+              </a:rPr>
+              <a:t>AccessMode</a:t>
+            </a:r>
+          </a:p>
+        </p:txBody>
+      </p:sp>
+      <p:cxnSp>
+        <p:nvCxnSpPr>
+          <p:cNvPr id="20" name="Connector 19"/>
+          <p:cNvCxnSpPr/>
+          <p:nvPr/>
+        </p:nvCxnSpPr>
+        <p:spPr>
+          <a:xfrm>
+            <a:off x="4154666" y="2990000"/>
+            <a:ext cx="162000" cy="0"/>
+          </a:xfrm>
+          <a:prstGeom prst="line">
+            <a:avLst/>
+          </a:prstGeom>
+          <a:ln w="22225">
+            <a:solidFill>
+              <a:srgbClr val="74A6FF"/>
+            </a:solidFill>
+            <a:tailEnd type="triangle" w="med" len="med"/>
+          </a:ln>
+          <a:effectLst/>
+        </p:spPr>
+        <p:style>
+          <a:lnRef idx="2">
+            <a:schemeClr val="accent1"/>
+          </a:lnRef>
+          <a:fillRef idx="0">
+            <a:schemeClr val="accent1"/>
+          </a:fillRef>
+          <a:effectRef idx="1">
+            <a:schemeClr val="accent1"/>
+          </a:effectRef>
+          <a:fontRef idx="minor">
+            <a:schemeClr val="tx1"/>
+          </a:fontRef>
+        </p:style>
+      </p:cxnSp>
+      <p:sp>
+        <p:nvSpPr>
+          <p:cNvPr id="21" name="Rounded Rectangle 20"/>
           <p:cNvSpPr/>
           <p:nvPr/>
         </p:nvSpPr>
         <p:spPr>
           <a:xfrm>
-            <a:off x="4320666" y="2480000"/>
-            <a:ext cx="3550666" cy="660000"/>
+            <a:off x="4340666" y="2650000"/>
+            <a:ext cx="3510666" cy="680000"/>
           </a:xfrm>
           <a:prstGeom prst="roundRect">
             <a:avLst>
-              <a:gd name="adj" fmla="val 12000"/>
+              <a:gd name="adj" fmla="val 11000"/>
             </a:avLst>
           </a:prstGeom>
           <a:solidFill>
@@ -14853,60 +15429,14 @@
       </p:sp>
       <p:sp>
         <p:nvSpPr>
-          <p:cNvPr id="21" name="TextBox 20"/>
-          <p:cNvSpPr txBox="1"/>
-          <p:nvPr/>
-        </p:nvSpPr>
-        <p:spPr>
-          <a:xfrm>
-            <a:off x="4390666" y="2480000"/>
-            <a:ext cx="3410666" cy="660000"/>
-          </a:xfrm>
-          <a:prstGeom prst="rect">
-            <a:avLst/>
-          </a:prstGeom>
-          <a:noFill/>
-        </p:spPr>
-        <p:txBody>
-          <a:bodyPr wrap="square" anchor="ctr" lIns="0" rIns="0" tIns="0" bIns="0">
-            <a:noAutofit/>
-          </a:bodyPr>
-          <a:lstStyle/>
-          <a:p>
-            <a:pPr algn="ctr" marL="0" indent="0">
-              <a:lnSpc>
-                <a:spcPct val="112000"/>
-              </a:lnSpc>
-              <a:spcBef>
-                <a:spcPts val="0"/>
-              </a:spcBef>
-              <a:spcAft>
-                <a:spcPts val="0"/>
-              </a:spcAft>
-              <a:buNone/>
-            </a:pPr>
-            <a:r>
-              <a:rPr sz="1100" b="1" i="0">
-                <a:solidFill>
-                  <a:srgbClr val="F3F6FC"/>
-                </a:solidFill>
-                <a:latin typeface="Segoe UI Semibold"/>
-              </a:rPr>
-              <a:t>Capacity</a:t>
-            </a:r>
-          </a:p>
-        </p:txBody>
-      </p:sp>
-      <p:sp>
-        <p:nvSpPr>
           <p:cNvPr id="22" name="TextBox 21"/>
           <p:cNvSpPr txBox="1"/>
           <p:nvPr/>
         </p:nvSpPr>
         <p:spPr>
           <a:xfrm>
-            <a:off x="7831333" y="2480000"/>
-            <a:ext cx="230000" cy="660000"/>
+            <a:off x="4410666" y="2650000"/>
+            <a:ext cx="3370666" cy="680000"/>
           </a:xfrm>
           <a:prstGeom prst="rect">
             <a:avLst/>
@@ -14921,42 +15451,79 @@
           <a:p>
             <a:pPr algn="ctr" marL="0" indent="0">
               <a:lnSpc>
-                <a:spcPct val="100000"/>
-              </a:lnSpc>
-              <a:spcBef>
-                <a:spcPts val="0"/>
-              </a:spcBef>
-              <a:spcAft>
-                <a:spcPts val="0"/>
-              </a:spcAft>
-              <a:buNone/>
-            </a:pPr>
-            <a:r>
-              <a:rPr sz="1500" b="0" i="0">
-                <a:solidFill>
-                  <a:srgbClr val="74A6FF"/>
-                </a:solidFill>
-                <a:latin typeface="Segoe UI"/>
-              </a:rPr>
-              <a:t>→</a:t>
-            </a:r>
-          </a:p>
-        </p:txBody>
-      </p:sp>
-      <p:sp>
-        <p:nvSpPr>
-          <p:cNvPr id="23" name="Rounded Rectangle 22"/>
+                <a:spcPct val="112000"/>
+              </a:lnSpc>
+              <a:spcBef>
+                <a:spcPts val="0"/>
+              </a:spcBef>
+              <a:spcAft>
+                <a:spcPts val="0"/>
+              </a:spcAft>
+              <a:buNone/>
+            </a:pPr>
+            <a:r>
+              <a:rPr sz="1100" b="1" i="0">
+                <a:solidFill>
+                  <a:srgbClr val="F3F6FC"/>
+                </a:solidFill>
+                <a:latin typeface="Segoe UI Semibold"/>
+              </a:rPr>
+              <a:t>Capacity</a:t>
+            </a:r>
+          </a:p>
+        </p:txBody>
+      </p:sp>
+      <p:cxnSp>
+        <p:nvCxnSpPr>
+          <p:cNvPr id="23" name="Connector 22"/>
+          <p:cNvCxnSpPr/>
+          <p:nvPr/>
+        </p:nvCxnSpPr>
+        <p:spPr>
+          <a:xfrm>
+            <a:off x="7875333" y="2990000"/>
+            <a:ext cx="162000" cy="0"/>
+          </a:xfrm>
+          <a:prstGeom prst="line">
+            <a:avLst/>
+          </a:prstGeom>
+          <a:ln w="22225">
+            <a:solidFill>
+              <a:srgbClr val="74A6FF"/>
+            </a:solidFill>
+            <a:tailEnd type="triangle" w="med" len="med"/>
+          </a:ln>
+          <a:effectLst/>
+        </p:spPr>
+        <p:style>
+          <a:lnRef idx="2">
+            <a:schemeClr val="accent1"/>
+          </a:lnRef>
+          <a:fillRef idx="0">
+            <a:schemeClr val="accent1"/>
+          </a:fillRef>
+          <a:effectRef idx="1">
+            <a:schemeClr val="accent1"/>
+          </a:effectRef>
+          <a:fontRef idx="minor">
+            <a:schemeClr val="tx1"/>
+          </a:fontRef>
+        </p:style>
+      </p:cxnSp>
+      <p:sp>
+        <p:nvSpPr>
+          <p:cNvPr id="24" name="Rounded Rectangle 23"/>
           <p:cNvSpPr/>
           <p:nvPr/>
         </p:nvSpPr>
         <p:spPr>
           <a:xfrm>
-            <a:off x="8021333" y="2480000"/>
-            <a:ext cx="3550666" cy="660000"/>
+            <a:off x="8061333" y="2650000"/>
+            <a:ext cx="3510666" cy="680000"/>
           </a:xfrm>
           <a:prstGeom prst="roundRect">
             <a:avLst>
-              <a:gd name="adj" fmla="val 12000"/>
+              <a:gd name="adj" fmla="val 11000"/>
             </a:avLst>
           </a:prstGeom>
           <a:solidFill>
@@ -14995,14 +15562,14 @@
       </p:sp>
       <p:sp>
         <p:nvSpPr>
-          <p:cNvPr id="24" name="TextBox 23"/>
+          <p:cNvPr id="25" name="TextBox 24"/>
           <p:cNvSpPr txBox="1"/>
           <p:nvPr/>
         </p:nvSpPr>
         <p:spPr>
           <a:xfrm>
-            <a:off x="8091333" y="2480000"/>
-            <a:ext cx="3410666" cy="660000"/>
+            <a:off x="8131333" y="2650000"/>
+            <a:ext cx="3370666" cy="680000"/>
           </a:xfrm>
           <a:prstGeom prst="rect">
             <a:avLst/>
@@ -15041,13 +15608,13 @@
       </p:sp>
       <p:sp>
         <p:nvSpPr>
-          <p:cNvPr id="25" name="Rounded Rectangle 24"/>
+          <p:cNvPr id="26" name="Rounded Rectangle 25"/>
           <p:cNvSpPr/>
           <p:nvPr/>
         </p:nvSpPr>
         <p:spPr>
           <a:xfrm>
-            <a:off x="620000" y="3460000"/>
+            <a:off x="620000" y="3690000"/>
             <a:ext cx="10952000" cy="2320000"/>
           </a:xfrm>
           <a:prstGeom prst="roundRect">
@@ -15091,13 +15658,13 @@
       </p:sp>
       <p:sp>
         <p:nvSpPr>
-          <p:cNvPr id="26" name="Rectangle 25"/>
+          <p:cNvPr id="27" name="Rectangle 26"/>
           <p:cNvSpPr/>
           <p:nvPr/>
         </p:nvSpPr>
         <p:spPr>
           <a:xfrm>
-            <a:off x="650000" y="3484000"/>
+            <a:off x="650000" y="3714000"/>
             <a:ext cx="40000" cy="2272000"/>
           </a:xfrm>
           <a:prstGeom prst="rect">
@@ -15137,13 +15704,13 @@
       </p:sp>
       <p:sp>
         <p:nvSpPr>
-          <p:cNvPr id="27" name="TextBox 26"/>
+          <p:cNvPr id="28" name="TextBox 27"/>
           <p:cNvSpPr txBox="1"/>
           <p:nvPr/>
         </p:nvSpPr>
         <p:spPr>
           <a:xfrm>
-            <a:off x="880000" y="3700000"/>
+            <a:off x="880000" y="3930000"/>
             <a:ext cx="10432000" cy="1920000"/>
           </a:xfrm>
           <a:prstGeom prst="rect">
@@ -15406,7 +15973,7 @@
         <p:spPr>
           <a:xfrm>
             <a:off x="620000" y="560000"/>
-            <a:ext cx="10952000" cy="620000"/>
+            <a:ext cx="10052000" cy="620000"/>
           </a:xfrm>
           <a:prstGeom prst="rect">
             <a:avLst/>
@@ -15635,6 +16202,140 @@
         </p:nvSpPr>
         <p:spPr>
           <a:xfrm>
+            <a:off x="10983200" y="326200"/>
+            <a:ext cx="537600" cy="537600"/>
+          </a:xfrm>
+          <a:prstGeom prst="ellipse">
+            <a:avLst/>
+          </a:prstGeom>
+          <a:noFill/>
+          <a:ln w="38100">
+            <a:solidFill>
+              <a:srgbClr val="74A6FF"/>
+            </a:solidFill>
+          </a:ln>
+          <a:effectLst/>
+        </p:spPr>
+        <p:style>
+          <a:lnRef idx="1">
+            <a:schemeClr val="accent1"/>
+          </a:lnRef>
+          <a:fillRef idx="3">
+            <a:schemeClr val="accent1"/>
+          </a:fillRef>
+          <a:effectRef idx="2">
+            <a:schemeClr val="accent1"/>
+          </a:effectRef>
+          <a:fontRef idx="minor">
+            <a:schemeClr val="lt1"/>
+          </a:fontRef>
+        </p:style>
+        <p:txBody>
+          <a:bodyPr rtlCol="0" anchor="ctr"/>
+          <a:lstStyle/>
+          <a:p>
+            <a:pPr algn="ctr"/>
+          </a:p>
+        </p:txBody>
+      </p:sp>
+      <p:sp>
+        <p:nvSpPr>
+          <p:cNvPr id="9" name="Oval 8"/>
+          <p:cNvSpPr/>
+          <p:nvPr/>
+        </p:nvSpPr>
+        <p:spPr>
+          <a:xfrm>
+            <a:off x="11098400" y="441400"/>
+            <a:ext cx="307200" cy="307200"/>
+          </a:xfrm>
+          <a:prstGeom prst="ellipse">
+            <a:avLst/>
+          </a:prstGeom>
+          <a:noFill/>
+          <a:ln w="38100">
+            <a:solidFill>
+              <a:srgbClr val="74A6FF"/>
+            </a:solidFill>
+          </a:ln>
+          <a:effectLst/>
+        </p:spPr>
+        <p:style>
+          <a:lnRef idx="1">
+            <a:schemeClr val="accent1"/>
+          </a:lnRef>
+          <a:fillRef idx="3">
+            <a:schemeClr val="accent1"/>
+          </a:fillRef>
+          <a:effectRef idx="2">
+            <a:schemeClr val="accent1"/>
+          </a:effectRef>
+          <a:fontRef idx="minor">
+            <a:schemeClr val="lt1"/>
+          </a:fontRef>
+        </p:style>
+        <p:txBody>
+          <a:bodyPr rtlCol="0" anchor="ctr"/>
+          <a:lstStyle/>
+          <a:p>
+            <a:pPr algn="ctr"/>
+          </a:p>
+        </p:txBody>
+      </p:sp>
+      <p:sp>
+        <p:nvSpPr>
+          <p:cNvPr id="10" name="Oval 9"/>
+          <p:cNvSpPr/>
+          <p:nvPr/>
+        </p:nvSpPr>
+        <p:spPr>
+          <a:xfrm>
+            <a:off x="11200800" y="543800"/>
+            <a:ext cx="102400" cy="102400"/>
+          </a:xfrm>
+          <a:prstGeom prst="ellipse">
+            <a:avLst/>
+          </a:prstGeom>
+          <a:solidFill>
+            <a:srgbClr val="74A6FF"/>
+          </a:solidFill>
+          <a:ln w="6350">
+            <a:solidFill>
+              <a:srgbClr val="74A6FF"/>
+            </a:solidFill>
+          </a:ln>
+          <a:effectLst/>
+        </p:spPr>
+        <p:style>
+          <a:lnRef idx="1">
+            <a:schemeClr val="accent1"/>
+          </a:lnRef>
+          <a:fillRef idx="3">
+            <a:schemeClr val="accent1"/>
+          </a:fillRef>
+          <a:effectRef idx="2">
+            <a:schemeClr val="accent1"/>
+          </a:effectRef>
+          <a:fontRef idx="minor">
+            <a:schemeClr val="lt1"/>
+          </a:fontRef>
+        </p:style>
+        <p:txBody>
+          <a:bodyPr rtlCol="0" anchor="ctr"/>
+          <a:lstStyle/>
+          <a:p>
+            <a:pPr algn="ctr"/>
+          </a:p>
+        </p:txBody>
+      </p:sp>
+      <p:sp>
+        <p:nvSpPr>
+          <p:cNvPr id="11" name="Oval 10"/>
+          <p:cNvSpPr/>
+          <p:nvPr/>
+        </p:nvSpPr>
+        <p:spPr>
+          <a:xfrm>
             <a:off x="620000" y="2060000"/>
             <a:ext cx="300000" cy="300000"/>
           </a:xfrm>
@@ -15695,7 +16396,7 @@
       </p:sp>
       <p:sp>
         <p:nvSpPr>
-          <p:cNvPr id="9" name="TextBox 8"/>
+          <p:cNvPr id="12" name="TextBox 11"/>
           <p:cNvSpPr txBox="1"/>
           <p:nvPr/>
         </p:nvSpPr>
@@ -15741,7 +16442,7 @@
       </p:sp>
       <p:sp>
         <p:nvSpPr>
-          <p:cNvPr id="10" name="Oval 9"/>
+          <p:cNvPr id="13" name="Oval 12"/>
           <p:cNvSpPr/>
           <p:nvPr/>
         </p:nvSpPr>
@@ -15807,7 +16508,7 @@
       </p:sp>
       <p:sp>
         <p:nvSpPr>
-          <p:cNvPr id="11" name="TextBox 10"/>
+          <p:cNvPr id="14" name="TextBox 13"/>
           <p:cNvSpPr txBox="1"/>
           <p:nvPr/>
         </p:nvSpPr>
@@ -15853,7 +16554,7 @@
       </p:sp>
       <p:sp>
         <p:nvSpPr>
-          <p:cNvPr id="12" name="Oval 11"/>
+          <p:cNvPr id="15" name="Oval 14"/>
           <p:cNvSpPr/>
           <p:nvPr/>
         </p:nvSpPr>
@@ -15919,7 +16620,7 @@
       </p:sp>
       <p:sp>
         <p:nvSpPr>
-          <p:cNvPr id="13" name="TextBox 12"/>
+          <p:cNvPr id="16" name="TextBox 15"/>
           <p:cNvSpPr txBox="1"/>
           <p:nvPr/>
         </p:nvSpPr>
@@ -15965,7 +16666,7 @@
       </p:sp>
       <p:sp>
         <p:nvSpPr>
-          <p:cNvPr id="14" name="Oval 13"/>
+          <p:cNvPr id="17" name="Oval 16"/>
           <p:cNvSpPr/>
           <p:nvPr/>
         </p:nvSpPr>
@@ -16031,7 +16732,7 @@
       </p:sp>
       <p:sp>
         <p:nvSpPr>
-          <p:cNvPr id="15" name="TextBox 14"/>
+          <p:cNvPr id="18" name="TextBox 17"/>
           <p:cNvSpPr txBox="1"/>
           <p:nvPr/>
         </p:nvSpPr>
@@ -16077,7 +16778,7 @@
       </p:sp>
       <p:sp>
         <p:nvSpPr>
-          <p:cNvPr id="16" name="Oval 15"/>
+          <p:cNvPr id="19" name="Oval 18"/>
           <p:cNvSpPr/>
           <p:nvPr/>
         </p:nvSpPr>
@@ -16143,7 +16844,7 @@
       </p:sp>
       <p:sp>
         <p:nvSpPr>
-          <p:cNvPr id="17" name="TextBox 16"/>
+          <p:cNvPr id="20" name="TextBox 19"/>
           <p:cNvSpPr txBox="1"/>
           <p:nvPr/>
         </p:nvSpPr>
@@ -16189,7 +16890,7 @@
       </p:sp>
       <p:sp>
         <p:nvSpPr>
-          <p:cNvPr id="18" name="Oval 17"/>
+          <p:cNvPr id="21" name="Oval 20"/>
           <p:cNvSpPr/>
           <p:nvPr/>
         </p:nvSpPr>
@@ -16255,7 +16956,7 @@
       </p:sp>
       <p:sp>
         <p:nvSpPr>
-          <p:cNvPr id="19" name="TextBox 18"/>
+          <p:cNvPr id="22" name="TextBox 21"/>
           <p:cNvSpPr txBox="1"/>
           <p:nvPr/>
         </p:nvSpPr>
@@ -16301,7 +17002,7 @@
       </p:sp>
       <p:sp>
         <p:nvSpPr>
-          <p:cNvPr id="20" name="Oval 19"/>
+          <p:cNvPr id="23" name="Oval 22"/>
           <p:cNvSpPr/>
           <p:nvPr/>
         </p:nvSpPr>
@@ -16367,7 +17068,7 @@
       </p:sp>
       <p:sp>
         <p:nvSpPr>
-          <p:cNvPr id="21" name="TextBox 20"/>
+          <p:cNvPr id="24" name="TextBox 23"/>
           <p:cNvSpPr txBox="1"/>
           <p:nvPr/>
         </p:nvSpPr>
@@ -17091,7 +17792,311 @@
       </p:sp>
       <p:sp>
         <p:nvSpPr>
-          <p:cNvPr id="14" name="Rounded Rectangle 13"/>
+          <p:cNvPr id="14" name="Oval 13"/>
+          <p:cNvSpPr/>
+          <p:nvPr/>
+        </p:nvSpPr>
+        <p:spPr>
+          <a:xfrm>
+            <a:off x="9825200" y="1497200"/>
+            <a:ext cx="313600" cy="313600"/>
+          </a:xfrm>
+          <a:prstGeom prst="ellipse">
+            <a:avLst/>
+          </a:prstGeom>
+          <a:noFill/>
+          <a:ln w="33020">
+            <a:solidFill>
+              <a:srgbClr val="FF7B72"/>
+            </a:solidFill>
+          </a:ln>
+          <a:effectLst/>
+        </p:spPr>
+        <p:style>
+          <a:lnRef idx="1">
+            <a:schemeClr val="accent1"/>
+          </a:lnRef>
+          <a:fillRef idx="3">
+            <a:schemeClr val="accent1"/>
+          </a:fillRef>
+          <a:effectRef idx="2">
+            <a:schemeClr val="accent1"/>
+          </a:effectRef>
+          <a:fontRef idx="minor">
+            <a:schemeClr val="lt1"/>
+          </a:fontRef>
+        </p:style>
+        <p:txBody>
+          <a:bodyPr rtlCol="0" anchor="ctr"/>
+          <a:lstStyle/>
+          <a:p>
+            <a:pPr algn="ctr"/>
+          </a:p>
+        </p:txBody>
+      </p:sp>
+      <p:sp>
+        <p:nvSpPr>
+          <p:cNvPr id="15" name="Oval 14"/>
+          <p:cNvSpPr/>
+          <p:nvPr/>
+        </p:nvSpPr>
+        <p:spPr>
+          <a:xfrm>
+            <a:off x="9766400" y="1752000"/>
+            <a:ext cx="431200" cy="490000"/>
+          </a:xfrm>
+          <a:prstGeom prst="ellipse">
+            <a:avLst/>
+          </a:prstGeom>
+          <a:noFill/>
+          <a:ln w="33020">
+            <a:solidFill>
+              <a:srgbClr val="FF7B72"/>
+            </a:solidFill>
+          </a:ln>
+          <a:effectLst/>
+        </p:spPr>
+        <p:style>
+          <a:lnRef idx="1">
+            <a:schemeClr val="accent1"/>
+          </a:lnRef>
+          <a:fillRef idx="3">
+            <a:schemeClr val="accent1"/>
+          </a:fillRef>
+          <a:effectRef idx="2">
+            <a:schemeClr val="accent1"/>
+          </a:effectRef>
+          <a:fontRef idx="minor">
+            <a:schemeClr val="lt1"/>
+          </a:fontRef>
+        </p:style>
+        <p:txBody>
+          <a:bodyPr rtlCol="0" anchor="ctr"/>
+          <a:lstStyle/>
+          <a:p>
+            <a:pPr algn="ctr"/>
+          </a:p>
+        </p:txBody>
+      </p:sp>
+      <p:cxnSp>
+        <p:nvCxnSpPr>
+          <p:cNvPr id="16" name="Connector 15"/>
+          <p:cNvCxnSpPr/>
+          <p:nvPr/>
+        </p:nvCxnSpPr>
+        <p:spPr>
+          <a:xfrm flipH="1" flipV="1">
+            <a:off x="9550800" y="1791200"/>
+            <a:ext cx="235200" cy="58800"/>
+          </a:xfrm>
+          <a:prstGeom prst="line">
+            <a:avLst/>
+          </a:prstGeom>
+          <a:ln w="33020">
+            <a:solidFill>
+              <a:srgbClr val="FF7B72"/>
+            </a:solidFill>
+          </a:ln>
+          <a:effectLst/>
+        </p:spPr>
+        <p:style>
+          <a:lnRef idx="2">
+            <a:schemeClr val="accent1"/>
+          </a:lnRef>
+          <a:fillRef idx="0">
+            <a:schemeClr val="accent1"/>
+          </a:fillRef>
+          <a:effectRef idx="1">
+            <a:schemeClr val="accent1"/>
+          </a:effectRef>
+          <a:fontRef idx="minor">
+            <a:schemeClr val="tx1"/>
+          </a:fontRef>
+        </p:style>
+      </p:cxnSp>
+      <p:cxnSp>
+        <p:nvCxnSpPr>
+          <p:cNvPr id="17" name="Connector 16"/>
+          <p:cNvCxnSpPr/>
+          <p:nvPr/>
+        </p:nvCxnSpPr>
+        <p:spPr>
+          <a:xfrm flipV="1">
+            <a:off x="10178000" y="1791200"/>
+            <a:ext cx="235200" cy="58800"/>
+          </a:xfrm>
+          <a:prstGeom prst="line">
+            <a:avLst/>
+          </a:prstGeom>
+          <a:ln w="33020">
+            <a:solidFill>
+              <a:srgbClr val="FF7B72"/>
+            </a:solidFill>
+          </a:ln>
+          <a:effectLst/>
+        </p:spPr>
+        <p:style>
+          <a:lnRef idx="2">
+            <a:schemeClr val="accent1"/>
+          </a:lnRef>
+          <a:fillRef idx="0">
+            <a:schemeClr val="accent1"/>
+          </a:fillRef>
+          <a:effectRef idx="1">
+            <a:schemeClr val="accent1"/>
+          </a:effectRef>
+          <a:fontRef idx="minor">
+            <a:schemeClr val="tx1"/>
+          </a:fontRef>
+        </p:style>
+      </p:cxnSp>
+      <p:cxnSp>
+        <p:nvCxnSpPr>
+          <p:cNvPr id="18" name="Connector 17"/>
+          <p:cNvCxnSpPr/>
+          <p:nvPr/>
+        </p:nvCxnSpPr>
+        <p:spPr>
+          <a:xfrm flipH="1" flipV="1">
+            <a:off x="9550800" y="1948000"/>
+            <a:ext cx="235200" cy="58800"/>
+          </a:xfrm>
+          <a:prstGeom prst="line">
+            <a:avLst/>
+          </a:prstGeom>
+          <a:ln w="33020">
+            <a:solidFill>
+              <a:srgbClr val="FF7B72"/>
+            </a:solidFill>
+          </a:ln>
+          <a:effectLst/>
+        </p:spPr>
+        <p:style>
+          <a:lnRef idx="2">
+            <a:schemeClr val="accent1"/>
+          </a:lnRef>
+          <a:fillRef idx="0">
+            <a:schemeClr val="accent1"/>
+          </a:fillRef>
+          <a:effectRef idx="1">
+            <a:schemeClr val="accent1"/>
+          </a:effectRef>
+          <a:fontRef idx="minor">
+            <a:schemeClr val="tx1"/>
+          </a:fontRef>
+        </p:style>
+      </p:cxnSp>
+      <p:cxnSp>
+        <p:nvCxnSpPr>
+          <p:cNvPr id="19" name="Connector 18"/>
+          <p:cNvCxnSpPr/>
+          <p:nvPr/>
+        </p:nvCxnSpPr>
+        <p:spPr>
+          <a:xfrm flipV="1">
+            <a:off x="10178000" y="1948000"/>
+            <a:ext cx="235200" cy="58800"/>
+          </a:xfrm>
+          <a:prstGeom prst="line">
+            <a:avLst/>
+          </a:prstGeom>
+          <a:ln w="33020">
+            <a:solidFill>
+              <a:srgbClr val="FF7B72"/>
+            </a:solidFill>
+          </a:ln>
+          <a:effectLst/>
+        </p:spPr>
+        <p:style>
+          <a:lnRef idx="2">
+            <a:schemeClr val="accent1"/>
+          </a:lnRef>
+          <a:fillRef idx="0">
+            <a:schemeClr val="accent1"/>
+          </a:fillRef>
+          <a:effectRef idx="1">
+            <a:schemeClr val="accent1"/>
+          </a:effectRef>
+          <a:fontRef idx="minor">
+            <a:schemeClr val="tx1"/>
+          </a:fontRef>
+        </p:style>
+      </p:cxnSp>
+      <p:cxnSp>
+        <p:nvCxnSpPr>
+          <p:cNvPr id="20" name="Connector 19"/>
+          <p:cNvCxnSpPr/>
+          <p:nvPr/>
+        </p:nvCxnSpPr>
+        <p:spPr>
+          <a:xfrm flipH="1" flipV="1">
+            <a:off x="9550800" y="2104800"/>
+            <a:ext cx="235200" cy="58800"/>
+          </a:xfrm>
+          <a:prstGeom prst="line">
+            <a:avLst/>
+          </a:prstGeom>
+          <a:ln w="33020">
+            <a:solidFill>
+              <a:srgbClr val="FF7B72"/>
+            </a:solidFill>
+          </a:ln>
+          <a:effectLst/>
+        </p:spPr>
+        <p:style>
+          <a:lnRef idx="2">
+            <a:schemeClr val="accent1"/>
+          </a:lnRef>
+          <a:fillRef idx="0">
+            <a:schemeClr val="accent1"/>
+          </a:fillRef>
+          <a:effectRef idx="1">
+            <a:schemeClr val="accent1"/>
+          </a:effectRef>
+          <a:fontRef idx="minor">
+            <a:schemeClr val="tx1"/>
+          </a:fontRef>
+        </p:style>
+      </p:cxnSp>
+      <p:cxnSp>
+        <p:nvCxnSpPr>
+          <p:cNvPr id="21" name="Connector 20"/>
+          <p:cNvCxnSpPr/>
+          <p:nvPr/>
+        </p:nvCxnSpPr>
+        <p:spPr>
+          <a:xfrm flipV="1">
+            <a:off x="10178000" y="2104800"/>
+            <a:ext cx="235200" cy="58800"/>
+          </a:xfrm>
+          <a:prstGeom prst="line">
+            <a:avLst/>
+          </a:prstGeom>
+          <a:ln w="33020">
+            <a:solidFill>
+              <a:srgbClr val="FF7B72"/>
+            </a:solidFill>
+          </a:ln>
+          <a:effectLst/>
+        </p:spPr>
+        <p:style>
+          <a:lnRef idx="2">
+            <a:schemeClr val="accent1"/>
+          </a:lnRef>
+          <a:fillRef idx="0">
+            <a:schemeClr val="accent1"/>
+          </a:fillRef>
+          <a:effectRef idx="1">
+            <a:schemeClr val="accent1"/>
+          </a:effectRef>
+          <a:fontRef idx="minor">
+            <a:schemeClr val="tx1"/>
+          </a:fontRef>
+        </p:style>
+      </p:cxnSp>
+      <p:sp>
+        <p:nvSpPr>
+          <p:cNvPr id="22" name="Rounded Rectangle 21"/>
           <p:cNvSpPr/>
           <p:nvPr/>
         </p:nvSpPr>
@@ -17141,7 +18146,7 @@
       </p:sp>
       <p:sp>
         <p:nvSpPr>
-          <p:cNvPr id="15" name="Rectangle 14"/>
+          <p:cNvPr id="23" name="Rectangle 22"/>
           <p:cNvSpPr/>
           <p:nvPr/>
         </p:nvSpPr>
@@ -17187,7 +18192,7 @@
       </p:sp>
       <p:sp>
         <p:nvSpPr>
-          <p:cNvPr id="16" name="TextBox 15"/>
+          <p:cNvPr id="24" name="TextBox 23"/>
           <p:cNvSpPr txBox="1"/>
           <p:nvPr/>
         </p:nvSpPr>
@@ -17256,7 +18261,7 @@
       </p:sp>
       <p:sp>
         <p:nvSpPr>
-          <p:cNvPr id="17" name="Rectangle 16"/>
+          <p:cNvPr id="25" name="Rectangle 24"/>
           <p:cNvSpPr/>
           <p:nvPr/>
         </p:nvSpPr>
@@ -17302,7 +18307,7 @@
       </p:sp>
       <p:sp>
         <p:nvSpPr>
-          <p:cNvPr id="18" name="TextBox 17"/>
+          <p:cNvPr id="26" name="TextBox 25"/>
           <p:cNvSpPr txBox="1"/>
           <p:nvPr/>
         </p:nvSpPr>
@@ -17371,7 +18376,7 @@
       </p:sp>
       <p:sp>
         <p:nvSpPr>
-          <p:cNvPr id="19" name="Rectangle 18"/>
+          <p:cNvPr id="27" name="Rectangle 26"/>
           <p:cNvSpPr/>
           <p:nvPr/>
         </p:nvSpPr>
@@ -17417,7 +18422,7 @@
       </p:sp>
       <p:sp>
         <p:nvSpPr>
-          <p:cNvPr id="20" name="TextBox 19"/>
+          <p:cNvPr id="28" name="TextBox 27"/>
           <p:cNvSpPr txBox="1"/>
           <p:nvPr/>
         </p:nvSpPr>
@@ -17486,7 +18491,7 @@
       </p:sp>
       <p:sp>
         <p:nvSpPr>
-          <p:cNvPr id="21" name="Rectangle 20"/>
+          <p:cNvPr id="29" name="Rectangle 28"/>
           <p:cNvSpPr/>
           <p:nvPr/>
         </p:nvSpPr>
@@ -17532,7 +18537,7 @@
       </p:sp>
       <p:sp>
         <p:nvSpPr>
-          <p:cNvPr id="22" name="TextBox 21"/>
+          <p:cNvPr id="30" name="TextBox 29"/>
           <p:cNvSpPr txBox="1"/>
           <p:nvPr/>
         </p:nvSpPr>
@@ -17578,7 +18583,7 @@
       </p:sp>
       <p:sp>
         <p:nvSpPr>
-          <p:cNvPr id="23" name="TextBox 22"/>
+          <p:cNvPr id="31" name="TextBox 30"/>
           <p:cNvSpPr txBox="1"/>
           <p:nvPr/>
         </p:nvSpPr>
@@ -17703,7 +18708,7 @@
         <p:spPr>
           <a:xfrm>
             <a:off x="620000" y="560000"/>
-            <a:ext cx="10952000" cy="620000"/>
+            <a:ext cx="10052000" cy="620000"/>
           </a:xfrm>
           <a:prstGeom prst="rect">
             <a:avLst/>
@@ -17924,9 +18929,33 @@
           </a:p>
         </p:txBody>
       </p:sp>
-      <p:sp>
-        <p:nvSpPr>
-          <p:cNvPr id="8" name="TextBox 7"/>
+      <p:pic>
+        <p:nvPicPr>
+          <p:cNvPr id="8" name="Picture 7" descr="pv.png"/>
+          <p:cNvPicPr>
+            <a:picLocks noChangeAspect="1"/>
+          </p:cNvPicPr>
+          <p:nvPr/>
+        </p:nvPicPr>
+        <p:blipFill>
+          <a:blip r:embed="rId2"/>
+          <a:stretch>
+            <a:fillRect/>
+          </a:stretch>
+        </p:blipFill>
+        <p:spPr>
+          <a:xfrm>
+            <a:off x="10932000" y="275000"/>
+            <a:ext cx="640000" cy="640000"/>
+          </a:xfrm>
+          <a:prstGeom prst="rect">
+            <a:avLst/>
+          </a:prstGeom>
+        </p:spPr>
+      </p:pic>
+      <p:sp>
+        <p:nvSpPr>
+          <p:cNvPr id="9" name="TextBox 8"/>
           <p:cNvSpPr txBox="1"/>
           <p:nvPr/>
         </p:nvSpPr>
@@ -17972,7 +19001,7 @@
       </p:sp>
       <p:sp>
         <p:nvSpPr>
-          <p:cNvPr id="9" name="Rounded Rectangle 8"/>
+          <p:cNvPr id="10" name="Rounded Rectangle 9"/>
           <p:cNvSpPr/>
           <p:nvPr/>
         </p:nvSpPr>
@@ -18022,7 +19051,7 @@
       </p:sp>
       <p:sp>
         <p:nvSpPr>
-          <p:cNvPr id="10" name="Rectangle 9"/>
+          <p:cNvPr id="11" name="Rectangle 10"/>
           <p:cNvSpPr/>
           <p:nvPr/>
         </p:nvSpPr>
@@ -18068,7 +19097,7 @@
       </p:sp>
       <p:sp>
         <p:nvSpPr>
-          <p:cNvPr id="11" name="TextBox 10"/>
+          <p:cNvPr id="12" name="TextBox 11"/>
           <p:cNvSpPr txBox="1"/>
           <p:nvPr/>
         </p:nvSpPr>
@@ -18270,7 +19299,7 @@
         <p:spPr>
           <a:xfrm>
             <a:off x="620000" y="560000"/>
-            <a:ext cx="10952000" cy="620000"/>
+            <a:ext cx="10052000" cy="620000"/>
           </a:xfrm>
           <a:prstGeom prst="rect">
             <a:avLst/>
@@ -18499,6 +19528,124 @@
         </p:nvSpPr>
         <p:spPr>
           <a:xfrm>
+            <a:off x="10996000" y="339000"/>
+            <a:ext cx="512000" cy="512000"/>
+          </a:xfrm>
+          <a:prstGeom prst="roundRect">
+            <a:avLst>
+              <a:gd name="adj" fmla="val 20000"/>
+            </a:avLst>
+          </a:prstGeom>
+          <a:noFill/>
+          <a:ln w="38100">
+            <a:solidFill>
+              <a:srgbClr val="74A6FF"/>
+            </a:solidFill>
+          </a:ln>
+          <a:effectLst/>
+        </p:spPr>
+        <p:style>
+          <a:lnRef idx="1">
+            <a:schemeClr val="accent1"/>
+          </a:lnRef>
+          <a:fillRef idx="3">
+            <a:schemeClr val="accent1"/>
+          </a:fillRef>
+          <a:effectRef idx="2">
+            <a:schemeClr val="accent1"/>
+          </a:effectRef>
+          <a:fontRef idx="minor">
+            <a:schemeClr val="lt1"/>
+          </a:fontRef>
+        </p:style>
+        <p:txBody>
+          <a:bodyPr rtlCol="0" anchor="ctr"/>
+          <a:lstStyle/>
+          <a:p>
+            <a:pPr algn="ctr"/>
+          </a:p>
+        </p:txBody>
+      </p:sp>
+      <p:cxnSp>
+        <p:nvCxnSpPr>
+          <p:cNvPr id="9" name="Connector 8"/>
+          <p:cNvCxnSpPr/>
+          <p:nvPr/>
+        </p:nvCxnSpPr>
+        <p:spPr>
+          <a:xfrm>
+            <a:off x="11124000" y="607800"/>
+            <a:ext cx="89600" cy="102400"/>
+          </a:xfrm>
+          <a:prstGeom prst="line">
+            <a:avLst/>
+          </a:prstGeom>
+          <a:ln w="49530">
+            <a:solidFill>
+              <a:srgbClr val="74A6FF"/>
+            </a:solidFill>
+          </a:ln>
+          <a:effectLst/>
+        </p:spPr>
+        <p:style>
+          <a:lnRef idx="2">
+            <a:schemeClr val="accent1"/>
+          </a:lnRef>
+          <a:fillRef idx="0">
+            <a:schemeClr val="accent1"/>
+          </a:fillRef>
+          <a:effectRef idx="1">
+            <a:schemeClr val="accent1"/>
+          </a:effectRef>
+          <a:fontRef idx="minor">
+            <a:schemeClr val="tx1"/>
+          </a:fontRef>
+        </p:style>
+      </p:cxnSp>
+      <p:cxnSp>
+        <p:nvCxnSpPr>
+          <p:cNvPr id="10" name="Connector 9"/>
+          <p:cNvCxnSpPr/>
+          <p:nvPr/>
+        </p:nvCxnSpPr>
+        <p:spPr>
+          <a:xfrm flipV="1">
+            <a:off x="11213600" y="479800"/>
+            <a:ext cx="179200" cy="230400"/>
+          </a:xfrm>
+          <a:prstGeom prst="line">
+            <a:avLst/>
+          </a:prstGeom>
+          <a:ln w="49530">
+            <a:solidFill>
+              <a:srgbClr val="74A6FF"/>
+            </a:solidFill>
+          </a:ln>
+          <a:effectLst/>
+        </p:spPr>
+        <p:style>
+          <a:lnRef idx="2">
+            <a:schemeClr val="accent1"/>
+          </a:lnRef>
+          <a:fillRef idx="0">
+            <a:schemeClr val="accent1"/>
+          </a:fillRef>
+          <a:effectRef idx="1">
+            <a:schemeClr val="accent1"/>
+          </a:effectRef>
+          <a:fontRef idx="minor">
+            <a:schemeClr val="tx1"/>
+          </a:fontRef>
+        </p:style>
+      </p:cxnSp>
+      <p:sp>
+        <p:nvSpPr>
+          <p:cNvPr id="11" name="Rounded Rectangle 10"/>
+          <p:cNvSpPr/>
+          <p:nvPr/>
+        </p:nvSpPr>
+        <p:spPr>
+          <a:xfrm>
             <a:off x="620000" y="2620000"/>
             <a:ext cx="300000" cy="300000"/>
           </a:xfrm>
@@ -18561,7 +19708,7 @@
       </p:sp>
       <p:sp>
         <p:nvSpPr>
-          <p:cNvPr id="9" name="TextBox 8"/>
+          <p:cNvPr id="12" name="TextBox 11"/>
           <p:cNvSpPr txBox="1"/>
           <p:nvPr/>
         </p:nvSpPr>
@@ -18607,7 +19754,7 @@
       </p:sp>
       <p:sp>
         <p:nvSpPr>
-          <p:cNvPr id="10" name="Rounded Rectangle 9"/>
+          <p:cNvPr id="13" name="Rounded Rectangle 12"/>
           <p:cNvSpPr/>
           <p:nvPr/>
         </p:nvSpPr>
@@ -18675,7 +19822,7 @@
       </p:sp>
       <p:sp>
         <p:nvSpPr>
-          <p:cNvPr id="11" name="TextBox 10"/>
+          <p:cNvPr id="14" name="TextBox 13"/>
           <p:cNvSpPr txBox="1"/>
           <p:nvPr/>
         </p:nvSpPr>
@@ -18721,7 +19868,7 @@
       </p:sp>
       <p:sp>
         <p:nvSpPr>
-          <p:cNvPr id="12" name="Rounded Rectangle 11"/>
+          <p:cNvPr id="15" name="Rounded Rectangle 14"/>
           <p:cNvSpPr/>
           <p:nvPr/>
         </p:nvSpPr>
@@ -18789,7 +19936,7 @@
       </p:sp>
       <p:sp>
         <p:nvSpPr>
-          <p:cNvPr id="13" name="TextBox 12"/>
+          <p:cNvPr id="16" name="TextBox 15"/>
           <p:cNvSpPr txBox="1"/>
           <p:nvPr/>
         </p:nvSpPr>
@@ -18835,7 +19982,7 @@
       </p:sp>
       <p:sp>
         <p:nvSpPr>
-          <p:cNvPr id="14" name="Rounded Rectangle 13"/>
+          <p:cNvPr id="17" name="Rounded Rectangle 16"/>
           <p:cNvSpPr/>
           <p:nvPr/>
         </p:nvSpPr>
@@ -18903,7 +20050,7 @@
       </p:sp>
       <p:sp>
         <p:nvSpPr>
-          <p:cNvPr id="15" name="TextBox 14"/>
+          <p:cNvPr id="18" name="TextBox 17"/>
           <p:cNvSpPr txBox="1"/>
           <p:nvPr/>
         </p:nvSpPr>
@@ -18949,7 +20096,7 @@
       </p:sp>
       <p:sp>
         <p:nvSpPr>
-          <p:cNvPr id="16" name="Rounded Rectangle 15"/>
+          <p:cNvPr id="19" name="Rounded Rectangle 18"/>
           <p:cNvSpPr/>
           <p:nvPr/>
         </p:nvSpPr>
@@ -19017,7 +20164,7 @@
       </p:sp>
       <p:sp>
         <p:nvSpPr>
-          <p:cNvPr id="17" name="TextBox 16"/>
+          <p:cNvPr id="20" name="TextBox 19"/>
           <p:cNvSpPr txBox="1"/>
           <p:nvPr/>
         </p:nvSpPr>
@@ -19063,7 +20210,7 @@
       </p:sp>
       <p:sp>
         <p:nvSpPr>
-          <p:cNvPr id="18" name="Rounded Rectangle 17"/>
+          <p:cNvPr id="21" name="Rounded Rectangle 20"/>
           <p:cNvSpPr/>
           <p:nvPr/>
         </p:nvSpPr>
@@ -19131,7 +20278,7 @@
       </p:sp>
       <p:sp>
         <p:nvSpPr>
-          <p:cNvPr id="19" name="TextBox 18"/>
+          <p:cNvPr id="22" name="TextBox 21"/>
           <p:cNvSpPr txBox="1"/>
           <p:nvPr/>
         </p:nvSpPr>
@@ -19177,7 +20324,7 @@
       </p:sp>
       <p:sp>
         <p:nvSpPr>
-          <p:cNvPr id="20" name="Rounded Rectangle 19"/>
+          <p:cNvPr id="23" name="Rounded Rectangle 22"/>
           <p:cNvSpPr/>
           <p:nvPr/>
         </p:nvSpPr>
@@ -19245,7 +20392,7 @@
       </p:sp>
       <p:sp>
         <p:nvSpPr>
-          <p:cNvPr id="21" name="TextBox 20"/>
+          <p:cNvPr id="24" name="TextBox 23"/>
           <p:cNvSpPr txBox="1"/>
           <p:nvPr/>
         </p:nvSpPr>
@@ -19291,7 +20438,7 @@
       </p:sp>
       <p:sp>
         <p:nvSpPr>
-          <p:cNvPr id="22" name="Rounded Rectangle 21"/>
+          <p:cNvPr id="25" name="Rounded Rectangle 24"/>
           <p:cNvSpPr/>
           <p:nvPr/>
         </p:nvSpPr>
@@ -19359,7 +20506,7 @@
       </p:sp>
       <p:sp>
         <p:nvSpPr>
-          <p:cNvPr id="23" name="TextBox 22"/>
+          <p:cNvPr id="26" name="TextBox 25"/>
           <p:cNvSpPr txBox="1"/>
           <p:nvPr/>
         </p:nvSpPr>
@@ -19405,7 +20552,7 @@
       </p:sp>
       <p:sp>
         <p:nvSpPr>
-          <p:cNvPr id="24" name="Rounded Rectangle 23"/>
+          <p:cNvPr id="27" name="Rounded Rectangle 26"/>
           <p:cNvSpPr/>
           <p:nvPr/>
         </p:nvSpPr>
@@ -19473,7 +20620,7 @@
       </p:sp>
       <p:sp>
         <p:nvSpPr>
-          <p:cNvPr id="25" name="TextBox 24"/>
+          <p:cNvPr id="28" name="TextBox 27"/>
           <p:cNvSpPr txBox="1"/>
           <p:nvPr/>
         </p:nvSpPr>
@@ -19519,7 +20666,7 @@
       </p:sp>
       <p:sp>
         <p:nvSpPr>
-          <p:cNvPr id="26" name="Rounded Rectangle 25"/>
+          <p:cNvPr id="29" name="Rounded Rectangle 28"/>
           <p:cNvSpPr/>
           <p:nvPr/>
         </p:nvSpPr>
@@ -19587,7 +20734,7 @@
       </p:sp>
       <p:sp>
         <p:nvSpPr>
-          <p:cNvPr id="27" name="TextBox 26"/>
+          <p:cNvPr id="30" name="TextBox 29"/>
           <p:cNvSpPr txBox="1"/>
           <p:nvPr/>
         </p:nvSpPr>
@@ -19703,53 +20850,23 @@
       </p:sp>
       <p:sp>
         <p:nvSpPr>
-          <p:cNvPr id="3" name="Freeform 2"/>
+          <p:cNvPr id="3" name="Oval 2"/>
           <p:cNvSpPr/>
           <p:nvPr/>
         </p:nvSpPr>
         <p:spPr>
           <a:xfrm>
-            <a:off x="-163645" y="4308000"/>
-            <a:ext cx="2827290" cy="2756404"/>
-          </a:xfrm>
-          <a:custGeom>
-            <a:avLst/>
-            <a:gdLst/>
-            <a:ahLst/>
-            <a:cxnLst/>
-            <a:rect l="l" t="t" r="r" b="b"/>
-            <a:pathLst>
-              <a:path w="2827290" h="2756404">
-                <a:moveTo>
-                  <a:pt x="1413645" y="0"/>
-                </a:moveTo>
-                <a:lnTo>
-                  <a:pt x="2547300" y="545939"/>
-                </a:lnTo>
-                <a:lnTo>
-                  <a:pt x="2827290" y="1772655"/>
-                </a:lnTo>
-                <a:lnTo>
-                  <a:pt x="2042776" y="2756404"/>
-                </a:lnTo>
-                <a:lnTo>
-                  <a:pt x="784513" y="2756404"/>
-                </a:lnTo>
-                <a:lnTo>
-                  <a:pt x="0" y="1772655"/>
-                </a:lnTo>
-                <a:lnTo>
-                  <a:pt x="279989" y="545939"/>
-                </a:lnTo>
-                <a:close/>
-              </a:path>
-            </a:pathLst>
-          </a:custGeom>
-          <a:noFill/>
-          <a:ln w="31750">
-            <a:solidFill>
-              <a:srgbClr val="26354E"/>
-            </a:solidFill>
+            <a:off x="-1400000" y="4358000"/>
+            <a:ext cx="3800000" cy="3800000"/>
+          </a:xfrm>
+          <a:prstGeom prst="ellipse">
+            <a:avLst/>
+          </a:prstGeom>
+          <a:solidFill>
+            <a:srgbClr val="0B1220"/>
+          </a:solidFill>
+          <a:ln>
+            <a:noFill/>
           </a:ln>
           <a:effectLst/>
         </p:spPr>
@@ -19775,9 +20892,33 @@
           </a:p>
         </p:txBody>
       </p:sp>
-      <p:sp>
-        <p:nvSpPr>
-          <p:cNvPr id="4" name="TextBox 3"/>
+      <p:pic>
+        <p:nvPicPr>
+          <p:cNvPr id="4" name="Picture 3" descr="kubernetes.png"/>
+          <p:cNvPicPr>
+            <a:picLocks noChangeAspect="1"/>
+          </p:cNvPicPr>
+          <p:nvPr/>
+        </p:nvPicPr>
+        <p:blipFill>
+          <a:blip r:embed="rId2"/>
+          <a:stretch>
+            <a:fillRect/>
+          </a:stretch>
+        </p:blipFill>
+        <p:spPr>
+          <a:xfrm>
+            <a:off x="9542000" y="900000"/>
+            <a:ext cx="1650000" cy="1650000"/>
+          </a:xfrm>
+          <a:prstGeom prst="rect">
+            <a:avLst/>
+          </a:prstGeom>
+        </p:spPr>
+      </p:pic>
+      <p:sp>
+        <p:nvSpPr>
+          <p:cNvPr id="5" name="TextBox 4"/>
           <p:cNvSpPr txBox="1"/>
           <p:nvPr/>
         </p:nvSpPr>
@@ -19823,14 +20964,14 @@
       </p:sp>
       <p:sp>
         <p:nvSpPr>
-          <p:cNvPr id="5" name="TextBox 4"/>
+          <p:cNvPr id="6" name="TextBox 5"/>
           <p:cNvSpPr txBox="1"/>
           <p:nvPr/>
         </p:nvSpPr>
         <p:spPr>
           <a:xfrm>
-            <a:off x="640000" y="1500000"/>
-            <a:ext cx="10000000" cy="900000"/>
+            <a:off x="640000" y="1560000"/>
+            <a:ext cx="9200000" cy="900000"/>
           </a:xfrm>
           <a:prstGeom prst="rect">
             <a:avLst/>
@@ -19856,7 +20997,7 @@
               <a:buNone/>
             </a:pPr>
             <a:r>
-              <a:rPr sz="4600" b="0" i="0">
+              <a:rPr sz="4400" b="0" i="0">
                 <a:solidFill>
                   <a:srgbClr val="F3F6FC"/>
                 </a:solidFill>
@@ -19869,7 +21010,7 @@
       </p:sp>
       <p:sp>
         <p:nvSpPr>
-          <p:cNvPr id="6" name="Rectangle 5"/>
+          <p:cNvPr id="7" name="Rectangle 6"/>
           <p:cNvSpPr/>
           <p:nvPr/>
         </p:nvSpPr>
@@ -19915,7 +21056,7 @@
       </p:sp>
       <p:sp>
         <p:nvSpPr>
-          <p:cNvPr id="7" name="TextBox 6"/>
+          <p:cNvPr id="8" name="TextBox 7"/>
           <p:cNvSpPr txBox="1"/>
           <p:nvPr/>
         </p:nvSpPr>
@@ -20007,7 +21148,7 @@
       </p:sp>
       <p:sp>
         <p:nvSpPr>
-          <p:cNvPr id="8" name="Rectangle 7"/>
+          <p:cNvPr id="9" name="Rectangle 8"/>
           <p:cNvSpPr/>
           <p:nvPr/>
         </p:nvSpPr>
@@ -20053,7 +21194,7 @@
       </p:sp>
       <p:sp>
         <p:nvSpPr>
-          <p:cNvPr id="9" name="TextBox 8"/>
+          <p:cNvPr id="10" name="TextBox 9"/>
           <p:cNvSpPr txBox="1"/>
           <p:nvPr/>
         </p:nvSpPr>
@@ -20099,7 +21240,7 @@
       </p:sp>
       <p:sp>
         <p:nvSpPr>
-          <p:cNvPr id="10" name="TextBox 9"/>
+          <p:cNvPr id="11" name="TextBox 10"/>
           <p:cNvSpPr txBox="1"/>
           <p:nvPr/>
         </p:nvSpPr>
@@ -20224,7 +21365,7 @@
         <p:spPr>
           <a:xfrm>
             <a:off x="620000" y="560000"/>
-            <a:ext cx="10952000" cy="620000"/>
+            <a:ext cx="10052000" cy="620000"/>
           </a:xfrm>
           <a:prstGeom prst="rect">
             <a:avLst/>
@@ -20447,7 +21588,123 @@
       </p:sp>
       <p:sp>
         <p:nvSpPr>
-          <p:cNvPr id="8" name="TextBox 7"/>
+          <p:cNvPr id="8" name="Oval 7"/>
+          <p:cNvSpPr/>
+          <p:nvPr/>
+        </p:nvSpPr>
+        <p:spPr>
+          <a:xfrm>
+            <a:off x="10983200" y="326200"/>
+            <a:ext cx="537600" cy="537600"/>
+          </a:xfrm>
+          <a:prstGeom prst="ellipse">
+            <a:avLst/>
+          </a:prstGeom>
+          <a:noFill/>
+          <a:ln w="38100">
+            <a:solidFill>
+              <a:srgbClr val="74A6FF"/>
+            </a:solidFill>
+          </a:ln>
+          <a:effectLst/>
+        </p:spPr>
+        <p:style>
+          <a:lnRef idx="1">
+            <a:schemeClr val="accent1"/>
+          </a:lnRef>
+          <a:fillRef idx="3">
+            <a:schemeClr val="accent1"/>
+          </a:fillRef>
+          <a:effectRef idx="2">
+            <a:schemeClr val="accent1"/>
+          </a:effectRef>
+          <a:fontRef idx="minor">
+            <a:schemeClr val="lt1"/>
+          </a:fontRef>
+        </p:style>
+        <p:txBody>
+          <a:bodyPr rtlCol="0" anchor="ctr"/>
+          <a:lstStyle/>
+          <a:p>
+            <a:pPr algn="ctr"/>
+          </a:p>
+        </p:txBody>
+      </p:sp>
+      <p:cxnSp>
+        <p:nvCxnSpPr>
+          <p:cNvPr id="9" name="Connector 8"/>
+          <p:cNvCxnSpPr/>
+          <p:nvPr/>
+        </p:nvCxnSpPr>
+        <p:spPr>
+          <a:xfrm flipV="1">
+            <a:off x="11252000" y="415800"/>
+            <a:ext cx="0" cy="179200"/>
+          </a:xfrm>
+          <a:prstGeom prst="line">
+            <a:avLst/>
+          </a:prstGeom>
+          <a:ln w="38100">
+            <a:solidFill>
+              <a:srgbClr val="74A6FF"/>
+            </a:solidFill>
+          </a:ln>
+          <a:effectLst/>
+        </p:spPr>
+        <p:style>
+          <a:lnRef idx="2">
+            <a:schemeClr val="accent1"/>
+          </a:lnRef>
+          <a:fillRef idx="0">
+            <a:schemeClr val="accent1"/>
+          </a:fillRef>
+          <a:effectRef idx="1">
+            <a:schemeClr val="accent1"/>
+          </a:effectRef>
+          <a:fontRef idx="minor">
+            <a:schemeClr val="tx1"/>
+          </a:fontRef>
+        </p:style>
+      </p:cxnSp>
+      <p:cxnSp>
+        <p:nvCxnSpPr>
+          <p:cNvPr id="10" name="Connector 9"/>
+          <p:cNvCxnSpPr/>
+          <p:nvPr/>
+        </p:nvCxnSpPr>
+        <p:spPr>
+          <a:xfrm>
+            <a:off x="11252000" y="595000"/>
+            <a:ext cx="128000" cy="51200"/>
+          </a:xfrm>
+          <a:prstGeom prst="line">
+            <a:avLst/>
+          </a:prstGeom>
+          <a:ln w="38100">
+            <a:solidFill>
+              <a:srgbClr val="74A6FF"/>
+            </a:solidFill>
+          </a:ln>
+          <a:effectLst/>
+        </p:spPr>
+        <p:style>
+          <a:lnRef idx="2">
+            <a:schemeClr val="accent1"/>
+          </a:lnRef>
+          <a:fillRef idx="0">
+            <a:schemeClr val="accent1"/>
+          </a:fillRef>
+          <a:effectRef idx="1">
+            <a:schemeClr val="accent1"/>
+          </a:effectRef>
+          <a:fontRef idx="minor">
+            <a:schemeClr val="tx1"/>
+          </a:fontRef>
+        </p:style>
+      </p:cxnSp>
+      <p:sp>
+        <p:nvSpPr>
+          <p:cNvPr id="11" name="TextBox 10"/>
           <p:cNvSpPr txBox="1"/>
           <p:nvPr/>
         </p:nvSpPr>
@@ -20493,7 +21750,7 @@
       </p:sp>
       <p:sp>
         <p:nvSpPr>
-          <p:cNvPr id="9" name="Rectangle 8"/>
+          <p:cNvPr id="12" name="Rectangle 11"/>
           <p:cNvSpPr/>
           <p:nvPr/>
         </p:nvSpPr>
@@ -20539,7 +21796,7 @@
       </p:sp>
       <p:sp>
         <p:nvSpPr>
-          <p:cNvPr id="10" name="TextBox 9"/>
+          <p:cNvPr id="13" name="TextBox 12"/>
           <p:cNvSpPr txBox="1"/>
           <p:nvPr/>
         </p:nvSpPr>
@@ -20585,7 +21842,7 @@
       </p:sp>
       <p:sp>
         <p:nvSpPr>
-          <p:cNvPr id="11" name="TextBox 10"/>
+          <p:cNvPr id="14" name="TextBox 13"/>
           <p:cNvSpPr txBox="1"/>
           <p:nvPr/>
         </p:nvSpPr>
@@ -20631,7 +21888,7 @@
       </p:sp>
       <p:sp>
         <p:nvSpPr>
-          <p:cNvPr id="12" name="Rectangle 11"/>
+          <p:cNvPr id="15" name="Rectangle 14"/>
           <p:cNvSpPr/>
           <p:nvPr/>
         </p:nvSpPr>
@@ -20677,7 +21934,7 @@
       </p:sp>
       <p:sp>
         <p:nvSpPr>
-          <p:cNvPr id="13" name="TextBox 12"/>
+          <p:cNvPr id="16" name="TextBox 15"/>
           <p:cNvSpPr txBox="1"/>
           <p:nvPr/>
         </p:nvSpPr>
@@ -20723,7 +21980,7 @@
       </p:sp>
       <p:sp>
         <p:nvSpPr>
-          <p:cNvPr id="14" name="TextBox 13"/>
+          <p:cNvPr id="17" name="TextBox 16"/>
           <p:cNvSpPr txBox="1"/>
           <p:nvPr/>
         </p:nvSpPr>
@@ -20769,7 +22026,7 @@
       </p:sp>
       <p:sp>
         <p:nvSpPr>
-          <p:cNvPr id="15" name="Rectangle 14"/>
+          <p:cNvPr id="18" name="Rectangle 17"/>
           <p:cNvSpPr/>
           <p:nvPr/>
         </p:nvSpPr>
@@ -20815,7 +22072,7 @@
       </p:sp>
       <p:sp>
         <p:nvSpPr>
-          <p:cNvPr id="16" name="TextBox 15"/>
+          <p:cNvPr id="19" name="TextBox 18"/>
           <p:cNvSpPr txBox="1"/>
           <p:nvPr/>
         </p:nvSpPr>
@@ -20861,7 +22118,7 @@
       </p:sp>
       <p:sp>
         <p:nvSpPr>
-          <p:cNvPr id="17" name="Rounded Rectangle 16"/>
+          <p:cNvPr id="20" name="Rounded Rectangle 19"/>
           <p:cNvSpPr/>
           <p:nvPr/>
         </p:nvSpPr>
@@ -20909,7 +22166,7 @@
       </p:sp>
       <p:sp>
         <p:nvSpPr>
-          <p:cNvPr id="18" name="TextBox 17"/>
+          <p:cNvPr id="21" name="TextBox 20"/>
           <p:cNvSpPr txBox="1"/>
           <p:nvPr/>
         </p:nvSpPr>
@@ -20955,7 +22212,7 @@
       </p:sp>
       <p:sp>
         <p:nvSpPr>
-          <p:cNvPr id="19" name="Rectangle 18"/>
+          <p:cNvPr id="22" name="Rectangle 21"/>
           <p:cNvSpPr/>
           <p:nvPr/>
         </p:nvSpPr>
@@ -21001,7 +22258,7 @@
       </p:sp>
       <p:sp>
         <p:nvSpPr>
-          <p:cNvPr id="20" name="TextBox 19"/>
+          <p:cNvPr id="23" name="TextBox 22"/>
           <p:cNvSpPr txBox="1"/>
           <p:nvPr/>
         </p:nvSpPr>
@@ -21047,7 +22304,7 @@
       </p:sp>
       <p:sp>
         <p:nvSpPr>
-          <p:cNvPr id="21" name="TextBox 20"/>
+          <p:cNvPr id="24" name="TextBox 23"/>
           <p:cNvSpPr txBox="1"/>
           <p:nvPr/>
         </p:nvSpPr>
@@ -21093,7 +22350,7 @@
       </p:sp>
       <p:sp>
         <p:nvSpPr>
-          <p:cNvPr id="22" name="Rectangle 21"/>
+          <p:cNvPr id="25" name="Rectangle 24"/>
           <p:cNvSpPr/>
           <p:nvPr/>
         </p:nvSpPr>
@@ -21139,7 +22396,7 @@
       </p:sp>
       <p:sp>
         <p:nvSpPr>
-          <p:cNvPr id="23" name="TextBox 22"/>
+          <p:cNvPr id="26" name="TextBox 25"/>
           <p:cNvSpPr txBox="1"/>
           <p:nvPr/>
         </p:nvSpPr>
@@ -21185,7 +22442,7 @@
       </p:sp>
       <p:sp>
         <p:nvSpPr>
-          <p:cNvPr id="24" name="Rounded Rectangle 23"/>
+          <p:cNvPr id="27" name="Rounded Rectangle 26"/>
           <p:cNvSpPr/>
           <p:nvPr/>
         </p:nvSpPr>
@@ -21233,7 +22490,7 @@
       </p:sp>
       <p:sp>
         <p:nvSpPr>
-          <p:cNvPr id="25" name="TextBox 24"/>
+          <p:cNvPr id="28" name="TextBox 27"/>
           <p:cNvSpPr txBox="1"/>
           <p:nvPr/>
         </p:nvSpPr>
@@ -21279,7 +22536,7 @@
       </p:sp>
       <p:sp>
         <p:nvSpPr>
-          <p:cNvPr id="26" name="Rectangle 25"/>
+          <p:cNvPr id="29" name="Rectangle 28"/>
           <p:cNvSpPr/>
           <p:nvPr/>
         </p:nvSpPr>
@@ -21325,7 +22582,7 @@
       </p:sp>
       <p:sp>
         <p:nvSpPr>
-          <p:cNvPr id="27" name="TextBox 26"/>
+          <p:cNvPr id="30" name="TextBox 29"/>
           <p:cNvSpPr txBox="1"/>
           <p:nvPr/>
         </p:nvSpPr>
@@ -21371,7 +22628,7 @@
       </p:sp>
       <p:sp>
         <p:nvSpPr>
-          <p:cNvPr id="28" name="TextBox 27"/>
+          <p:cNvPr id="31" name="TextBox 30"/>
           <p:cNvSpPr txBox="1"/>
           <p:nvPr/>
         </p:nvSpPr>
@@ -21417,7 +22674,7 @@
       </p:sp>
       <p:sp>
         <p:nvSpPr>
-          <p:cNvPr id="29" name="Rectangle 28"/>
+          <p:cNvPr id="32" name="Rectangle 31"/>
           <p:cNvSpPr/>
           <p:nvPr/>
         </p:nvSpPr>
@@ -21463,7 +22720,7 @@
       </p:sp>
       <p:sp>
         <p:nvSpPr>
-          <p:cNvPr id="30" name="TextBox 29"/>
+          <p:cNvPr id="33" name="TextBox 32"/>
           <p:cNvSpPr txBox="1"/>
           <p:nvPr/>
         </p:nvSpPr>
@@ -21509,7 +22766,7 @@
       </p:sp>
       <p:sp>
         <p:nvSpPr>
-          <p:cNvPr id="31" name="Rounded Rectangle 30"/>
+          <p:cNvPr id="34" name="Rounded Rectangle 33"/>
           <p:cNvSpPr/>
           <p:nvPr/>
         </p:nvSpPr>
@@ -21557,7 +22814,7 @@
       </p:sp>
       <p:sp>
         <p:nvSpPr>
-          <p:cNvPr id="32" name="TextBox 31"/>
+          <p:cNvPr id="35" name="TextBox 34"/>
           <p:cNvSpPr txBox="1"/>
           <p:nvPr/>
         </p:nvSpPr>
@@ -21603,7 +22860,7 @@
       </p:sp>
       <p:sp>
         <p:nvSpPr>
-          <p:cNvPr id="33" name="Rectangle 32"/>
+          <p:cNvPr id="36" name="Rectangle 35"/>
           <p:cNvSpPr/>
           <p:nvPr/>
         </p:nvSpPr>
@@ -21649,7 +22906,7 @@
       </p:sp>
       <p:sp>
         <p:nvSpPr>
-          <p:cNvPr id="34" name="TextBox 33"/>
+          <p:cNvPr id="37" name="TextBox 36"/>
           <p:cNvSpPr txBox="1"/>
           <p:nvPr/>
         </p:nvSpPr>
@@ -21695,7 +22952,7 @@
       </p:sp>
       <p:sp>
         <p:nvSpPr>
-          <p:cNvPr id="35" name="Rounded Rectangle 34"/>
+          <p:cNvPr id="38" name="Rounded Rectangle 37"/>
           <p:cNvSpPr/>
           <p:nvPr/>
         </p:nvSpPr>
@@ -21743,7 +23000,7 @@
       </p:sp>
       <p:sp>
         <p:nvSpPr>
-          <p:cNvPr id="36" name="TextBox 35"/>
+          <p:cNvPr id="39" name="TextBox 38"/>
           <p:cNvSpPr txBox="1"/>
           <p:nvPr/>
         </p:nvSpPr>
@@ -21789,7 +23046,7 @@
       </p:sp>
       <p:sp>
         <p:nvSpPr>
-          <p:cNvPr id="37" name="Rectangle 36"/>
+          <p:cNvPr id="40" name="Rectangle 39"/>
           <p:cNvSpPr/>
           <p:nvPr/>
         </p:nvSpPr>
@@ -21835,7 +23092,7 @@
       </p:sp>
       <p:sp>
         <p:nvSpPr>
-          <p:cNvPr id="38" name="TextBox 37"/>
+          <p:cNvPr id="41" name="TextBox 40"/>
           <p:cNvSpPr txBox="1"/>
           <p:nvPr/>
         </p:nvSpPr>
@@ -21881,7 +23138,7 @@
       </p:sp>
       <p:sp>
         <p:nvSpPr>
-          <p:cNvPr id="39" name="TextBox 38"/>
+          <p:cNvPr id="42" name="TextBox 41"/>
           <p:cNvSpPr txBox="1"/>
           <p:nvPr/>
         </p:nvSpPr>
@@ -21927,7 +23184,7 @@
       </p:sp>
       <p:sp>
         <p:nvSpPr>
-          <p:cNvPr id="40" name="Rectangle 39"/>
+          <p:cNvPr id="43" name="Rectangle 42"/>
           <p:cNvSpPr/>
           <p:nvPr/>
         </p:nvSpPr>
@@ -21973,7 +23230,7 @@
       </p:sp>
       <p:sp>
         <p:nvSpPr>
-          <p:cNvPr id="41" name="TextBox 40"/>
+          <p:cNvPr id="44" name="TextBox 43"/>
           <p:cNvSpPr txBox="1"/>
           <p:nvPr/>
         </p:nvSpPr>
@@ -22087,80 +23344,30 @@
           </a:p>
         </p:txBody>
       </p:sp>
-      <p:sp>
-        <p:nvSpPr>
-          <p:cNvPr id="3" name="Freeform 2"/>
-          <p:cNvSpPr/>
-          <p:nvPr/>
-        </p:nvSpPr>
-        <p:spPr>
-          <a:xfrm>
-            <a:off x="9479608" y="4208000"/>
-            <a:ext cx="2924783" cy="2851453"/>
-          </a:xfrm>
-          <a:custGeom>
-            <a:avLst/>
-            <a:gdLst/>
-            <a:ahLst/>
-            <a:cxnLst/>
-            <a:rect l="l" t="t" r="r" b="b"/>
-            <a:pathLst>
-              <a:path w="2924783" h="2851453">
-                <a:moveTo>
-                  <a:pt x="1462392" y="0"/>
-                </a:moveTo>
-                <a:lnTo>
-                  <a:pt x="2635139" y="564765"/>
-                </a:lnTo>
-                <a:lnTo>
-                  <a:pt x="2924783" y="1833781"/>
-                </a:lnTo>
-                <a:lnTo>
-                  <a:pt x="2113217" y="2851453"/>
-                </a:lnTo>
-                <a:lnTo>
-                  <a:pt x="811566" y="2851453"/>
-                </a:lnTo>
-                <a:lnTo>
-                  <a:pt x="0" y="1833781"/>
-                </a:lnTo>
-                <a:lnTo>
-                  <a:pt x="289644" y="564765"/>
-                </a:lnTo>
-                <a:close/>
-              </a:path>
-            </a:pathLst>
-          </a:custGeom>
-          <a:noFill/>
-          <a:ln w="31750">
-            <a:solidFill>
-              <a:srgbClr val="26354E"/>
-            </a:solidFill>
-          </a:ln>
-          <a:effectLst/>
-        </p:spPr>
-        <p:style>
-          <a:lnRef idx="1">
-            <a:schemeClr val="accent1"/>
-          </a:lnRef>
-          <a:fillRef idx="3">
-            <a:schemeClr val="accent1"/>
-          </a:fillRef>
-          <a:effectRef idx="2">
-            <a:schemeClr val="accent1"/>
-          </a:effectRef>
-          <a:fontRef idx="minor">
-            <a:schemeClr val="lt1"/>
-          </a:fontRef>
-        </p:style>
-        <p:txBody>
-          <a:bodyPr rtlCol="0" anchor="ctr"/>
-          <a:lstStyle/>
-          <a:p>
-            <a:pPr algn="ctr"/>
-          </a:p>
-        </p:txBody>
-      </p:sp>
+      <p:pic>
+        <p:nvPicPr>
+          <p:cNvPr id="3" name="Picture 2" descr="deploy.png"/>
+          <p:cNvPicPr>
+            <a:picLocks noChangeAspect="1"/>
+          </p:cNvPicPr>
+          <p:nvPr/>
+        </p:nvPicPr>
+        <p:blipFill>
+          <a:blip r:embed="rId2"/>
+          <a:stretch>
+            <a:fillRect/>
+          </a:stretch>
+        </p:blipFill>
+        <p:spPr>
+          <a:xfrm>
+            <a:off x="8842000" y="2150000"/>
+            <a:ext cx="1800000" cy="1800000"/>
+          </a:xfrm>
+          <a:prstGeom prst="rect">
+            <a:avLst/>
+          </a:prstGeom>
+        </p:spPr>
+      </p:pic>
       <p:sp>
         <p:nvSpPr>
           <p:cNvPr id="4" name="TextBox 3"/>
@@ -22610,7 +23817,7 @@
         <p:spPr>
           <a:xfrm>
             <a:off x="620000" y="560000"/>
-            <a:ext cx="10952000" cy="620000"/>
+            <a:ext cx="10052000" cy="620000"/>
           </a:xfrm>
           <a:prstGeom prst="rect">
             <a:avLst/>
@@ -22831,20 +24038,44 @@
           </a:p>
         </p:txBody>
       </p:sp>
-      <p:sp>
-        <p:nvSpPr>
-          <p:cNvPr id="8" name="Rounded Rectangle 7"/>
+      <p:pic>
+        <p:nvPicPr>
+          <p:cNvPr id="8" name="Picture 7" descr="svc.png"/>
+          <p:cNvPicPr>
+            <a:picLocks noChangeAspect="1"/>
+          </p:cNvPicPr>
+          <p:nvPr/>
+        </p:nvPicPr>
+        <p:blipFill>
+          <a:blip r:embed="rId2"/>
+          <a:stretch>
+            <a:fillRect/>
+          </a:stretch>
+        </p:blipFill>
+        <p:spPr>
+          <a:xfrm>
+            <a:off x="10932000" y="275000"/>
+            <a:ext cx="640000" cy="640000"/>
+          </a:xfrm>
+          <a:prstGeom prst="rect">
+            <a:avLst/>
+          </a:prstGeom>
+        </p:spPr>
+      </p:pic>
+      <p:sp>
+        <p:nvSpPr>
+          <p:cNvPr id="9" name="Rounded Rectangle 8"/>
           <p:cNvSpPr/>
           <p:nvPr/>
         </p:nvSpPr>
         <p:spPr>
           <a:xfrm>
-            <a:off x="620000" y="1790000"/>
-            <a:ext cx="3550666" cy="720000"/>
+            <a:off x="620000" y="1830000"/>
+            <a:ext cx="3510666" cy="760000"/>
           </a:xfrm>
           <a:prstGeom prst="roundRect">
             <a:avLst>
-              <a:gd name="adj" fmla="val 12000"/>
+              <a:gd name="adj" fmla="val 11000"/>
             </a:avLst>
           </a:prstGeom>
           <a:solidFill>
@@ -22883,60 +24114,14 @@
       </p:sp>
       <p:sp>
         <p:nvSpPr>
-          <p:cNvPr id="9" name="TextBox 8"/>
-          <p:cNvSpPr txBox="1"/>
-          <p:nvPr/>
-        </p:nvSpPr>
-        <p:spPr>
-          <a:xfrm>
-            <a:off x="690000" y="1790000"/>
-            <a:ext cx="3410666" cy="720000"/>
-          </a:xfrm>
-          <a:prstGeom prst="rect">
-            <a:avLst/>
-          </a:prstGeom>
-          <a:noFill/>
-        </p:spPr>
-        <p:txBody>
-          <a:bodyPr wrap="square" anchor="ctr" lIns="0" rIns="0" tIns="0" bIns="0">
-            <a:noAutofit/>
-          </a:bodyPr>
-          <a:lstStyle/>
-          <a:p>
-            <a:pPr algn="ctr" marL="0" indent="0">
-              <a:lnSpc>
-                <a:spcPct val="112000"/>
-              </a:lnSpc>
-              <a:spcBef>
-                <a:spcPts val="0"/>
-              </a:spcBef>
-              <a:spcAft>
-                <a:spcPts val="0"/>
-              </a:spcAft>
-              <a:buNone/>
-            </a:pPr>
-            <a:r>
-              <a:rPr sz="1100" b="1" i="0">
-                <a:solidFill>
-                  <a:srgbClr val="F3F6FC"/>
-                </a:solidFill>
-                <a:latin typeface="Segoe UI Semibold"/>
-              </a:rPr>
-              <a:t>Deployment</a:t>
-            </a:r>
-          </a:p>
-        </p:txBody>
-      </p:sp>
-      <p:sp>
-        <p:nvSpPr>
           <p:cNvPr id="10" name="TextBox 9"/>
           <p:cNvSpPr txBox="1"/>
           <p:nvPr/>
         </p:nvSpPr>
         <p:spPr>
           <a:xfrm>
-            <a:off x="4130666" y="1790000"/>
-            <a:ext cx="230000" cy="720000"/>
+            <a:off x="690000" y="1830000"/>
+            <a:ext cx="3370666" cy="760000"/>
           </a:xfrm>
           <a:prstGeom prst="rect">
             <a:avLst/>
@@ -22951,42 +24136,79 @@
           <a:p>
             <a:pPr algn="ctr" marL="0" indent="0">
               <a:lnSpc>
-                <a:spcPct val="100000"/>
-              </a:lnSpc>
-              <a:spcBef>
-                <a:spcPts val="0"/>
-              </a:spcBef>
-              <a:spcAft>
-                <a:spcPts val="0"/>
-              </a:spcAft>
-              <a:buNone/>
-            </a:pPr>
-            <a:r>
-              <a:rPr sz="1500" b="0" i="0">
-                <a:solidFill>
-                  <a:srgbClr val="74A6FF"/>
-                </a:solidFill>
-                <a:latin typeface="Segoe UI"/>
-              </a:rPr>
-              <a:t>→</a:t>
-            </a:r>
-          </a:p>
-        </p:txBody>
-      </p:sp>
-      <p:sp>
-        <p:nvSpPr>
-          <p:cNvPr id="11" name="Rounded Rectangle 10"/>
+                <a:spcPct val="112000"/>
+              </a:lnSpc>
+              <a:spcBef>
+                <a:spcPts val="0"/>
+              </a:spcBef>
+              <a:spcAft>
+                <a:spcPts val="0"/>
+              </a:spcAft>
+              <a:buNone/>
+            </a:pPr>
+            <a:r>
+              <a:rPr sz="1100" b="1" i="0">
+                <a:solidFill>
+                  <a:srgbClr val="F3F6FC"/>
+                </a:solidFill>
+                <a:latin typeface="Segoe UI Semibold"/>
+              </a:rPr>
+              <a:t>Deployment</a:t>
+            </a:r>
+          </a:p>
+        </p:txBody>
+      </p:sp>
+      <p:cxnSp>
+        <p:nvCxnSpPr>
+          <p:cNvPr id="11" name="Connector 10"/>
+          <p:cNvCxnSpPr/>
+          <p:nvPr/>
+        </p:nvCxnSpPr>
+        <p:spPr>
+          <a:xfrm>
+            <a:off x="4154666" y="2210000"/>
+            <a:ext cx="162000" cy="0"/>
+          </a:xfrm>
+          <a:prstGeom prst="line">
+            <a:avLst/>
+          </a:prstGeom>
+          <a:ln w="22225">
+            <a:solidFill>
+              <a:srgbClr val="74A6FF"/>
+            </a:solidFill>
+            <a:tailEnd type="triangle" w="med" len="med"/>
+          </a:ln>
+          <a:effectLst/>
+        </p:spPr>
+        <p:style>
+          <a:lnRef idx="2">
+            <a:schemeClr val="accent1"/>
+          </a:lnRef>
+          <a:fillRef idx="0">
+            <a:schemeClr val="accent1"/>
+          </a:fillRef>
+          <a:effectRef idx="1">
+            <a:schemeClr val="accent1"/>
+          </a:effectRef>
+          <a:fontRef idx="minor">
+            <a:schemeClr val="tx1"/>
+          </a:fontRef>
+        </p:style>
+      </p:cxnSp>
+      <p:sp>
+        <p:nvSpPr>
+          <p:cNvPr id="12" name="Rounded Rectangle 11"/>
           <p:cNvSpPr/>
           <p:nvPr/>
         </p:nvSpPr>
         <p:spPr>
           <a:xfrm>
-            <a:off x="4320666" y="1790000"/>
-            <a:ext cx="3550666" cy="720000"/>
+            <a:off x="4340666" y="1830000"/>
+            <a:ext cx="3510666" cy="760000"/>
           </a:xfrm>
           <a:prstGeom prst="roundRect">
             <a:avLst>
-              <a:gd name="adj" fmla="val 12000"/>
+              <a:gd name="adj" fmla="val 11000"/>
             </a:avLst>
           </a:prstGeom>
           <a:solidFill>
@@ -23025,60 +24247,14 @@
       </p:sp>
       <p:sp>
         <p:nvSpPr>
-          <p:cNvPr id="12" name="TextBox 11"/>
-          <p:cNvSpPr txBox="1"/>
-          <p:nvPr/>
-        </p:nvSpPr>
-        <p:spPr>
-          <a:xfrm>
-            <a:off x="4390666" y="1790000"/>
-            <a:ext cx="3410666" cy="720000"/>
-          </a:xfrm>
-          <a:prstGeom prst="rect">
-            <a:avLst/>
-          </a:prstGeom>
-          <a:noFill/>
-        </p:spPr>
-        <p:txBody>
-          <a:bodyPr wrap="square" anchor="ctr" lIns="0" rIns="0" tIns="0" bIns="0">
-            <a:noAutofit/>
-          </a:bodyPr>
-          <a:lstStyle/>
-          <a:p>
-            <a:pPr algn="ctr" marL="0" indent="0">
-              <a:lnSpc>
-                <a:spcPct val="112000"/>
-              </a:lnSpc>
-              <a:spcBef>
-                <a:spcPts val="0"/>
-              </a:spcBef>
-              <a:spcAft>
-                <a:spcPts val="0"/>
-              </a:spcAft>
-              <a:buNone/>
-            </a:pPr>
-            <a:r>
-              <a:rPr sz="1100" b="1" i="0">
-                <a:solidFill>
-                  <a:srgbClr val="F3F6FC"/>
-                </a:solidFill>
-                <a:latin typeface="Segoe UI Semibold"/>
-              </a:rPr>
-              <a:t>ReplicaSet</a:t>
-            </a:r>
-          </a:p>
-        </p:txBody>
-      </p:sp>
-      <p:sp>
-        <p:nvSpPr>
           <p:cNvPr id="13" name="TextBox 12"/>
           <p:cNvSpPr txBox="1"/>
           <p:nvPr/>
         </p:nvSpPr>
         <p:spPr>
           <a:xfrm>
-            <a:off x="7831333" y="1790000"/>
-            <a:ext cx="230000" cy="720000"/>
+            <a:off x="4410666" y="1830000"/>
+            <a:ext cx="3370666" cy="760000"/>
           </a:xfrm>
           <a:prstGeom prst="rect">
             <a:avLst/>
@@ -23093,42 +24269,79 @@
           <a:p>
             <a:pPr algn="ctr" marL="0" indent="0">
               <a:lnSpc>
-                <a:spcPct val="100000"/>
-              </a:lnSpc>
-              <a:spcBef>
-                <a:spcPts val="0"/>
-              </a:spcBef>
-              <a:spcAft>
-                <a:spcPts val="0"/>
-              </a:spcAft>
-              <a:buNone/>
-            </a:pPr>
-            <a:r>
-              <a:rPr sz="1500" b="0" i="0">
-                <a:solidFill>
-                  <a:srgbClr val="74A6FF"/>
-                </a:solidFill>
-                <a:latin typeface="Segoe UI"/>
-              </a:rPr>
-              <a:t>→</a:t>
-            </a:r>
-          </a:p>
-        </p:txBody>
-      </p:sp>
-      <p:sp>
-        <p:nvSpPr>
-          <p:cNvPr id="14" name="Rounded Rectangle 13"/>
+                <a:spcPct val="112000"/>
+              </a:lnSpc>
+              <a:spcBef>
+                <a:spcPts val="0"/>
+              </a:spcBef>
+              <a:spcAft>
+                <a:spcPts val="0"/>
+              </a:spcAft>
+              <a:buNone/>
+            </a:pPr>
+            <a:r>
+              <a:rPr sz="1100" b="1" i="0">
+                <a:solidFill>
+                  <a:srgbClr val="F3F6FC"/>
+                </a:solidFill>
+                <a:latin typeface="Segoe UI Semibold"/>
+              </a:rPr>
+              <a:t>ReplicaSet</a:t>
+            </a:r>
+          </a:p>
+        </p:txBody>
+      </p:sp>
+      <p:cxnSp>
+        <p:nvCxnSpPr>
+          <p:cNvPr id="14" name="Connector 13"/>
+          <p:cNvCxnSpPr/>
+          <p:nvPr/>
+        </p:nvCxnSpPr>
+        <p:spPr>
+          <a:xfrm>
+            <a:off x="7875333" y="2210000"/>
+            <a:ext cx="162000" cy="0"/>
+          </a:xfrm>
+          <a:prstGeom prst="line">
+            <a:avLst/>
+          </a:prstGeom>
+          <a:ln w="22225">
+            <a:solidFill>
+              <a:srgbClr val="74A6FF"/>
+            </a:solidFill>
+            <a:tailEnd type="triangle" w="med" len="med"/>
+          </a:ln>
+          <a:effectLst/>
+        </p:spPr>
+        <p:style>
+          <a:lnRef idx="2">
+            <a:schemeClr val="accent1"/>
+          </a:lnRef>
+          <a:fillRef idx="0">
+            <a:schemeClr val="accent1"/>
+          </a:fillRef>
+          <a:effectRef idx="1">
+            <a:schemeClr val="accent1"/>
+          </a:effectRef>
+          <a:fontRef idx="minor">
+            <a:schemeClr val="tx1"/>
+          </a:fontRef>
+        </p:style>
+      </p:cxnSp>
+      <p:sp>
+        <p:nvSpPr>
+          <p:cNvPr id="15" name="Rounded Rectangle 14"/>
           <p:cNvSpPr/>
           <p:nvPr/>
         </p:nvSpPr>
         <p:spPr>
           <a:xfrm>
-            <a:off x="8021333" y="1790000"/>
-            <a:ext cx="3550666" cy="720000"/>
+            <a:off x="8061333" y="1830000"/>
+            <a:ext cx="3510666" cy="760000"/>
           </a:xfrm>
           <a:prstGeom prst="roundRect">
             <a:avLst>
-              <a:gd name="adj" fmla="val 12000"/>
+              <a:gd name="adj" fmla="val 11000"/>
             </a:avLst>
           </a:prstGeom>
           <a:solidFill>
@@ -23167,14 +24380,14 @@
       </p:sp>
       <p:sp>
         <p:nvSpPr>
-          <p:cNvPr id="15" name="TextBox 14"/>
+          <p:cNvPr id="16" name="TextBox 15"/>
           <p:cNvSpPr txBox="1"/>
           <p:nvPr/>
         </p:nvSpPr>
         <p:spPr>
           <a:xfrm>
-            <a:off x="8091333" y="1790000"/>
-            <a:ext cx="3410666" cy="720000"/>
+            <a:off x="8131333" y="1830000"/>
+            <a:ext cx="3370666" cy="760000"/>
           </a:xfrm>
           <a:prstGeom prst="rect">
             <a:avLst/>
@@ -23213,13 +24426,13 @@
       </p:sp>
       <p:sp>
         <p:nvSpPr>
-          <p:cNvPr id="16" name="Rounded Rectangle 15"/>
+          <p:cNvPr id="17" name="Rounded Rectangle 16"/>
           <p:cNvSpPr/>
           <p:nvPr/>
         </p:nvSpPr>
         <p:spPr>
           <a:xfrm>
-            <a:off x="620000" y="2830000"/>
+            <a:off x="620000" y="2950000"/>
             <a:ext cx="10952000" cy="2070000"/>
           </a:xfrm>
           <a:prstGeom prst="roundRect">
@@ -23263,13 +24476,13 @@
       </p:sp>
       <p:sp>
         <p:nvSpPr>
-          <p:cNvPr id="17" name="Rectangle 16"/>
+          <p:cNvPr id="18" name="Rectangle 17"/>
           <p:cNvSpPr/>
           <p:nvPr/>
         </p:nvSpPr>
         <p:spPr>
           <a:xfrm>
-            <a:off x="650000" y="2854000"/>
+            <a:off x="650000" y="2974000"/>
             <a:ext cx="40000" cy="2022000"/>
           </a:xfrm>
           <a:prstGeom prst="rect">
@@ -23309,13 +24522,13 @@
       </p:sp>
       <p:sp>
         <p:nvSpPr>
-          <p:cNvPr id="18" name="TextBox 17"/>
+          <p:cNvPr id="19" name="TextBox 18"/>
           <p:cNvSpPr txBox="1"/>
           <p:nvPr/>
         </p:nvSpPr>
         <p:spPr>
           <a:xfrm>
-            <a:off x="880000" y="3070000"/>
+            <a:off x="880000" y="3190000"/>
             <a:ext cx="10432000" cy="1670000"/>
           </a:xfrm>
           <a:prstGeom prst="rect">
@@ -23553,7 +24766,7 @@
         <p:spPr>
           <a:xfrm>
             <a:off x="620000" y="560000"/>
-            <a:ext cx="10952000" cy="620000"/>
+            <a:ext cx="10052000" cy="620000"/>
           </a:xfrm>
           <a:prstGeom prst="rect">
             <a:avLst/>
@@ -23936,52 +25149,30 @@
           </a:p>
         </p:txBody>
       </p:sp>
-      <p:sp>
-        <p:nvSpPr>
-          <p:cNvPr id="11" name="TextBox 10"/>
-          <p:cNvSpPr txBox="1"/>
-          <p:nvPr/>
-        </p:nvSpPr>
-        <p:spPr>
-          <a:xfrm>
-            <a:off x="1260000" y="2368000"/>
-            <a:ext cx="4626000" cy="340000"/>
-          </a:xfrm>
-          <a:prstGeom prst="rect">
-            <a:avLst/>
-          </a:prstGeom>
-          <a:noFill/>
-        </p:spPr>
-        <p:txBody>
-          <a:bodyPr wrap="square" anchor="ctr" lIns="0" rIns="0" tIns="0" bIns="0">
-            <a:noAutofit/>
-          </a:bodyPr>
-          <a:lstStyle/>
-          <a:p>
-            <a:pPr algn="l" marL="0" indent="0">
-              <a:lnSpc>
-                <a:spcPct val="105000"/>
-              </a:lnSpc>
-              <a:spcBef>
-                <a:spcPts val="0"/>
-              </a:spcBef>
-              <a:spcAft>
-                <a:spcPts val="0"/>
-              </a:spcAft>
-              <a:buNone/>
-            </a:pPr>
-            <a:r>
-              <a:rPr sz="1500" b="1" i="0">
-                <a:solidFill>
-                  <a:srgbClr val="F3F6FC"/>
-                </a:solidFill>
-                <a:latin typeface="Segoe UI Semibold"/>
-              </a:rPr>
-              <a:t>Deployment</a:t>
-            </a:r>
-          </a:p>
-        </p:txBody>
-      </p:sp>
+      <p:pic>
+        <p:nvPicPr>
+          <p:cNvPr id="11" name="Picture 10" descr="deploy.png"/>
+          <p:cNvPicPr>
+            <a:picLocks noChangeAspect="1"/>
+          </p:cNvPicPr>
+          <p:nvPr/>
+        </p:nvPicPr>
+        <p:blipFill>
+          <a:blip r:embed="rId2"/>
+          <a:stretch>
+            <a:fillRect/>
+          </a:stretch>
+        </p:blipFill>
+        <p:spPr>
+          <a:xfrm>
+            <a:off x="5376000" y="2374000"/>
+            <a:ext cx="330000" cy="330000"/>
+          </a:xfrm>
+          <a:prstGeom prst="rect">
+            <a:avLst/>
+          </a:prstGeom>
+        </p:spPr>
+      </p:pic>
       <p:sp>
         <p:nvSpPr>
           <p:cNvPr id="12" name="TextBox 11"/>
@@ -23990,6 +25181,52 @@
         </p:nvSpPr>
         <p:spPr>
           <a:xfrm>
+            <a:off x="1260000" y="2368000"/>
+            <a:ext cx="4256000" cy="340000"/>
+          </a:xfrm>
+          <a:prstGeom prst="rect">
+            <a:avLst/>
+          </a:prstGeom>
+          <a:noFill/>
+        </p:spPr>
+        <p:txBody>
+          <a:bodyPr wrap="square" anchor="ctr" lIns="0" rIns="0" tIns="0" bIns="0">
+            <a:noAutofit/>
+          </a:bodyPr>
+          <a:lstStyle/>
+          <a:p>
+            <a:pPr algn="l" marL="0" indent="0">
+              <a:lnSpc>
+                <a:spcPct val="105000"/>
+              </a:lnSpc>
+              <a:spcBef>
+                <a:spcPts val="0"/>
+              </a:spcBef>
+              <a:spcAft>
+                <a:spcPts val="0"/>
+              </a:spcAft>
+              <a:buNone/>
+            </a:pPr>
+            <a:r>
+              <a:rPr sz="1500" b="1" i="0">
+                <a:solidFill>
+                  <a:srgbClr val="F3F6FC"/>
+                </a:solidFill>
+                <a:latin typeface="Segoe UI Semibold"/>
+              </a:rPr>
+              <a:t>Deployment</a:t>
+            </a:r>
+          </a:p>
+        </p:txBody>
+      </p:sp>
+      <p:sp>
+        <p:nvSpPr>
+          <p:cNvPr id="13" name="TextBox 12"/>
+          <p:cNvSpPr txBox="1"/>
+          <p:nvPr/>
+        </p:nvSpPr>
+        <p:spPr>
+          <a:xfrm>
             <a:off x="850000" y="2788000"/>
             <a:ext cx="4856000" cy="602000"/>
           </a:xfrm>
@@ -24030,7 +25267,7 @@
       </p:sp>
       <p:sp>
         <p:nvSpPr>
-          <p:cNvPr id="13" name="Rounded Rectangle 12"/>
+          <p:cNvPr id="14" name="Rounded Rectangle 13"/>
           <p:cNvSpPr/>
           <p:nvPr/>
         </p:nvSpPr>
@@ -24080,7 +25317,7 @@
       </p:sp>
       <p:sp>
         <p:nvSpPr>
-          <p:cNvPr id="14" name="Rectangle 13"/>
+          <p:cNvPr id="15" name="Rectangle 14"/>
           <p:cNvSpPr/>
           <p:nvPr/>
         </p:nvSpPr>
@@ -24126,7 +25363,7 @@
       </p:sp>
       <p:sp>
         <p:nvSpPr>
-          <p:cNvPr id="15" name="Oval 14"/>
+          <p:cNvPr id="16" name="Oval 15"/>
           <p:cNvSpPr/>
           <p:nvPr/>
         </p:nvSpPr>
@@ -24190,16 +25427,40 @@
           </a:p>
         </p:txBody>
       </p:sp>
-      <p:sp>
-        <p:nvSpPr>
-          <p:cNvPr id="16" name="TextBox 15"/>
+      <p:pic>
+        <p:nvPicPr>
+          <p:cNvPr id="17" name="Picture 16" descr="sts.png"/>
+          <p:cNvPicPr>
+            <a:picLocks noChangeAspect="1"/>
+          </p:cNvPicPr>
+          <p:nvPr/>
+        </p:nvPicPr>
+        <p:blipFill>
+          <a:blip r:embed="rId3"/>
+          <a:stretch>
+            <a:fillRect/>
+          </a:stretch>
+        </p:blipFill>
+        <p:spPr>
+          <a:xfrm>
+            <a:off x="11012000" y="2374000"/>
+            <a:ext cx="330000" cy="330000"/>
+          </a:xfrm>
+          <a:prstGeom prst="rect">
+            <a:avLst/>
+          </a:prstGeom>
+        </p:spPr>
+      </p:pic>
+      <p:sp>
+        <p:nvSpPr>
+          <p:cNvPr id="18" name="TextBox 17"/>
           <p:cNvSpPr txBox="1"/>
           <p:nvPr/>
         </p:nvSpPr>
         <p:spPr>
           <a:xfrm>
             <a:off x="6896000" y="2368000"/>
-            <a:ext cx="4626000" cy="340000"/>
+            <a:ext cx="4256000" cy="340000"/>
           </a:xfrm>
           <a:prstGeom prst="rect">
             <a:avLst/>
@@ -24238,7 +25499,7 @@
       </p:sp>
       <p:sp>
         <p:nvSpPr>
-          <p:cNvPr id="17" name="TextBox 16"/>
+          <p:cNvPr id="19" name="TextBox 18"/>
           <p:cNvSpPr txBox="1"/>
           <p:nvPr/>
         </p:nvSpPr>
@@ -24284,7 +25545,7 @@
       </p:sp>
       <p:sp>
         <p:nvSpPr>
-          <p:cNvPr id="18" name="Rounded Rectangle 17"/>
+          <p:cNvPr id="20" name="Rounded Rectangle 19"/>
           <p:cNvSpPr/>
           <p:nvPr/>
         </p:nvSpPr>
@@ -24334,7 +25595,7 @@
       </p:sp>
       <p:sp>
         <p:nvSpPr>
-          <p:cNvPr id="19" name="Rectangle 18"/>
+          <p:cNvPr id="21" name="Rectangle 20"/>
           <p:cNvSpPr/>
           <p:nvPr/>
         </p:nvSpPr>
@@ -24380,7 +25641,7 @@
       </p:sp>
       <p:sp>
         <p:nvSpPr>
-          <p:cNvPr id="20" name="Oval 19"/>
+          <p:cNvPr id="22" name="Oval 21"/>
           <p:cNvSpPr/>
           <p:nvPr/>
         </p:nvSpPr>
@@ -24444,16 +25705,40 @@
           </a:p>
         </p:txBody>
       </p:sp>
-      <p:sp>
-        <p:nvSpPr>
-          <p:cNvPr id="21" name="TextBox 20"/>
+      <p:pic>
+        <p:nvPicPr>
+          <p:cNvPr id="23" name="Picture 22" descr="ds.png"/>
+          <p:cNvPicPr>
+            <a:picLocks noChangeAspect="1"/>
+          </p:cNvPicPr>
+          <p:nvPr/>
+        </p:nvPicPr>
+        <p:blipFill>
+          <a:blip r:embed="rId4"/>
+          <a:stretch>
+            <a:fillRect/>
+          </a:stretch>
+        </p:blipFill>
+        <p:spPr>
+          <a:xfrm>
+            <a:off x="5376000" y="3946000"/>
+            <a:ext cx="330000" cy="330000"/>
+          </a:xfrm>
+          <a:prstGeom prst="rect">
+            <a:avLst/>
+          </a:prstGeom>
+        </p:spPr>
+      </p:pic>
+      <p:sp>
+        <p:nvSpPr>
+          <p:cNvPr id="24" name="TextBox 23"/>
           <p:cNvSpPr txBox="1"/>
           <p:nvPr/>
         </p:nvSpPr>
         <p:spPr>
           <a:xfrm>
             <a:off x="1260000" y="3940000"/>
-            <a:ext cx="4626000" cy="340000"/>
+            <a:ext cx="4256000" cy="340000"/>
           </a:xfrm>
           <a:prstGeom prst="rect">
             <a:avLst/>
@@ -24492,7 +25777,7 @@
       </p:sp>
       <p:sp>
         <p:nvSpPr>
-          <p:cNvPr id="22" name="TextBox 21"/>
+          <p:cNvPr id="25" name="TextBox 24"/>
           <p:cNvSpPr txBox="1"/>
           <p:nvPr/>
         </p:nvSpPr>
@@ -24538,7 +25823,7 @@
       </p:sp>
       <p:sp>
         <p:nvSpPr>
-          <p:cNvPr id="23" name="Rounded Rectangle 22"/>
+          <p:cNvPr id="26" name="Rounded Rectangle 25"/>
           <p:cNvSpPr/>
           <p:nvPr/>
         </p:nvSpPr>
@@ -24588,7 +25873,7 @@
       </p:sp>
       <p:sp>
         <p:nvSpPr>
-          <p:cNvPr id="24" name="Rectangle 23"/>
+          <p:cNvPr id="27" name="Rectangle 26"/>
           <p:cNvSpPr/>
           <p:nvPr/>
         </p:nvSpPr>
@@ -24634,7 +25919,7 @@
       </p:sp>
       <p:sp>
         <p:nvSpPr>
-          <p:cNvPr id="25" name="Oval 24"/>
+          <p:cNvPr id="28" name="Oval 27"/>
           <p:cNvSpPr/>
           <p:nvPr/>
         </p:nvSpPr>
@@ -24698,16 +25983,40 @@
           </a:p>
         </p:txBody>
       </p:sp>
-      <p:sp>
-        <p:nvSpPr>
-          <p:cNvPr id="26" name="TextBox 25"/>
+      <p:pic>
+        <p:nvPicPr>
+          <p:cNvPr id="29" name="Picture 28" descr="rs.png"/>
+          <p:cNvPicPr>
+            <a:picLocks noChangeAspect="1"/>
+          </p:cNvPicPr>
+          <p:nvPr/>
+        </p:nvPicPr>
+        <p:blipFill>
+          <a:blip r:embed="rId5"/>
+          <a:stretch>
+            <a:fillRect/>
+          </a:stretch>
+        </p:blipFill>
+        <p:spPr>
+          <a:xfrm>
+            <a:off x="11012000" y="3946000"/>
+            <a:ext cx="330000" cy="330000"/>
+          </a:xfrm>
+          <a:prstGeom prst="rect">
+            <a:avLst/>
+          </a:prstGeom>
+        </p:spPr>
+      </p:pic>
+      <p:sp>
+        <p:nvSpPr>
+          <p:cNvPr id="30" name="TextBox 29"/>
           <p:cNvSpPr txBox="1"/>
           <p:nvPr/>
         </p:nvSpPr>
         <p:spPr>
           <a:xfrm>
             <a:off x="6896000" y="3940000"/>
-            <a:ext cx="4626000" cy="340000"/>
+            <a:ext cx="4256000" cy="340000"/>
           </a:xfrm>
           <a:prstGeom prst="rect">
             <a:avLst/>
@@ -24746,7 +26055,7 @@
       </p:sp>
       <p:sp>
         <p:nvSpPr>
-          <p:cNvPr id="27" name="TextBox 26"/>
+          <p:cNvPr id="31" name="TextBox 30"/>
           <p:cNvSpPr txBox="1"/>
           <p:nvPr/>
         </p:nvSpPr>
@@ -24792,7 +26101,7 @@
       </p:sp>
       <p:sp>
         <p:nvSpPr>
-          <p:cNvPr id="28" name="Rounded Rectangle 27"/>
+          <p:cNvPr id="32" name="Rounded Rectangle 31"/>
           <p:cNvSpPr/>
           <p:nvPr/>
         </p:nvSpPr>
@@ -24842,7 +26151,7 @@
       </p:sp>
       <p:sp>
         <p:nvSpPr>
-          <p:cNvPr id="29" name="Rectangle 28"/>
+          <p:cNvPr id="33" name="Rectangle 32"/>
           <p:cNvSpPr/>
           <p:nvPr/>
         </p:nvSpPr>
@@ -24888,7 +26197,7 @@
       </p:sp>
       <p:sp>
         <p:nvSpPr>
-          <p:cNvPr id="30" name="TextBox 29"/>
+          <p:cNvPr id="34" name="TextBox 33"/>
           <p:cNvSpPr txBox="1"/>
           <p:nvPr/>
         </p:nvSpPr>
@@ -25724,7 +27033,149 @@
       </p:sp>
       <p:sp>
         <p:nvSpPr>
-          <p:cNvPr id="16" name="Rounded Rectangle 15"/>
+          <p:cNvPr id="16" name="Freeform 15"/>
+          <p:cNvSpPr/>
+          <p:nvPr/>
+        </p:nvSpPr>
+        <p:spPr>
+          <a:xfrm>
+            <a:off x="9590000" y="1418800"/>
+            <a:ext cx="784000" cy="842800"/>
+          </a:xfrm>
+          <a:custGeom>
+            <a:avLst/>
+            <a:gdLst/>
+            <a:ahLst/>
+            <a:cxnLst/>
+            <a:rect l="l" t="t" r="r" b="b"/>
+            <a:pathLst>
+              <a:path w="784000" h="842800">
+                <a:moveTo>
+                  <a:pt x="235200" y="0"/>
+                </a:moveTo>
+                <a:lnTo>
+                  <a:pt x="235200" y="333200"/>
+                </a:lnTo>
+                <a:lnTo>
+                  <a:pt x="0" y="842800"/>
+                </a:lnTo>
+                <a:lnTo>
+                  <a:pt x="784000" y="842800"/>
+                </a:lnTo>
+                <a:lnTo>
+                  <a:pt x="548800" y="333200"/>
+                </a:lnTo>
+                <a:lnTo>
+                  <a:pt x="548800" y="0"/>
+                </a:lnTo>
+              </a:path>
+            </a:pathLst>
+          </a:custGeom>
+          <a:noFill/>
+          <a:ln w="33020">
+            <a:solidFill>
+              <a:srgbClr val="74A6FF"/>
+            </a:solidFill>
+          </a:ln>
+          <a:effectLst/>
+        </p:spPr>
+        <p:style>
+          <a:lnRef idx="1">
+            <a:schemeClr val="accent1"/>
+          </a:lnRef>
+          <a:fillRef idx="3">
+            <a:schemeClr val="accent1"/>
+          </a:fillRef>
+          <a:effectRef idx="2">
+            <a:schemeClr val="accent1"/>
+          </a:effectRef>
+          <a:fontRef idx="minor">
+            <a:schemeClr val="lt1"/>
+          </a:fontRef>
+        </p:style>
+        <p:txBody>
+          <a:bodyPr rtlCol="0" anchor="ctr"/>
+          <a:lstStyle/>
+          <a:p>
+            <a:pPr algn="ctr"/>
+          </a:p>
+        </p:txBody>
+      </p:sp>
+      <p:cxnSp>
+        <p:nvCxnSpPr>
+          <p:cNvPr id="17" name="Connector 16"/>
+          <p:cNvCxnSpPr/>
+          <p:nvPr/>
+        </p:nvCxnSpPr>
+        <p:spPr>
+          <a:xfrm>
+            <a:off x="9766400" y="1418800"/>
+            <a:ext cx="431200" cy="0"/>
+          </a:xfrm>
+          <a:prstGeom prst="line">
+            <a:avLst/>
+          </a:prstGeom>
+          <a:ln w="33020">
+            <a:solidFill>
+              <a:srgbClr val="74A6FF"/>
+            </a:solidFill>
+          </a:ln>
+          <a:effectLst/>
+        </p:spPr>
+        <p:style>
+          <a:lnRef idx="2">
+            <a:schemeClr val="accent1"/>
+          </a:lnRef>
+          <a:fillRef idx="0">
+            <a:schemeClr val="accent1"/>
+          </a:fillRef>
+          <a:effectRef idx="1">
+            <a:schemeClr val="accent1"/>
+          </a:effectRef>
+          <a:fontRef idx="minor">
+            <a:schemeClr val="tx1"/>
+          </a:fontRef>
+        </p:style>
+      </p:cxnSp>
+      <p:cxnSp>
+        <p:nvCxnSpPr>
+          <p:cNvPr id="18" name="Connector 17"/>
+          <p:cNvCxnSpPr/>
+          <p:nvPr/>
+        </p:nvCxnSpPr>
+        <p:spPr>
+          <a:xfrm>
+            <a:off x="9727200" y="2006800"/>
+            <a:ext cx="509600" cy="0"/>
+          </a:xfrm>
+          <a:prstGeom prst="line">
+            <a:avLst/>
+          </a:prstGeom>
+          <a:ln w="33020">
+            <a:solidFill>
+              <a:srgbClr val="74A6FF"/>
+            </a:solidFill>
+          </a:ln>
+          <a:effectLst/>
+        </p:spPr>
+        <p:style>
+          <a:lnRef idx="2">
+            <a:schemeClr val="accent1"/>
+          </a:lnRef>
+          <a:fillRef idx="0">
+            <a:schemeClr val="accent1"/>
+          </a:fillRef>
+          <a:effectRef idx="1">
+            <a:schemeClr val="accent1"/>
+          </a:effectRef>
+          <a:fontRef idx="minor">
+            <a:schemeClr val="tx1"/>
+          </a:fontRef>
+        </p:style>
+      </p:cxnSp>
+      <p:sp>
+        <p:nvSpPr>
+          <p:cNvPr id="19" name="Rounded Rectangle 18"/>
           <p:cNvSpPr/>
           <p:nvPr/>
         </p:nvSpPr>
@@ -25774,7 +27225,7 @@
       </p:sp>
       <p:sp>
         <p:nvSpPr>
-          <p:cNvPr id="17" name="Rectangle 16"/>
+          <p:cNvPr id="20" name="Rectangle 19"/>
           <p:cNvSpPr/>
           <p:nvPr/>
         </p:nvSpPr>
@@ -25820,7 +27271,7 @@
       </p:sp>
       <p:sp>
         <p:nvSpPr>
-          <p:cNvPr id="18" name="TextBox 17"/>
+          <p:cNvPr id="21" name="TextBox 20"/>
           <p:cNvSpPr txBox="1"/>
           <p:nvPr/>
         </p:nvSpPr>
@@ -25889,7 +27340,7 @@
       </p:sp>
       <p:sp>
         <p:nvSpPr>
-          <p:cNvPr id="19" name="Rectangle 18"/>
+          <p:cNvPr id="22" name="Rectangle 21"/>
           <p:cNvSpPr/>
           <p:nvPr/>
         </p:nvSpPr>
@@ -25935,7 +27386,7 @@
       </p:sp>
       <p:sp>
         <p:nvSpPr>
-          <p:cNvPr id="20" name="TextBox 19"/>
+          <p:cNvPr id="23" name="TextBox 22"/>
           <p:cNvSpPr txBox="1"/>
           <p:nvPr/>
         </p:nvSpPr>
@@ -26004,7 +27455,7 @@
       </p:sp>
       <p:sp>
         <p:nvSpPr>
-          <p:cNvPr id="21" name="Rectangle 20"/>
+          <p:cNvPr id="24" name="Rectangle 23"/>
           <p:cNvSpPr/>
           <p:nvPr/>
         </p:nvSpPr>
@@ -26050,7 +27501,7 @@
       </p:sp>
       <p:sp>
         <p:nvSpPr>
-          <p:cNvPr id="22" name="TextBox 21"/>
+          <p:cNvPr id="25" name="TextBox 24"/>
           <p:cNvSpPr txBox="1"/>
           <p:nvPr/>
         </p:nvSpPr>
@@ -26119,7 +27570,7 @@
       </p:sp>
       <p:sp>
         <p:nvSpPr>
-          <p:cNvPr id="23" name="Rectangle 22"/>
+          <p:cNvPr id="26" name="Rectangle 25"/>
           <p:cNvSpPr/>
           <p:nvPr/>
         </p:nvSpPr>
@@ -26165,7 +27616,7 @@
       </p:sp>
       <p:sp>
         <p:nvSpPr>
-          <p:cNvPr id="24" name="TextBox 23"/>
+          <p:cNvPr id="27" name="TextBox 26"/>
           <p:cNvSpPr txBox="1"/>
           <p:nvPr/>
         </p:nvSpPr>
@@ -26211,7 +27662,7 @@
       </p:sp>
       <p:sp>
         <p:nvSpPr>
-          <p:cNvPr id="25" name="TextBox 24"/>
+          <p:cNvPr id="28" name="TextBox 27"/>
           <p:cNvSpPr txBox="1"/>
           <p:nvPr/>
         </p:nvSpPr>
@@ -26325,80 +27776,30 @@
           </a:p>
         </p:txBody>
       </p:sp>
-      <p:sp>
-        <p:nvSpPr>
-          <p:cNvPr id="3" name="Freeform 2"/>
-          <p:cNvSpPr/>
-          <p:nvPr/>
-        </p:nvSpPr>
-        <p:spPr>
-          <a:xfrm>
-            <a:off x="9479608" y="4208000"/>
-            <a:ext cx="2924783" cy="2851453"/>
-          </a:xfrm>
-          <a:custGeom>
-            <a:avLst/>
-            <a:gdLst/>
-            <a:ahLst/>
-            <a:cxnLst/>
-            <a:rect l="l" t="t" r="r" b="b"/>
-            <a:pathLst>
-              <a:path w="2924783" h="2851453">
-                <a:moveTo>
-                  <a:pt x="1462392" y="0"/>
-                </a:moveTo>
-                <a:lnTo>
-                  <a:pt x="2635139" y="564765"/>
-                </a:lnTo>
-                <a:lnTo>
-                  <a:pt x="2924783" y="1833781"/>
-                </a:lnTo>
-                <a:lnTo>
-                  <a:pt x="2113217" y="2851453"/>
-                </a:lnTo>
-                <a:lnTo>
-                  <a:pt x="811566" y="2851453"/>
-                </a:lnTo>
-                <a:lnTo>
-                  <a:pt x="0" y="1833781"/>
-                </a:lnTo>
-                <a:lnTo>
-                  <a:pt x="289644" y="564765"/>
-                </a:lnTo>
-                <a:close/>
-              </a:path>
-            </a:pathLst>
-          </a:custGeom>
-          <a:noFill/>
-          <a:ln w="31750">
-            <a:solidFill>
-              <a:srgbClr val="26354E"/>
-            </a:solidFill>
-          </a:ln>
-          <a:effectLst/>
-        </p:spPr>
-        <p:style>
-          <a:lnRef idx="1">
-            <a:schemeClr val="accent1"/>
-          </a:lnRef>
-          <a:fillRef idx="3">
-            <a:schemeClr val="accent1"/>
-          </a:fillRef>
-          <a:effectRef idx="2">
-            <a:schemeClr val="accent1"/>
-          </a:effectRef>
-          <a:fontRef idx="minor">
-            <a:schemeClr val="lt1"/>
-          </a:fontRef>
-        </p:style>
-        <p:txBody>
-          <a:bodyPr rtlCol="0" anchor="ctr"/>
-          <a:lstStyle/>
-          <a:p>
-            <a:pPr algn="ctr"/>
-          </a:p>
-        </p:txBody>
-      </p:sp>
+      <p:pic>
+        <p:nvPicPr>
+          <p:cNvPr id="3" name="Picture 2" descr="pv.png"/>
+          <p:cNvPicPr>
+            <a:picLocks noChangeAspect="1"/>
+          </p:cNvPicPr>
+          <p:nvPr/>
+        </p:nvPicPr>
+        <p:blipFill>
+          <a:blip r:embed="rId2"/>
+          <a:stretch>
+            <a:fillRect/>
+          </a:stretch>
+        </p:blipFill>
+        <p:spPr>
+          <a:xfrm>
+            <a:off x="8842000" y="2150000"/>
+            <a:ext cx="1800000" cy="1800000"/>
+          </a:xfrm>
+          <a:prstGeom prst="rect">
+            <a:avLst/>
+          </a:prstGeom>
+        </p:spPr>
+      </p:pic>
       <p:sp>
         <p:nvSpPr>
           <p:cNvPr id="4" name="TextBox 3"/>
@@ -26848,7 +28249,7 @@
         <p:spPr>
           <a:xfrm>
             <a:off x="620000" y="560000"/>
-            <a:ext cx="10952000" cy="620000"/>
+            <a:ext cx="10052000" cy="620000"/>
           </a:xfrm>
           <a:prstGeom prst="rect">
             <a:avLst/>
@@ -27069,9 +28470,33 @@
           </a:p>
         </p:txBody>
       </p:sp>
-      <p:sp>
-        <p:nvSpPr>
-          <p:cNvPr id="8" name="Rounded Rectangle 7"/>
+      <p:pic>
+        <p:nvPicPr>
+          <p:cNvPr id="8" name="Picture 7" descr="pv.png"/>
+          <p:cNvPicPr>
+            <a:picLocks noChangeAspect="1"/>
+          </p:cNvPicPr>
+          <p:nvPr/>
+        </p:nvPicPr>
+        <p:blipFill>
+          <a:blip r:embed="rId2"/>
+          <a:stretch>
+            <a:fillRect/>
+          </a:stretch>
+        </p:blipFill>
+        <p:spPr>
+          <a:xfrm>
+            <a:off x="10932000" y="275000"/>
+            <a:ext cx="640000" cy="640000"/>
+          </a:xfrm>
+          <a:prstGeom prst="rect">
+            <a:avLst/>
+          </a:prstGeom>
+        </p:spPr>
+      </p:pic>
+      <p:sp>
+        <p:nvSpPr>
+          <p:cNvPr id="9" name="Rounded Rectangle 8"/>
           <p:cNvSpPr/>
           <p:nvPr/>
         </p:nvSpPr>
@@ -27121,7 +28546,7 @@
       </p:sp>
       <p:sp>
         <p:nvSpPr>
-          <p:cNvPr id="9" name="Rectangle 8"/>
+          <p:cNvPr id="10" name="Rectangle 9"/>
           <p:cNvSpPr/>
           <p:nvPr/>
         </p:nvSpPr>
@@ -27167,7 +28592,7 @@
       </p:sp>
       <p:sp>
         <p:nvSpPr>
-          <p:cNvPr id="10" name="TextBox 9"/>
+          <p:cNvPr id="11" name="TextBox 10"/>
           <p:cNvSpPr txBox="1"/>
           <p:nvPr/>
         </p:nvSpPr>
@@ -27236,7 +28661,7 @@
       </p:sp>
       <p:sp>
         <p:nvSpPr>
-          <p:cNvPr id="11" name="TextBox 10"/>
+          <p:cNvPr id="12" name="TextBox 11"/>
           <p:cNvSpPr txBox="1"/>
           <p:nvPr/>
         </p:nvSpPr>
@@ -27356,7 +28781,7 @@
       </p:sp>
       <p:sp>
         <p:nvSpPr>
-          <p:cNvPr id="12" name="Rounded Rectangle 11"/>
+          <p:cNvPr id="13" name="Rounded Rectangle 12"/>
           <p:cNvSpPr/>
           <p:nvPr/>
         </p:nvSpPr>
@@ -27406,7 +28831,7 @@
       </p:sp>
       <p:sp>
         <p:nvSpPr>
-          <p:cNvPr id="13" name="Rectangle 12"/>
+          <p:cNvPr id="14" name="Rectangle 13"/>
           <p:cNvSpPr/>
           <p:nvPr/>
         </p:nvSpPr>
@@ -27452,7 +28877,7 @@
       </p:sp>
       <p:sp>
         <p:nvSpPr>
-          <p:cNvPr id="14" name="TextBox 13"/>
+          <p:cNvPr id="15" name="TextBox 14"/>
           <p:cNvSpPr txBox="1"/>
           <p:nvPr/>
         </p:nvSpPr>
@@ -27521,7 +28946,7 @@
       </p:sp>
       <p:sp>
         <p:nvSpPr>
-          <p:cNvPr id="15" name="TextBox 14"/>
+          <p:cNvPr id="16" name="TextBox 15"/>
           <p:cNvSpPr txBox="1"/>
           <p:nvPr/>
         </p:nvSpPr>
@@ -27641,7 +29066,7 @@
       </p:sp>
       <p:sp>
         <p:nvSpPr>
-          <p:cNvPr id="16" name="Rounded Rectangle 15"/>
+          <p:cNvPr id="17" name="Rounded Rectangle 16"/>
           <p:cNvSpPr/>
           <p:nvPr/>
         </p:nvSpPr>
@@ -27691,7 +29116,7 @@
       </p:sp>
       <p:sp>
         <p:nvSpPr>
-          <p:cNvPr id="17" name="Rectangle 16"/>
+          <p:cNvPr id="18" name="Rectangle 17"/>
           <p:cNvSpPr/>
           <p:nvPr/>
         </p:nvSpPr>
@@ -27737,7 +29162,7 @@
       </p:sp>
       <p:sp>
         <p:nvSpPr>
-          <p:cNvPr id="18" name="TextBox 17"/>
+          <p:cNvPr id="19" name="TextBox 18"/>
           <p:cNvSpPr txBox="1"/>
           <p:nvPr/>
         </p:nvSpPr>

--- a/CLASE-03/01-CLASE-03-CKA.pptx
+++ b/CLASE-03/01-CLASE-03-CKA.pptx
@@ -4454,8 +4454,8 @@
         </p:nvSpPr>
         <p:spPr>
           <a:xfrm>
-            <a:off x="620000" y="1830000"/>
-            <a:ext cx="2022400" cy="760000"/>
+            <a:off x="620000" y="1670000"/>
+            <a:ext cx="2022400" cy="700000"/>
           </a:xfrm>
           <a:prstGeom prst="roundRect">
             <a:avLst>
@@ -4504,8 +4504,8 @@
         </p:nvSpPr>
         <p:spPr>
           <a:xfrm>
-            <a:off x="690000" y="1830000"/>
-            <a:ext cx="1882400" cy="760000"/>
+            <a:off x="690000" y="1670000"/>
+            <a:ext cx="1882400" cy="700000"/>
           </a:xfrm>
           <a:prstGeom prst="rect">
             <a:avLst/>
@@ -4550,7 +4550,7 @@
         </p:nvCxnSpPr>
         <p:spPr>
           <a:xfrm>
-            <a:off x="2666400" y="2210000"/>
+            <a:off x="2666400" y="2020000"/>
             <a:ext cx="162000" cy="0"/>
           </a:xfrm>
           <a:prstGeom prst="line">
@@ -4587,8 +4587,8 @@
         </p:nvSpPr>
         <p:spPr>
           <a:xfrm>
-            <a:off x="2852400" y="1830000"/>
-            <a:ext cx="2022400" cy="760000"/>
+            <a:off x="2852400" y="1670000"/>
+            <a:ext cx="2022400" cy="700000"/>
           </a:xfrm>
           <a:prstGeom prst="roundRect">
             <a:avLst>
@@ -4637,8 +4637,8 @@
         </p:nvSpPr>
         <p:spPr>
           <a:xfrm>
-            <a:off x="2922400" y="1830000"/>
-            <a:ext cx="1882400" cy="760000"/>
+            <a:off x="2922400" y="1670000"/>
+            <a:ext cx="1882400" cy="700000"/>
           </a:xfrm>
           <a:prstGeom prst="rect">
             <a:avLst/>
@@ -4683,7 +4683,7 @@
         </p:nvCxnSpPr>
         <p:spPr>
           <a:xfrm>
-            <a:off x="4898800" y="2210000"/>
+            <a:off x="4898800" y="2020000"/>
             <a:ext cx="162000" cy="0"/>
           </a:xfrm>
           <a:prstGeom prst="line">
@@ -4720,8 +4720,8 @@
         </p:nvSpPr>
         <p:spPr>
           <a:xfrm>
-            <a:off x="5084800" y="1830000"/>
-            <a:ext cx="2022400" cy="760000"/>
+            <a:off x="5084800" y="1670000"/>
+            <a:ext cx="2022400" cy="700000"/>
           </a:xfrm>
           <a:prstGeom prst="roundRect">
             <a:avLst>
@@ -4770,8 +4770,8 @@
         </p:nvSpPr>
         <p:spPr>
           <a:xfrm>
-            <a:off x="5154800" y="1830000"/>
-            <a:ext cx="1882400" cy="760000"/>
+            <a:off x="5154800" y="1670000"/>
+            <a:ext cx="1882400" cy="700000"/>
           </a:xfrm>
           <a:prstGeom prst="rect">
             <a:avLst/>
@@ -4816,7 +4816,7 @@
         </p:nvCxnSpPr>
         <p:spPr>
           <a:xfrm>
-            <a:off x="7131200" y="2210000"/>
+            <a:off x="7131200" y="2020000"/>
             <a:ext cx="162000" cy="0"/>
           </a:xfrm>
           <a:prstGeom prst="line">
@@ -4853,8 +4853,8 @@
         </p:nvSpPr>
         <p:spPr>
           <a:xfrm>
-            <a:off x="7317200" y="1830000"/>
-            <a:ext cx="2022400" cy="760000"/>
+            <a:off x="7317200" y="1670000"/>
+            <a:ext cx="2022400" cy="700000"/>
           </a:xfrm>
           <a:prstGeom prst="roundRect">
             <a:avLst>
@@ -4903,8 +4903,8 @@
         </p:nvSpPr>
         <p:spPr>
           <a:xfrm>
-            <a:off x="7387200" y="1830000"/>
-            <a:ext cx="1882400" cy="760000"/>
+            <a:off x="7387200" y="1670000"/>
+            <a:ext cx="1882400" cy="700000"/>
           </a:xfrm>
           <a:prstGeom prst="rect">
             <a:avLst/>
@@ -4949,7 +4949,7 @@
         </p:nvCxnSpPr>
         <p:spPr>
           <a:xfrm>
-            <a:off x="9363600" y="2210000"/>
+            <a:off x="9363600" y="2020000"/>
             <a:ext cx="162000" cy="0"/>
           </a:xfrm>
           <a:prstGeom prst="line">
@@ -4986,8 +4986,8 @@
         </p:nvSpPr>
         <p:spPr>
           <a:xfrm>
-            <a:off x="9549600" y="1830000"/>
-            <a:ext cx="2022400" cy="760000"/>
+            <a:off x="9549600" y="1670000"/>
+            <a:ext cx="2022400" cy="700000"/>
           </a:xfrm>
           <a:prstGeom prst="roundRect">
             <a:avLst>
@@ -5036,8 +5036,8 @@
         </p:nvSpPr>
         <p:spPr>
           <a:xfrm>
-            <a:off x="9619600" y="1830000"/>
-            <a:ext cx="1882400" cy="760000"/>
+            <a:off x="9619600" y="1670000"/>
+            <a:ext cx="1882400" cy="700000"/>
           </a:xfrm>
           <a:prstGeom prst="rect">
             <a:avLst/>
@@ -5082,12 +5082,12 @@
         </p:nvSpPr>
         <p:spPr>
           <a:xfrm>
-            <a:off x="620000" y="2950000"/>
-            <a:ext cx="10952000" cy="1820000"/>
+            <a:off x="620000" y="2670000"/>
+            <a:ext cx="10952000" cy="3610000"/>
           </a:xfrm>
           <a:prstGeom prst="roundRect">
             <a:avLst>
-              <a:gd name="adj" fmla="val 6000"/>
+              <a:gd name="adj" fmla="val 4500"/>
             </a:avLst>
           </a:prstGeom>
           <a:solidFill>
@@ -5132,8 +5132,8 @@
         </p:nvSpPr>
         <p:spPr>
           <a:xfrm>
-            <a:off x="650000" y="2974000"/>
-            <a:ext cx="40000" cy="1772000"/>
+            <a:off x="646000" y="2692000"/>
+            <a:ext cx="40000" cy="3566000"/>
           </a:xfrm>
           <a:prstGeom prst="rect">
             <a:avLst/>
@@ -5178,8 +5178,8 @@
         </p:nvSpPr>
         <p:spPr>
           <a:xfrm>
-            <a:off x="880000" y="3190000"/>
-            <a:ext cx="10432000" cy="1420000"/>
+            <a:off x="860000" y="2800000"/>
+            <a:ext cx="10522000" cy="3350000"/>
           </a:xfrm>
           <a:prstGeom prst="rect">
             <a:avLst/>
@@ -5200,14 +5200,14 @@
                 <a:spcPts val="0"/>
               </a:spcBef>
               <a:spcAft>
-                <a:spcPts val="1200"/>
-              </a:spcAft>
-              <a:buNone/>
-            </a:pPr>
-            <a:r>
-              <a:rPr sz="1000" b="1" i="0" spc="180">
-                <a:solidFill>
-                  <a:srgbClr val="74A6FF"/>
+                <a:spcPts val="600"/>
+              </a:spcAft>
+              <a:buNone/>
+            </a:pPr>
+            <a:r>
+              <a:rPr sz="900" b="1" i="0" spc="200">
+                <a:solidFill>
+                  <a:srgbClr val="326CE5"/>
                 </a:solidFill>
                 <a:latin typeface="Segoe UI Semibold"/>
               </a:rPr>
@@ -5215,18 +5215,17 @@
             </a:r>
           </a:p>
           <a:p>
-            <a:pPr algn="l" marL="182880" indent="-182880">
-              <a:lnSpc>
-                <a:spcPct val="120000"/>
-              </a:lnSpc>
-              <a:spcBef>
-                <a:spcPts val="0"/>
-              </a:spcBef>
-              <a:spcAft>
-                <a:spcPts val="700"/>
-              </a:spcAft>
-              <a:buFont typeface="Arial"/>
-              <a:buChar char="•"/>
+            <a:pPr algn="l" marL="0" indent="0">
+              <a:lnSpc>
+                <a:spcPct val="128000"/>
+              </a:lnSpc>
+              <a:spcBef>
+                <a:spcPts val="0"/>
+              </a:spcBef>
+              <a:spcAft>
+                <a:spcPts val="400"/>
+              </a:spcAft>
+              <a:buNone/>
             </a:pPr>
             <a:r>
               <a:rPr sz="1100" b="0" i="0">
@@ -5235,22 +5234,21 @@
                 </a:solidFill>
                 <a:latin typeface="Segoe UI"/>
               </a:rPr>
-              <a:t>ESTÁTICO: el administrador crea el PV a mano; el PVC lo encuentra si todo coincide.</a:t>
-            </a:r>
-          </a:p>
-          <a:p>
-            <a:pPr algn="l" marL="182880" indent="-182880">
-              <a:lnSpc>
-                <a:spcPct val="120000"/>
-              </a:lnSpc>
-              <a:spcBef>
-                <a:spcPts val="0"/>
-              </a:spcBef>
-              <a:spcAft>
-                <a:spcPts val="700"/>
-              </a:spcAft>
-              <a:buFont typeface="Arial"/>
-              <a:buChar char="•"/>
+              <a:t>Hay dos caminos para que un PVC obtenga almacenamiento. En el aprovisionamiento ESTÁTICO, el administrador crea los PV a mano por adelantado; cuando aparece un PVC, el control plane busca un PV libre que encaje (mismo storageClassName, un accessMode compatible y capacidad suficiente) y los enlaza. Si no hay ninguno que encaje, el PVC se queda en Pending.</a:t>
+            </a:r>
+          </a:p>
+          <a:p>
+            <a:pPr algn="l" marL="0" indent="0">
+              <a:lnSpc>
+                <a:spcPct val="128000"/>
+              </a:lnSpc>
+              <a:spcBef>
+                <a:spcPts val="0"/>
+              </a:spcBef>
+              <a:spcAft>
+                <a:spcPts val="400"/>
+              </a:spcAft>
+              <a:buNone/>
             </a:pPr>
             <a:r>
               <a:rPr sz="1100" b="0" i="0">
@@ -5259,22 +5257,21 @@
                 </a:solidFill>
                 <a:latin typeface="Segoe UI"/>
               </a:rPr>
-              <a:t>DINÁMICO: el PVC pide una StorageClass y el provisioner crea el PV al vuelo.</a:t>
-            </a:r>
-          </a:p>
-          <a:p>
-            <a:pPr algn="l" marL="182880" indent="-182880">
-              <a:lnSpc>
-                <a:spcPct val="120000"/>
-              </a:lnSpc>
-              <a:spcBef>
-                <a:spcPts val="0"/>
-              </a:spcBef>
-              <a:spcAft>
-                <a:spcPts val="700"/>
-              </a:spcAft>
-              <a:buFont typeface="Arial"/>
-              <a:buChar char="•"/>
+              <a:t>En el aprovisionamiento DINÁMICO, el PVC nombra una StorageClass y el provisioner asociado crea el PV al vuelo con las características pedidas. Es lo habitual en la nube. Muchos clusters tienen una StorageClass marcada como default que se aplica a los PVC que no especifican ninguna.</a:t>
+            </a:r>
+          </a:p>
+          <a:p>
+            <a:pPr algn="l" marL="0" indent="0">
+              <a:lnSpc>
+                <a:spcPct val="128000"/>
+              </a:lnSpc>
+              <a:spcBef>
+                <a:spcPts val="0"/>
+              </a:spcBef>
+              <a:spcAft>
+                <a:spcPts val="400"/>
+              </a:spcAft>
+              <a:buNone/>
             </a:pPr>
             <a:r>
               <a:rPr sz="1100" b="0" i="0">
@@ -5283,31 +5280,7 @@
                 </a:solidFill>
                 <a:latin typeface="Segoe UI"/>
               </a:rPr>
-              <a:t>Si hay StorageClass por defecto y no la desactivas, tus PV estáticos se ignoran.</a:t>
-            </a:r>
-          </a:p>
-          <a:p>
-            <a:pPr algn="l" marL="182880" indent="-182880">
-              <a:lnSpc>
-                <a:spcPct val="120000"/>
-              </a:lnSpc>
-              <a:spcBef>
-                <a:spcPts val="0"/>
-              </a:spcBef>
-              <a:spcAft>
-                <a:spcPts val="700"/>
-              </a:spcAft>
-              <a:buFont typeface="Arial"/>
-              <a:buChar char="•"/>
-            </a:pPr>
-            <a:r>
-              <a:rPr sz="1100" b="0" i="0">
-                <a:solidFill>
-                  <a:srgbClr val="BDC9DB"/>
-                </a:solidFill>
-                <a:latin typeface="Segoe UI"/>
-              </a:rPr>
-              <a:t>storageClassName: "" NO es lo mismo que omitir el campo: la cadena vacía desactiva la clase por defecto.</a:t>
+              <a:t>Dos trampas frecuentes: si existe una StorageClass por defecto y no la desactivas, tus PV estáticos se ignoran porque el PVC pide dinámico; y storageClassName: "" (cadena vacía) NO es lo mismo que omitir el campo —la cadena vacía desactiva explícitamente la clase por defecto y fuerza el emparejamiento estático.</a:t>
             </a:r>
           </a:p>
         </p:txBody>
@@ -5876,7 +5849,7 @@
         </p:nvSpPr>
         <p:spPr>
           <a:xfrm>
-            <a:off x="620000" y="2450000"/>
+            <a:off x="620000" y="2340000"/>
             <a:ext cx="10952000" cy="8000"/>
           </a:xfrm>
           <a:prstGeom prst="rect">
@@ -5923,7 +5896,7 @@
         <p:spPr>
           <a:xfrm>
             <a:off x="780000" y="1890000"/>
-            <a:ext cx="2766909" cy="560000"/>
+            <a:ext cx="2766909" cy="450000"/>
           </a:xfrm>
           <a:prstGeom prst="rect">
             <a:avLst/>
@@ -5969,7 +5942,7 @@
         <p:spPr>
           <a:xfrm>
             <a:off x="3766909" y="1890000"/>
-            <a:ext cx="4758181" cy="560000"/>
+            <a:ext cx="4758181" cy="450000"/>
           </a:xfrm>
           <a:prstGeom prst="rect">
             <a:avLst/>
@@ -6015,7 +5988,7 @@
         <p:spPr>
           <a:xfrm>
             <a:off x="8745090" y="1890000"/>
-            <a:ext cx="2766909" cy="560000"/>
+            <a:ext cx="2766909" cy="450000"/>
           </a:xfrm>
           <a:prstGeom prst="rect">
             <a:avLst/>
@@ -6060,8 +6033,8 @@
         </p:nvSpPr>
         <p:spPr>
           <a:xfrm>
-            <a:off x="620000" y="2450000"/>
-            <a:ext cx="10952000" cy="560000"/>
+            <a:off x="620000" y="2340000"/>
+            <a:ext cx="10952000" cy="450000"/>
           </a:xfrm>
           <a:prstGeom prst="rect">
             <a:avLst/>
@@ -6106,7 +6079,7 @@
         </p:nvSpPr>
         <p:spPr>
           <a:xfrm>
-            <a:off x="620000" y="3010000"/>
+            <a:off x="620000" y="2790000"/>
             <a:ext cx="10952000" cy="8000"/>
           </a:xfrm>
           <a:prstGeom prst="rect">
@@ -6152,8 +6125,8 @@
         </p:nvSpPr>
         <p:spPr>
           <a:xfrm>
-            <a:off x="780000" y="2450000"/>
-            <a:ext cx="2766909" cy="560000"/>
+            <a:off x="780000" y="2340000"/>
+            <a:ext cx="2766909" cy="450000"/>
           </a:xfrm>
           <a:prstGeom prst="rect">
             <a:avLst/>
@@ -6198,8 +6171,8 @@
         </p:nvSpPr>
         <p:spPr>
           <a:xfrm>
-            <a:off x="3766909" y="2450000"/>
-            <a:ext cx="4758181" cy="560000"/>
+            <a:off x="3766909" y="2340000"/>
+            <a:ext cx="4758181" cy="450000"/>
           </a:xfrm>
           <a:prstGeom prst="rect">
             <a:avLst/>
@@ -6244,8 +6217,8 @@
         </p:nvSpPr>
         <p:spPr>
           <a:xfrm>
-            <a:off x="8745090" y="2450000"/>
-            <a:ext cx="2766909" cy="560000"/>
+            <a:off x="8745090" y="2340000"/>
+            <a:ext cx="2766909" cy="450000"/>
           </a:xfrm>
           <a:prstGeom prst="rect">
             <a:avLst/>
@@ -6290,7 +6263,7 @@
         </p:nvSpPr>
         <p:spPr>
           <a:xfrm>
-            <a:off x="620000" y="3570000"/>
+            <a:off x="620000" y="3240000"/>
             <a:ext cx="10952000" cy="8000"/>
           </a:xfrm>
           <a:prstGeom prst="rect">
@@ -6336,8 +6309,8 @@
         </p:nvSpPr>
         <p:spPr>
           <a:xfrm>
-            <a:off x="780000" y="3010000"/>
-            <a:ext cx="2766909" cy="560000"/>
+            <a:off x="780000" y="2790000"/>
+            <a:ext cx="2766909" cy="450000"/>
           </a:xfrm>
           <a:prstGeom prst="rect">
             <a:avLst/>
@@ -6382,8 +6355,8 @@
         </p:nvSpPr>
         <p:spPr>
           <a:xfrm>
-            <a:off x="3766909" y="3010000"/>
-            <a:ext cx="4758181" cy="560000"/>
+            <a:off x="3766909" y="2790000"/>
+            <a:ext cx="4758181" cy="450000"/>
           </a:xfrm>
           <a:prstGeom prst="rect">
             <a:avLst/>
@@ -6428,8 +6401,8 @@
         </p:nvSpPr>
         <p:spPr>
           <a:xfrm>
-            <a:off x="8745090" y="3010000"/>
-            <a:ext cx="2766909" cy="560000"/>
+            <a:off x="8745090" y="2790000"/>
+            <a:ext cx="2766909" cy="450000"/>
           </a:xfrm>
           <a:prstGeom prst="rect">
             <a:avLst/>
@@ -6474,8 +6447,8 @@
         </p:nvSpPr>
         <p:spPr>
           <a:xfrm>
-            <a:off x="620000" y="3570000"/>
-            <a:ext cx="10952000" cy="560000"/>
+            <a:off x="620000" y="3240000"/>
+            <a:ext cx="10952000" cy="450000"/>
           </a:xfrm>
           <a:prstGeom prst="rect">
             <a:avLst/>
@@ -6520,7 +6493,7 @@
         </p:nvSpPr>
         <p:spPr>
           <a:xfrm>
-            <a:off x="620000" y="4130000"/>
+            <a:off x="620000" y="3690000"/>
             <a:ext cx="10952000" cy="8000"/>
           </a:xfrm>
           <a:prstGeom prst="rect">
@@ -6566,8 +6539,8 @@
         </p:nvSpPr>
         <p:spPr>
           <a:xfrm>
-            <a:off x="780000" y="3570000"/>
-            <a:ext cx="2766909" cy="560000"/>
+            <a:off x="780000" y="3240000"/>
+            <a:ext cx="2766909" cy="450000"/>
           </a:xfrm>
           <a:prstGeom prst="rect">
             <a:avLst/>
@@ -6612,8 +6585,8 @@
         </p:nvSpPr>
         <p:spPr>
           <a:xfrm>
-            <a:off x="3766909" y="3570000"/>
-            <a:ext cx="4758181" cy="560000"/>
+            <a:off x="3766909" y="3240000"/>
+            <a:ext cx="4758181" cy="450000"/>
           </a:xfrm>
           <a:prstGeom prst="rect">
             <a:avLst/>
@@ -6658,8 +6631,8 @@
         </p:nvSpPr>
         <p:spPr>
           <a:xfrm>
-            <a:off x="8745090" y="3570000"/>
-            <a:ext cx="2766909" cy="560000"/>
+            <a:off x="8745090" y="3240000"/>
+            <a:ext cx="2766909" cy="450000"/>
           </a:xfrm>
           <a:prstGeom prst="rect">
             <a:avLst/>
@@ -6704,7 +6677,7 @@
         </p:nvSpPr>
         <p:spPr>
           <a:xfrm>
-            <a:off x="620000" y="4690000"/>
+            <a:off x="620000" y="4140000"/>
             <a:ext cx="10952000" cy="8000"/>
           </a:xfrm>
           <a:prstGeom prst="rect">
@@ -6750,8 +6723,8 @@
         </p:nvSpPr>
         <p:spPr>
           <a:xfrm>
-            <a:off x="780000" y="4130000"/>
-            <a:ext cx="2766909" cy="560000"/>
+            <a:off x="780000" y="3690000"/>
+            <a:ext cx="2766909" cy="450000"/>
           </a:xfrm>
           <a:prstGeom prst="rect">
             <a:avLst/>
@@ -6796,8 +6769,8 @@
         </p:nvSpPr>
         <p:spPr>
           <a:xfrm>
-            <a:off x="3766909" y="4130000"/>
-            <a:ext cx="4758181" cy="560000"/>
+            <a:off x="3766909" y="3690000"/>
+            <a:ext cx="4758181" cy="450000"/>
           </a:xfrm>
           <a:prstGeom prst="rect">
             <a:avLst/>
@@ -6842,8 +6815,8 @@
         </p:nvSpPr>
         <p:spPr>
           <a:xfrm>
-            <a:off x="8745090" y="4130000"/>
-            <a:ext cx="2766909" cy="560000"/>
+            <a:off x="8745090" y="3690000"/>
+            <a:ext cx="2766909" cy="450000"/>
           </a:xfrm>
           <a:prstGeom prst="rect">
             <a:avLst/>
@@ -6888,12 +6861,12 @@
         </p:nvSpPr>
         <p:spPr>
           <a:xfrm>
-            <a:off x="620000" y="5910000"/>
-            <a:ext cx="10952000" cy="470000"/>
+            <a:off x="620000" y="4310000"/>
+            <a:ext cx="10952000" cy="2000000"/>
           </a:xfrm>
           <a:prstGeom prst="roundRect">
             <a:avLst>
-              <a:gd name="adj" fmla="val 10000"/>
+              <a:gd name="adj" fmla="val 4500"/>
             </a:avLst>
           </a:prstGeom>
           <a:solidFill>
@@ -6938,8 +6911,8 @@
         </p:nvSpPr>
         <p:spPr>
           <a:xfrm>
-            <a:off x="650000" y="5934000"/>
-            <a:ext cx="40000" cy="422000"/>
+            <a:off x="646000" y="4332000"/>
+            <a:ext cx="40000" cy="1956000"/>
           </a:xfrm>
           <a:prstGeom prst="rect">
             <a:avLst/>
@@ -6984,8 +6957,8 @@
         </p:nvSpPr>
         <p:spPr>
           <a:xfrm>
-            <a:off x="860000" y="5910000"/>
-            <a:ext cx="10482000" cy="470000"/>
+            <a:off x="860000" y="4440000"/>
+            <a:ext cx="10522000" cy="1740000"/>
           </a:xfrm>
           <a:prstGeom prst="rect">
             <a:avLst/>
@@ -6993,31 +6966,100 @@
           <a:noFill/>
         </p:spPr>
         <p:txBody>
-          <a:bodyPr wrap="square" anchor="ctr" lIns="0" rIns="0" tIns="0" bIns="0">
+          <a:bodyPr wrap="square" anchor="t" lIns="0" rIns="0" tIns="0" bIns="0">
             <a:noAutofit/>
           </a:bodyPr>
           <a:lstStyle/>
           <a:p>
             <a:pPr algn="l" marL="0" indent="0">
               <a:lnSpc>
-                <a:spcPct val="116000"/>
-              </a:lnSpc>
-              <a:spcBef>
-                <a:spcPts val="0"/>
-              </a:spcBef>
-              <a:spcAft>
-                <a:spcPts val="0"/>
-              </a:spcAft>
-              <a:buNone/>
-            </a:pPr>
-            <a:r>
-              <a:rPr sz="1100" b="0" i="1">
+                <a:spcPct val="100000"/>
+              </a:lnSpc>
+              <a:spcBef>
+                <a:spcPts val="0"/>
+              </a:spcBef>
+              <a:spcAft>
+                <a:spcPts val="600"/>
+              </a:spcAft>
+              <a:buNone/>
+            </a:pPr>
+            <a:r>
+              <a:rPr sz="900" b="1" i="0" spc="200">
+                <a:solidFill>
+                  <a:srgbClr val="326CE5"/>
+                </a:solidFill>
+                <a:latin typeface="Segoe UI Semibold"/>
+              </a:rPr>
+              <a:t>TEORÍA</a:t>
+            </a:r>
+          </a:p>
+          <a:p>
+            <a:pPr algn="l" marL="0" indent="0">
+              <a:lnSpc>
+                <a:spcPct val="128000"/>
+              </a:lnSpc>
+              <a:spcBef>
+                <a:spcPts val="0"/>
+              </a:spcBef>
+              <a:spcAft>
+                <a:spcPts val="400"/>
+              </a:spcAft>
+              <a:buNone/>
+            </a:pPr>
+            <a:r>
+              <a:rPr sz="1000" b="0" i="0">
                 <a:solidFill>
                   <a:srgbClr val="BDC9DB"/>
                 </a:solidFill>
                 <a:latin typeface="Segoe UI"/>
               </a:rPr>
-              <a:t>El PVC muestra la capacidad del PV enlazado, no la que pidió. Si pides 1Gi y recibes un PV de 2Gi, verás 2Gi.</a:t>
+              <a:t>El enlace (binding) entre un PVC y un PV es todo-o-nada: se comprueban varios criterios y basta que uno falle para que el PVC se quede en Pending. El storageClassName debe coincidir exactamente, incluida la cadena vacía. Los accessModes del PV deben OFRECER lo que el PVC PIDE (un PV solo-RWO no sirve para un PVC que pide RWX). La capacidad del PV debe ser mayor o igual que la solicitada.</a:t>
+            </a:r>
+          </a:p>
+          <a:p>
+            <a:pPr algn="l" marL="0" indent="0">
+              <a:lnSpc>
+                <a:spcPct val="128000"/>
+              </a:lnSpc>
+              <a:spcBef>
+                <a:spcPts val="0"/>
+              </a:spcBef>
+              <a:spcAft>
+                <a:spcPts val="400"/>
+              </a:spcAft>
+              <a:buNone/>
+            </a:pPr>
+            <a:r>
+              <a:rPr sz="1000" b="0" i="0">
+                <a:solidFill>
+                  <a:srgbClr val="BDC9DB"/>
+                </a:solidFill>
+                <a:latin typeface="Segoe UI"/>
+              </a:rPr>
+              <a:t>Si el PVC declara un selector de labels, el PV tiene que cumplirlo. Y el PV no puede estar ya reservado: si tiene un claimRef apuntando a otro PVC, no está disponible aunque su estado parezca libre.</a:t>
+            </a:r>
+          </a:p>
+          <a:p>
+            <a:pPr algn="l" marL="0" indent="0">
+              <a:lnSpc>
+                <a:spcPct val="128000"/>
+              </a:lnSpc>
+              <a:spcBef>
+                <a:spcPts val="0"/>
+              </a:spcBef>
+              <a:spcAft>
+                <a:spcPts val="400"/>
+              </a:spcAft>
+              <a:buNone/>
+            </a:pPr>
+            <a:r>
+              <a:rPr sz="1000" b="0" i="0">
+                <a:solidFill>
+                  <a:srgbClr val="BDC9DB"/>
+                </a:solidFill>
+                <a:latin typeface="Segoe UI"/>
+              </a:rPr>
+              <a:t>Un detalle que confunde en el examen: una vez enlazado, el PVC muestra la capacidad del PV real, no la que pidió. Si solicitas 1Gi y el único PV disponible es de 2Gi, verás 2Gi. Y cuando se borra el PVC, un PV con reclaimPolicy Retain no vuelve a Available: queda en Released con sus datos y su claimRef, y hay que liberarlo a mano.</a:t>
             </a:r>
           </a:p>
         </p:txBody>
@@ -7356,7 +7398,7 @@
         </p:nvSpPr>
         <p:spPr>
           <a:xfrm>
-            <a:off x="636000" y="2428000"/>
+            <a:off x="636000" y="1751750"/>
             <a:ext cx="104000" cy="104000"/>
           </a:xfrm>
           <a:prstGeom prst="ellipse">
@@ -7400,8 +7442,8 @@
         </p:nvSpPr>
         <p:spPr>
           <a:xfrm>
-            <a:off x="880000" y="2010000"/>
-            <a:ext cx="5435040" cy="940000"/>
+            <a:off x="880000" y="1470000"/>
+            <a:ext cx="5435040" cy="667500"/>
           </a:xfrm>
           <a:prstGeom prst="rect">
             <a:avLst/>
@@ -7446,7 +7488,7 @@
         </p:nvSpPr>
         <p:spPr>
           <a:xfrm>
-            <a:off x="636000" y="3368000"/>
+            <a:off x="636000" y="2419250"/>
             <a:ext cx="104000" cy="104000"/>
           </a:xfrm>
           <a:prstGeom prst="ellipse">
@@ -7490,8 +7532,8 @@
         </p:nvSpPr>
         <p:spPr>
           <a:xfrm>
-            <a:off x="880000" y="2950000"/>
-            <a:ext cx="5435040" cy="940000"/>
+            <a:off x="880000" y="2137500"/>
+            <a:ext cx="5435040" cy="667500"/>
           </a:xfrm>
           <a:prstGeom prst="rect">
             <a:avLst/>
@@ -7536,7 +7578,7 @@
         </p:nvSpPr>
         <p:spPr>
           <a:xfrm>
-            <a:off x="636000" y="4308000"/>
+            <a:off x="636000" y="3086750"/>
             <a:ext cx="104000" cy="104000"/>
           </a:xfrm>
           <a:prstGeom prst="ellipse">
@@ -7580,8 +7622,8 @@
         </p:nvSpPr>
         <p:spPr>
           <a:xfrm>
-            <a:off x="880000" y="3890000"/>
-            <a:ext cx="5435040" cy="940000"/>
+            <a:off x="880000" y="2805000"/>
+            <a:ext cx="5435040" cy="667500"/>
           </a:xfrm>
           <a:prstGeom prst="rect">
             <a:avLst/>
@@ -7626,7 +7668,7 @@
         </p:nvSpPr>
         <p:spPr>
           <a:xfrm>
-            <a:off x="636000" y="5248000"/>
+            <a:off x="636000" y="3754250"/>
             <a:ext cx="104000" cy="104000"/>
           </a:xfrm>
           <a:prstGeom prst="ellipse">
@@ -7670,8 +7712,8 @@
         </p:nvSpPr>
         <p:spPr>
           <a:xfrm>
-            <a:off x="880000" y="4830000"/>
-            <a:ext cx="5435040" cy="940000"/>
+            <a:off x="880000" y="3472500"/>
+            <a:ext cx="5435040" cy="667500"/>
           </a:xfrm>
           <a:prstGeom prst="rect">
             <a:avLst/>
@@ -7716,8 +7758,8 @@
         </p:nvSpPr>
         <p:spPr>
           <a:xfrm>
-            <a:off x="6635040" y="2010000"/>
-            <a:ext cx="4936960" cy="3760000"/>
+            <a:off x="6635040" y="1470000"/>
+            <a:ext cx="4936960" cy="2670000"/>
           </a:xfrm>
           <a:prstGeom prst="roundRect">
             <a:avLst>
@@ -7766,7 +7808,7 @@
         </p:nvSpPr>
         <p:spPr>
           <a:xfrm>
-            <a:off x="6659040" y="2010000"/>
+            <a:off x="6659040" y="1470000"/>
             <a:ext cx="4888960" cy="46000"/>
           </a:xfrm>
           <a:prstGeom prst="rect">
@@ -7812,8 +7854,8 @@
         </p:nvSpPr>
         <p:spPr>
           <a:xfrm>
-            <a:off x="6875040" y="2250000"/>
-            <a:ext cx="4456960" cy="3280000"/>
+            <a:off x="6875040" y="1710000"/>
+            <a:ext cx="4456960" cy="2190000"/>
           </a:xfrm>
           <a:prstGeom prst="rect">
             <a:avLst/>
@@ -7918,6 +7960,217 @@
                 <a:latin typeface="Segoe UI"/>
               </a:rPr>
               <a:t>Recycle — ELIMINADO de Kubernetes. Si lo ves en un apunte, ese apunte es viejo.</a:t>
+            </a:r>
+          </a:p>
+        </p:txBody>
+      </p:sp>
+      <p:sp>
+        <p:nvSpPr>
+          <p:cNvPr id="20" name="Rounded Rectangle 19"/>
+          <p:cNvSpPr/>
+          <p:nvPr/>
+        </p:nvSpPr>
+        <p:spPr>
+          <a:xfrm>
+            <a:off x="620000" y="4310000"/>
+            <a:ext cx="10952000" cy="2000000"/>
+          </a:xfrm>
+          <a:prstGeom prst="roundRect">
+            <a:avLst>
+              <a:gd name="adj" fmla="val 4500"/>
+            </a:avLst>
+          </a:prstGeom>
+          <a:solidFill>
+            <a:srgbClr val="111A2C"/>
+          </a:solidFill>
+          <a:ln w="12700">
+            <a:solidFill>
+              <a:srgbClr val="26354E"/>
+            </a:solidFill>
+          </a:ln>
+          <a:effectLst/>
+        </p:spPr>
+        <p:style>
+          <a:lnRef idx="1">
+            <a:schemeClr val="accent1"/>
+          </a:lnRef>
+          <a:fillRef idx="3">
+            <a:schemeClr val="accent1"/>
+          </a:fillRef>
+          <a:effectRef idx="2">
+            <a:schemeClr val="accent1"/>
+          </a:effectRef>
+          <a:fontRef idx="minor">
+            <a:schemeClr val="lt1"/>
+          </a:fontRef>
+        </p:style>
+        <p:txBody>
+          <a:bodyPr rtlCol="0" anchor="ctr" lIns="0" rIns="0" tIns="0" bIns="0">
+            <a:noAutofit/>
+          </a:bodyPr>
+          <a:lstStyle/>
+          <a:p>
+            <a:pPr algn="ctr"/>
+          </a:p>
+        </p:txBody>
+      </p:sp>
+      <p:sp>
+        <p:nvSpPr>
+          <p:cNvPr id="21" name="Rectangle 20"/>
+          <p:cNvSpPr/>
+          <p:nvPr/>
+        </p:nvSpPr>
+        <p:spPr>
+          <a:xfrm>
+            <a:off x="646000" y="4332000"/>
+            <a:ext cx="40000" cy="1956000"/>
+          </a:xfrm>
+          <a:prstGeom prst="rect">
+            <a:avLst/>
+          </a:prstGeom>
+          <a:solidFill>
+            <a:srgbClr val="326CE5"/>
+          </a:solidFill>
+          <a:ln>
+            <a:noFill/>
+          </a:ln>
+          <a:effectLst/>
+        </p:spPr>
+        <p:style>
+          <a:lnRef idx="1">
+            <a:schemeClr val="accent1"/>
+          </a:lnRef>
+          <a:fillRef idx="3">
+            <a:schemeClr val="accent1"/>
+          </a:fillRef>
+          <a:effectRef idx="2">
+            <a:schemeClr val="accent1"/>
+          </a:effectRef>
+          <a:fontRef idx="minor">
+            <a:schemeClr val="lt1"/>
+          </a:fontRef>
+        </p:style>
+        <p:txBody>
+          <a:bodyPr rtlCol="0" anchor="ctr" lIns="0" rIns="0" tIns="0" bIns="0">
+            <a:noAutofit/>
+          </a:bodyPr>
+          <a:lstStyle/>
+          <a:p>
+            <a:pPr algn="ctr"/>
+          </a:p>
+        </p:txBody>
+      </p:sp>
+      <p:sp>
+        <p:nvSpPr>
+          <p:cNvPr id="22" name="TextBox 21"/>
+          <p:cNvSpPr txBox="1"/>
+          <p:nvPr/>
+        </p:nvSpPr>
+        <p:spPr>
+          <a:xfrm>
+            <a:off x="860000" y="4440000"/>
+            <a:ext cx="10522000" cy="1740000"/>
+          </a:xfrm>
+          <a:prstGeom prst="rect">
+            <a:avLst/>
+          </a:prstGeom>
+          <a:noFill/>
+        </p:spPr>
+        <p:txBody>
+          <a:bodyPr wrap="square" anchor="t" lIns="0" rIns="0" tIns="0" bIns="0">
+            <a:noAutofit/>
+          </a:bodyPr>
+          <a:lstStyle/>
+          <a:p>
+            <a:pPr algn="l" marL="0" indent="0">
+              <a:lnSpc>
+                <a:spcPct val="100000"/>
+              </a:lnSpc>
+              <a:spcBef>
+                <a:spcPts val="0"/>
+              </a:spcBef>
+              <a:spcAft>
+                <a:spcPts val="600"/>
+              </a:spcAft>
+              <a:buNone/>
+            </a:pPr>
+            <a:r>
+              <a:rPr sz="900" b="1" i="0" spc="200">
+                <a:solidFill>
+                  <a:srgbClr val="326CE5"/>
+                </a:solidFill>
+                <a:latin typeface="Segoe UI Semibold"/>
+              </a:rPr>
+              <a:t>TEORÍA</a:t>
+            </a:r>
+          </a:p>
+          <a:p>
+            <a:pPr algn="l" marL="0" indent="0">
+              <a:lnSpc>
+                <a:spcPct val="128000"/>
+              </a:lnSpc>
+              <a:spcBef>
+                <a:spcPts val="0"/>
+              </a:spcBef>
+              <a:spcAft>
+                <a:spcPts val="400"/>
+              </a:spcAft>
+              <a:buNone/>
+            </a:pPr>
+            <a:r>
+              <a:rPr sz="1000" b="0" i="0">
+                <a:solidFill>
+                  <a:srgbClr val="BDC9DB"/>
+                </a:solidFill>
+                <a:latin typeface="Segoe UI"/>
+              </a:rPr>
+              <a:t>El accessMode describe cómo se puede montar el volumen. ReadWriteOnce (RWO) permite lectura y escritura desde un solo NODO —varios Pods de ese nodo pueden compartirlo— y es el modo por defecto de casi todo el almacenamiento de bloque. ReadOnlyMany (ROX) es solo lectura desde varios nodos. ReadWriteMany (RWX) es lectura y escritura desde varios nodos, y exige almacenamiento de fichero tipo NFS o CephFS. ReadWriteOncePod (RWOP) lo restringe a un único Pod, ni siquiera dos en el mismo nodo.</a:t>
+            </a:r>
+          </a:p>
+          <a:p>
+            <a:pPr algn="l" marL="0" indent="0">
+              <a:lnSpc>
+                <a:spcPct val="128000"/>
+              </a:lnSpc>
+              <a:spcBef>
+                <a:spcPts val="0"/>
+              </a:spcBef>
+              <a:spcAft>
+                <a:spcPts val="400"/>
+              </a:spcAft>
+              <a:buNone/>
+            </a:pPr>
+            <a:r>
+              <a:rPr sz="1000" b="0" i="0">
+                <a:solidFill>
+                  <a:srgbClr val="BDC9DB"/>
+                </a:solidFill>
+                <a:latin typeface="Segoe UI"/>
+              </a:rPr>
+              <a:t>El accessMode no es una propiedad mágica del disco: es lo que el PV declara ofrecer y el PVC declara necesitar. Pedir RWX sobre un backend que solo da RWO deja el PVC en Pending o el Pod sin arrancar.</a:t>
+            </a:r>
+          </a:p>
+          <a:p>
+            <a:pPr algn="l" marL="0" indent="0">
+              <a:lnSpc>
+                <a:spcPct val="128000"/>
+              </a:lnSpc>
+              <a:spcBef>
+                <a:spcPts val="0"/>
+              </a:spcBef>
+              <a:spcAft>
+                <a:spcPts val="400"/>
+              </a:spcAft>
+              <a:buNone/>
+            </a:pPr>
+            <a:r>
+              <a:rPr sz="1000" b="0" i="0">
+                <a:solidFill>
+                  <a:srgbClr val="BDC9DB"/>
+                </a:solidFill>
+                <a:latin typeface="Segoe UI"/>
+              </a:rPr>
+              <a:t>La reclaimPolicy decide qué pasa con el PV al borrar su PVC. Retain conserva el PV y sus datos en estado Released (recuperación manual). Delete borra el PV y el almacenamiento subyacente. Recycle fue eliminado hace tiempo: si lo ves en unos apuntes, están desactualizados.</a:t>
             </a:r>
           </a:p>
         </p:txBody>
@@ -10578,8 +10831,8 @@
         </p:nvSpPr>
         <p:spPr>
           <a:xfrm>
-            <a:off x="620000" y="2138000"/>
-            <a:ext cx="5316000" cy="1332000"/>
+            <a:off x="620000" y="1470000"/>
+            <a:ext cx="5316000" cy="1215000"/>
           </a:xfrm>
           <a:prstGeom prst="roundRect">
             <a:avLst>
@@ -10628,7 +10881,7 @@
         </p:nvSpPr>
         <p:spPr>
           <a:xfrm>
-            <a:off x="644000" y="2138000"/>
+            <a:off x="644000" y="1470000"/>
             <a:ext cx="5268000" cy="46000"/>
           </a:xfrm>
           <a:prstGeom prst="rect">
@@ -10674,7 +10927,7 @@
         </p:nvSpPr>
         <p:spPr>
           <a:xfrm>
-            <a:off x="850000" y="2388000"/>
+            <a:off x="820000" y="1690000"/>
             <a:ext cx="300000" cy="300000"/>
           </a:xfrm>
           <a:prstGeom prst="ellipse">
@@ -10748,7 +11001,7 @@
         </p:blipFill>
         <p:spPr>
           <a:xfrm>
-            <a:off x="5376000" y="2374000"/>
+            <a:off x="5406000" y="1676000"/>
             <a:ext cx="330000" cy="330000"/>
           </a:xfrm>
           <a:prstGeom prst="rect">
@@ -10764,8 +11017,8 @@
         </p:nvSpPr>
         <p:spPr>
           <a:xfrm>
-            <a:off x="1260000" y="2368000"/>
-            <a:ext cx="4256000" cy="340000"/>
+            <a:off x="1230000" y="1670000"/>
+            <a:ext cx="4286000" cy="340000"/>
           </a:xfrm>
           <a:prstGeom prst="rect">
             <a:avLst/>
@@ -10810,8 +11063,8 @@
         </p:nvSpPr>
         <p:spPr>
           <a:xfrm>
-            <a:off x="850000" y="2788000"/>
-            <a:ext cx="4856000" cy="602000"/>
+            <a:off x="820000" y="2030000"/>
+            <a:ext cx="4916000" cy="595000"/>
           </a:xfrm>
           <a:prstGeom prst="rect">
             <a:avLst/>
@@ -10826,18 +11079,18 @@
           <a:p>
             <a:pPr algn="l" marL="0" indent="0">
               <a:lnSpc>
-                <a:spcPct val="118000"/>
-              </a:lnSpc>
-              <a:spcBef>
-                <a:spcPts val="0"/>
-              </a:spcBef>
-              <a:spcAft>
-                <a:spcPts val="0"/>
-              </a:spcAft>
-              <a:buNone/>
-            </a:pPr>
-            <a:r>
-              <a:rPr sz="1100" b="0" i="0">
+                <a:spcPct val="112000"/>
+              </a:lnSpc>
+              <a:spcBef>
+                <a:spcPts val="0"/>
+              </a:spcBef>
+              <a:spcAft>
+                <a:spcPts val="0"/>
+              </a:spcAft>
+              <a:buNone/>
+            </a:pPr>
+            <a:r>
+              <a:rPr sz="1000" b="0" i="0">
                 <a:solidFill>
                   <a:srgbClr val="BDC9DB"/>
                 </a:solidFill>
@@ -10856,8 +11109,8 @@
         </p:nvSpPr>
         <p:spPr>
           <a:xfrm>
-            <a:off x="6256000" y="2138000"/>
-            <a:ext cx="5316000" cy="1332000"/>
+            <a:off x="6256000" y="1470000"/>
+            <a:ext cx="5316000" cy="1215000"/>
           </a:xfrm>
           <a:prstGeom prst="roundRect">
             <a:avLst>
@@ -10906,7 +11159,7 @@
         </p:nvSpPr>
         <p:spPr>
           <a:xfrm>
-            <a:off x="6280000" y="2138000"/>
+            <a:off x="6280000" y="1470000"/>
             <a:ext cx="5268000" cy="46000"/>
           </a:xfrm>
           <a:prstGeom prst="rect">
@@ -10952,7 +11205,7 @@
         </p:nvSpPr>
         <p:spPr>
           <a:xfrm>
-            <a:off x="6486000" y="2388000"/>
+            <a:off x="6456000" y="1690000"/>
             <a:ext cx="300000" cy="300000"/>
           </a:xfrm>
           <a:prstGeom prst="ellipse">
@@ -11026,7 +11279,7 @@
         </p:blipFill>
         <p:spPr>
           <a:xfrm>
-            <a:off x="11012000" y="2374000"/>
+            <a:off x="11042000" y="1676000"/>
             <a:ext cx="330000" cy="330000"/>
           </a:xfrm>
           <a:prstGeom prst="rect">
@@ -11042,8 +11295,8 @@
         </p:nvSpPr>
         <p:spPr>
           <a:xfrm>
-            <a:off x="6896000" y="2368000"/>
-            <a:ext cx="4256000" cy="340000"/>
+            <a:off x="6866000" y="1670000"/>
+            <a:ext cx="4286000" cy="340000"/>
           </a:xfrm>
           <a:prstGeom prst="rect">
             <a:avLst/>
@@ -11088,8 +11341,8 @@
         </p:nvSpPr>
         <p:spPr>
           <a:xfrm>
-            <a:off x="6486000" y="2788000"/>
-            <a:ext cx="4856000" cy="602000"/>
+            <a:off x="6456000" y="2030000"/>
+            <a:ext cx="4916000" cy="595000"/>
           </a:xfrm>
           <a:prstGeom prst="rect">
             <a:avLst/>
@@ -11104,18 +11357,18 @@
           <a:p>
             <a:pPr algn="l" marL="0" indent="0">
               <a:lnSpc>
-                <a:spcPct val="118000"/>
-              </a:lnSpc>
-              <a:spcBef>
-                <a:spcPts val="0"/>
-              </a:spcBef>
-              <a:spcAft>
-                <a:spcPts val="0"/>
-              </a:spcAft>
-              <a:buNone/>
-            </a:pPr>
-            <a:r>
-              <a:rPr sz="1100" b="0" i="0">
+                <a:spcPct val="112000"/>
+              </a:lnSpc>
+              <a:spcBef>
+                <a:spcPts val="0"/>
+              </a:spcBef>
+              <a:spcAft>
+                <a:spcPts val="0"/>
+              </a:spcAft>
+              <a:buNone/>
+            </a:pPr>
+            <a:r>
+              <a:rPr sz="1000" b="0" i="0">
                 <a:solidFill>
                   <a:srgbClr val="BDC9DB"/>
                 </a:solidFill>
@@ -11134,8 +11387,8 @@
         </p:nvSpPr>
         <p:spPr>
           <a:xfrm>
-            <a:off x="620000" y="3710000"/>
-            <a:ext cx="5316000" cy="1332000"/>
+            <a:off x="620000" y="2925000"/>
+            <a:ext cx="5316000" cy="1215000"/>
           </a:xfrm>
           <a:prstGeom prst="roundRect">
             <a:avLst>
@@ -11184,7 +11437,7 @@
         </p:nvSpPr>
         <p:spPr>
           <a:xfrm>
-            <a:off x="644000" y="3710000"/>
+            <a:off x="644000" y="2925000"/>
             <a:ext cx="5268000" cy="46000"/>
           </a:xfrm>
           <a:prstGeom prst="rect">
@@ -11230,7 +11483,7 @@
         </p:nvSpPr>
         <p:spPr>
           <a:xfrm>
-            <a:off x="850000" y="3960000"/>
+            <a:off x="820000" y="3145000"/>
             <a:ext cx="300000" cy="300000"/>
           </a:xfrm>
           <a:prstGeom prst="ellipse">
@@ -11304,7 +11557,7 @@
         </p:blipFill>
         <p:spPr>
           <a:xfrm>
-            <a:off x="5376000" y="3946000"/>
+            <a:off x="5406000" y="3131000"/>
             <a:ext cx="330000" cy="330000"/>
           </a:xfrm>
           <a:prstGeom prst="rect">
@@ -11320,8 +11573,8 @@
         </p:nvSpPr>
         <p:spPr>
           <a:xfrm>
-            <a:off x="1260000" y="3940000"/>
-            <a:ext cx="4256000" cy="340000"/>
+            <a:off x="1230000" y="3125000"/>
+            <a:ext cx="4286000" cy="340000"/>
           </a:xfrm>
           <a:prstGeom prst="rect">
             <a:avLst/>
@@ -11366,8 +11619,8 @@
         </p:nvSpPr>
         <p:spPr>
           <a:xfrm>
-            <a:off x="850000" y="4360000"/>
-            <a:ext cx="4856000" cy="602000"/>
+            <a:off x="820000" y="3485000"/>
+            <a:ext cx="4916000" cy="595000"/>
           </a:xfrm>
           <a:prstGeom prst="rect">
             <a:avLst/>
@@ -11382,18 +11635,18 @@
           <a:p>
             <a:pPr algn="l" marL="0" indent="0">
               <a:lnSpc>
-                <a:spcPct val="118000"/>
-              </a:lnSpc>
-              <a:spcBef>
-                <a:spcPts val="0"/>
-              </a:spcBef>
-              <a:spcAft>
-                <a:spcPts val="0"/>
-              </a:spcAft>
-              <a:buNone/>
-            </a:pPr>
-            <a:r>
-              <a:rPr sz="1100" b="0" i="0">
+                <a:spcPct val="112000"/>
+              </a:lnSpc>
+              <a:spcBef>
+                <a:spcPts val="0"/>
+              </a:spcBef>
+              <a:spcAft>
+                <a:spcPts val="0"/>
+              </a:spcAft>
+              <a:buNone/>
+            </a:pPr>
+            <a:r>
+              <a:rPr sz="1000" b="0" i="0">
                 <a:solidFill>
                   <a:srgbClr val="BDC9DB"/>
                 </a:solidFill>
@@ -11412,8 +11665,8 @@
         </p:nvSpPr>
         <p:spPr>
           <a:xfrm>
-            <a:off x="6256000" y="3710000"/>
-            <a:ext cx="5316000" cy="1332000"/>
+            <a:off x="6256000" y="2925000"/>
+            <a:ext cx="5316000" cy="1215000"/>
           </a:xfrm>
           <a:prstGeom prst="roundRect">
             <a:avLst>
@@ -11462,7 +11715,7 @@
         </p:nvSpPr>
         <p:spPr>
           <a:xfrm>
-            <a:off x="6280000" y="3710000"/>
+            <a:off x="6280000" y="2925000"/>
             <a:ext cx="5268000" cy="46000"/>
           </a:xfrm>
           <a:prstGeom prst="rect">
@@ -11508,7 +11761,7 @@
         </p:nvSpPr>
         <p:spPr>
           <a:xfrm>
-            <a:off x="6486000" y="3960000"/>
+            <a:off x="6456000" y="3145000"/>
             <a:ext cx="300000" cy="300000"/>
           </a:xfrm>
           <a:prstGeom prst="ellipse">
@@ -11582,7 +11835,7 @@
         </p:blipFill>
         <p:spPr>
           <a:xfrm>
-            <a:off x="11012000" y="3946000"/>
+            <a:off x="11042000" y="3131000"/>
             <a:ext cx="330000" cy="330000"/>
           </a:xfrm>
           <a:prstGeom prst="rect">
@@ -11598,8 +11851,8 @@
         </p:nvSpPr>
         <p:spPr>
           <a:xfrm>
-            <a:off x="6896000" y="3940000"/>
-            <a:ext cx="4256000" cy="340000"/>
+            <a:off x="6866000" y="3125000"/>
+            <a:ext cx="4286000" cy="340000"/>
           </a:xfrm>
           <a:prstGeom prst="rect">
             <a:avLst/>
@@ -11644,8 +11897,8 @@
         </p:nvSpPr>
         <p:spPr>
           <a:xfrm>
-            <a:off x="6486000" y="4360000"/>
-            <a:ext cx="4856000" cy="602000"/>
+            <a:off x="6456000" y="3485000"/>
+            <a:ext cx="4916000" cy="595000"/>
           </a:xfrm>
           <a:prstGeom prst="rect">
             <a:avLst/>
@@ -11660,18 +11913,18 @@
           <a:p>
             <a:pPr algn="l" marL="0" indent="0">
               <a:lnSpc>
-                <a:spcPct val="118000"/>
-              </a:lnSpc>
-              <a:spcBef>
-                <a:spcPts val="0"/>
-              </a:spcBef>
-              <a:spcAft>
-                <a:spcPts val="0"/>
-              </a:spcAft>
-              <a:buNone/>
-            </a:pPr>
-            <a:r>
-              <a:rPr sz="1100" b="0" i="0">
+                <a:spcPct val="112000"/>
+              </a:lnSpc>
+              <a:spcBef>
+                <a:spcPts val="0"/>
+              </a:spcBef>
+              <a:spcAft>
+                <a:spcPts val="0"/>
+              </a:spcAft>
+              <a:buNone/>
+            </a:pPr>
+            <a:r>
+              <a:rPr sz="1000" b="0" i="0">
                 <a:solidFill>
                   <a:srgbClr val="BDC9DB"/>
                 </a:solidFill>
@@ -11690,12 +11943,12 @@
         </p:nvSpPr>
         <p:spPr>
           <a:xfrm>
-            <a:off x="620000" y="5860000"/>
-            <a:ext cx="10952000" cy="470000"/>
+            <a:off x="620000" y="4310000"/>
+            <a:ext cx="10952000" cy="2000000"/>
           </a:xfrm>
           <a:prstGeom prst="roundRect">
             <a:avLst>
-              <a:gd name="adj" fmla="val 10000"/>
+              <a:gd name="adj" fmla="val 4500"/>
             </a:avLst>
           </a:prstGeom>
           <a:solidFill>
@@ -11740,8 +11993,8 @@
         </p:nvSpPr>
         <p:spPr>
           <a:xfrm>
-            <a:off x="650000" y="5884000"/>
-            <a:ext cx="40000" cy="422000"/>
+            <a:off x="646000" y="4332000"/>
+            <a:ext cx="40000" cy="1956000"/>
           </a:xfrm>
           <a:prstGeom prst="rect">
             <a:avLst/>
@@ -11786,8 +12039,8 @@
         </p:nvSpPr>
         <p:spPr>
           <a:xfrm>
-            <a:off x="860000" y="5860000"/>
-            <a:ext cx="10482000" cy="470000"/>
+            <a:off x="860000" y="4440000"/>
+            <a:ext cx="10522000" cy="1740000"/>
           </a:xfrm>
           <a:prstGeom prst="rect">
             <a:avLst/>
@@ -11795,31 +12048,100 @@
           <a:noFill/>
         </p:spPr>
         <p:txBody>
-          <a:bodyPr wrap="square" anchor="ctr" lIns="0" rIns="0" tIns="0" bIns="0">
+          <a:bodyPr wrap="square" anchor="t" lIns="0" rIns="0" tIns="0" bIns="0">
             <a:noAutofit/>
           </a:bodyPr>
           <a:lstStyle/>
           <a:p>
             <a:pPr algn="l" marL="0" indent="0">
               <a:lnSpc>
-                <a:spcPct val="116000"/>
-              </a:lnSpc>
-              <a:spcBef>
-                <a:spcPts val="0"/>
-              </a:spcBef>
-              <a:spcAft>
-                <a:spcPts val="0"/>
-              </a:spcAft>
-              <a:buNone/>
-            </a:pPr>
-            <a:r>
-              <a:rPr sz="1100" b="0" i="1">
+                <a:spcPct val="100000"/>
+              </a:lnSpc>
+              <a:spcBef>
+                <a:spcPts val="0"/>
+              </a:spcBef>
+              <a:spcAft>
+                <a:spcPts val="600"/>
+              </a:spcAft>
+              <a:buNone/>
+            </a:pPr>
+            <a:r>
+              <a:rPr sz="900" b="1" i="0" spc="200">
+                <a:solidFill>
+                  <a:srgbClr val="326CE5"/>
+                </a:solidFill>
+                <a:latin typeface="Segoe UI Semibold"/>
+              </a:rPr>
+              <a:t>TEORÍA</a:t>
+            </a:r>
+          </a:p>
+          <a:p>
+            <a:pPr algn="l" marL="0" indent="0">
+              <a:lnSpc>
+                <a:spcPct val="128000"/>
+              </a:lnSpc>
+              <a:spcBef>
+                <a:spcPts val="0"/>
+              </a:spcBef>
+              <a:spcAft>
+                <a:spcPts val="400"/>
+              </a:spcAft>
+              <a:buNone/>
+            </a:pPr>
+            <a:r>
+              <a:rPr sz="950" b="0" i="0">
                 <a:solidFill>
                   <a:srgbClr val="BDC9DB"/>
                 </a:solidFill>
                 <a:latin typeface="Segoe UI"/>
               </a:rPr>
-              <a:t>Los PVC creados por volumeClaimTemplates NO se borran al reducir réplicas ni al eliminar el StatefulSet. Es deliberado: son datos.</a:t>
+              <a:t>Un StatefulSet da cuatro garantías que un Deployment no puede ofrecer. Nombre estable: las réplicas se llaman &lt;sts&gt;-0, &lt;sts&gt;-1… sin hash, y si un Pod muere, el que lo sustituye recupera exactamente el mismo nombre. Orden garantizado: &lt;sts&gt;-1 no arranca hasta que &lt;sts&gt;-0 está Ready, y al reducir réplicas se retiran en orden inverso.</a:t>
+            </a:r>
+          </a:p>
+          <a:p>
+            <a:pPr algn="l" marL="0" indent="0">
+              <a:lnSpc>
+                <a:spcPct val="128000"/>
+              </a:lnSpc>
+              <a:spcBef>
+                <a:spcPts val="0"/>
+              </a:spcBef>
+              <a:spcAft>
+                <a:spcPts val="400"/>
+              </a:spcAft>
+              <a:buNone/>
+            </a:pPr>
+            <a:r>
+              <a:rPr sz="950" b="0" i="0">
+                <a:solidFill>
+                  <a:srgbClr val="BDC9DB"/>
+                </a:solidFill>
+                <a:latin typeface="Segoe UI"/>
+              </a:rPr>
+              <a:t>Volumen propio: volumeClaimTemplates crea un PVC independiente por réplica (www-&lt;sts&gt;-0, www-&lt;sts&gt;-1…), de modo que cada Pod tiene su propio disco y nunca lo comparten. DNS por Pod: junto a un Headless Service (clusterIP: None), cada réplica es resoluble por &lt;sts&gt;-0.&lt;svc&gt;.&lt;ns&gt;.svc.cluster.local, lo que permite dirigirse a una instancia concreta.</a:t>
+            </a:r>
+          </a:p>
+          <a:p>
+            <a:pPr algn="l" marL="0" indent="0">
+              <a:lnSpc>
+                <a:spcPct val="128000"/>
+              </a:lnSpc>
+              <a:spcBef>
+                <a:spcPts val="0"/>
+              </a:spcBef>
+              <a:spcAft>
+                <a:spcPts val="400"/>
+              </a:spcAft>
+              <a:buNone/>
+            </a:pPr>
+            <a:r>
+              <a:rPr sz="950" b="0" i="0">
+                <a:solidFill>
+                  <a:srgbClr val="BDC9DB"/>
+                </a:solidFill>
+                <a:latin typeface="Segoe UI"/>
+              </a:rPr>
+              <a:t>Un punto crítico de operación: los PVC creados por volumeClaimTemplates NO se borran al reducir réplicas ni al eliminar el StatefulSet. Es deliberado —son datos— y significa que recrear el StatefulSet reengancha los volúmenes existentes. El enlace que más se equivoca es serviceName, que debe coincidir con el nombre del Headless Service o el DNS por Pod no se crea, sin ningún error visible.</a:t>
             </a:r>
           </a:p>
         </p:txBody>
@@ -14854,7 +15176,7 @@
         <p:spPr>
           <a:xfrm>
             <a:off x="620000" y="1710000"/>
-            <a:ext cx="3510666" cy="680000"/>
+            <a:ext cx="3510666" cy="660000"/>
           </a:xfrm>
           <a:prstGeom prst="roundRect">
             <a:avLst>
@@ -14904,7 +15226,7 @@
         <p:spPr>
           <a:xfrm>
             <a:off x="690000" y="1710000"/>
-            <a:ext cx="3370666" cy="680000"/>
+            <a:ext cx="3370666" cy="660000"/>
           </a:xfrm>
           <a:prstGeom prst="rect">
             <a:avLst/>
@@ -14949,7 +15271,7 @@
         </p:nvCxnSpPr>
         <p:spPr>
           <a:xfrm>
-            <a:off x="4154666" y="2050000"/>
+            <a:off x="4154666" y="2040000"/>
             <a:ext cx="162000" cy="0"/>
           </a:xfrm>
           <a:prstGeom prst="line">
@@ -14987,7 +15309,7 @@
         <p:spPr>
           <a:xfrm>
             <a:off x="4340666" y="1710000"/>
-            <a:ext cx="3510666" cy="680000"/>
+            <a:ext cx="3510666" cy="660000"/>
           </a:xfrm>
           <a:prstGeom prst="roundRect">
             <a:avLst>
@@ -15037,7 +15359,7 @@
         <p:spPr>
           <a:xfrm>
             <a:off x="4410666" y="1710000"/>
-            <a:ext cx="3370666" cy="680000"/>
+            <a:ext cx="3370666" cy="660000"/>
           </a:xfrm>
           <a:prstGeom prst="rect">
             <a:avLst/>
@@ -15082,7 +15404,7 @@
         </p:nvCxnSpPr>
         <p:spPr>
           <a:xfrm>
-            <a:off x="7875333" y="2050000"/>
+            <a:off x="7875333" y="2040000"/>
             <a:ext cx="162000" cy="0"/>
           </a:xfrm>
           <a:prstGeom prst="line">
@@ -15120,7 +15442,7 @@
         <p:spPr>
           <a:xfrm>
             <a:off x="8061333" y="1710000"/>
-            <a:ext cx="3510666" cy="680000"/>
+            <a:ext cx="3510666" cy="660000"/>
           </a:xfrm>
           <a:prstGeom prst="roundRect">
             <a:avLst>
@@ -15170,7 +15492,7 @@
         <p:spPr>
           <a:xfrm>
             <a:off x="8131333" y="1710000"/>
-            <a:ext cx="3370666" cy="680000"/>
+            <a:ext cx="3370666" cy="660000"/>
           </a:xfrm>
           <a:prstGeom prst="rect">
             <a:avLst/>
@@ -15215,7 +15537,7 @@
         </p:nvCxnSpPr>
         <p:spPr>
           <a:xfrm>
-            <a:off x="9816666" y="2416000"/>
+            <a:off x="9816666" y="2396000"/>
             <a:ext cx="0" cy="208000"/>
           </a:xfrm>
           <a:prstGeom prst="line">
@@ -15252,8 +15574,8 @@
         </p:nvSpPr>
         <p:spPr>
           <a:xfrm>
-            <a:off x="620000" y="2650000"/>
-            <a:ext cx="3510666" cy="680000"/>
+            <a:off x="620000" y="2630000"/>
+            <a:ext cx="3510666" cy="660000"/>
           </a:xfrm>
           <a:prstGeom prst="roundRect">
             <a:avLst>
@@ -15302,8 +15624,8 @@
         </p:nvSpPr>
         <p:spPr>
           <a:xfrm>
-            <a:off x="690000" y="2650000"/>
-            <a:ext cx="3370666" cy="680000"/>
+            <a:off x="690000" y="2630000"/>
+            <a:ext cx="3370666" cy="660000"/>
           </a:xfrm>
           <a:prstGeom prst="rect">
             <a:avLst/>
@@ -15348,7 +15670,7 @@
         </p:nvCxnSpPr>
         <p:spPr>
           <a:xfrm>
-            <a:off x="4154666" y="2990000"/>
+            <a:off x="4154666" y="2960000"/>
             <a:ext cx="162000" cy="0"/>
           </a:xfrm>
           <a:prstGeom prst="line">
@@ -15385,8 +15707,8 @@
         </p:nvSpPr>
         <p:spPr>
           <a:xfrm>
-            <a:off x="4340666" y="2650000"/>
-            <a:ext cx="3510666" cy="680000"/>
+            <a:off x="4340666" y="2630000"/>
+            <a:ext cx="3510666" cy="660000"/>
           </a:xfrm>
           <a:prstGeom prst="roundRect">
             <a:avLst>
@@ -15435,8 +15757,8 @@
         </p:nvSpPr>
         <p:spPr>
           <a:xfrm>
-            <a:off x="4410666" y="2650000"/>
-            <a:ext cx="3370666" cy="680000"/>
+            <a:off x="4410666" y="2630000"/>
+            <a:ext cx="3370666" cy="660000"/>
           </a:xfrm>
           <a:prstGeom prst="rect">
             <a:avLst/>
@@ -15481,7 +15803,7 @@
         </p:nvCxnSpPr>
         <p:spPr>
           <a:xfrm>
-            <a:off x="7875333" y="2990000"/>
+            <a:off x="7875333" y="2960000"/>
             <a:ext cx="162000" cy="0"/>
           </a:xfrm>
           <a:prstGeom prst="line">
@@ -15518,8 +15840,8 @@
         </p:nvSpPr>
         <p:spPr>
           <a:xfrm>
-            <a:off x="8061333" y="2650000"/>
-            <a:ext cx="3510666" cy="680000"/>
+            <a:off x="8061333" y="2630000"/>
+            <a:ext cx="3510666" cy="660000"/>
           </a:xfrm>
           <a:prstGeom prst="roundRect">
             <a:avLst>
@@ -15568,8 +15890,8 @@
         </p:nvSpPr>
         <p:spPr>
           <a:xfrm>
-            <a:off x="8131333" y="2650000"/>
-            <a:ext cx="3370666" cy="680000"/>
+            <a:off x="8131333" y="2630000"/>
+            <a:ext cx="3370666" cy="660000"/>
           </a:xfrm>
           <a:prstGeom prst="rect">
             <a:avLst/>
@@ -15614,7 +15936,7 @@
         </p:nvSpPr>
         <p:spPr>
           <a:xfrm>
-            <a:off x="620000" y="3690000"/>
+            <a:off x="620000" y="3650000"/>
             <a:ext cx="10952000" cy="2320000"/>
           </a:xfrm>
           <a:prstGeom prst="roundRect">
@@ -15664,7 +15986,7 @@
         </p:nvSpPr>
         <p:spPr>
           <a:xfrm>
-            <a:off x="650000" y="3714000"/>
+            <a:off x="650000" y="3674000"/>
             <a:ext cx="40000" cy="2272000"/>
           </a:xfrm>
           <a:prstGeom prst="rect">
@@ -15710,7 +16032,7 @@
         </p:nvSpPr>
         <p:spPr>
           <a:xfrm>
-            <a:off x="880000" y="3930000"/>
+            <a:off x="880000" y="3890000"/>
             <a:ext cx="10432000" cy="1920000"/>
           </a:xfrm>
           <a:prstGeom prst="rect">
@@ -24070,8 +24392,8 @@
         </p:nvSpPr>
         <p:spPr>
           <a:xfrm>
-            <a:off x="620000" y="1830000"/>
-            <a:ext cx="3510666" cy="760000"/>
+            <a:off x="620000" y="1670000"/>
+            <a:ext cx="3510666" cy="700000"/>
           </a:xfrm>
           <a:prstGeom prst="roundRect">
             <a:avLst>
@@ -24120,8 +24442,8 @@
         </p:nvSpPr>
         <p:spPr>
           <a:xfrm>
-            <a:off x="690000" y="1830000"/>
-            <a:ext cx="3370666" cy="760000"/>
+            <a:off x="690000" y="1670000"/>
+            <a:ext cx="3370666" cy="700000"/>
           </a:xfrm>
           <a:prstGeom prst="rect">
             <a:avLst/>
@@ -24166,7 +24488,7 @@
         </p:nvCxnSpPr>
         <p:spPr>
           <a:xfrm>
-            <a:off x="4154666" y="2210000"/>
+            <a:off x="4154666" y="2020000"/>
             <a:ext cx="162000" cy="0"/>
           </a:xfrm>
           <a:prstGeom prst="line">
@@ -24203,8 +24525,8 @@
         </p:nvSpPr>
         <p:spPr>
           <a:xfrm>
-            <a:off x="4340666" y="1830000"/>
-            <a:ext cx="3510666" cy="760000"/>
+            <a:off x="4340666" y="1670000"/>
+            <a:ext cx="3510666" cy="700000"/>
           </a:xfrm>
           <a:prstGeom prst="roundRect">
             <a:avLst>
@@ -24253,8 +24575,8 @@
         </p:nvSpPr>
         <p:spPr>
           <a:xfrm>
-            <a:off x="4410666" y="1830000"/>
-            <a:ext cx="3370666" cy="760000"/>
+            <a:off x="4410666" y="1670000"/>
+            <a:ext cx="3370666" cy="700000"/>
           </a:xfrm>
           <a:prstGeom prst="rect">
             <a:avLst/>
@@ -24299,7 +24621,7 @@
         </p:nvCxnSpPr>
         <p:spPr>
           <a:xfrm>
-            <a:off x="7875333" y="2210000"/>
+            <a:off x="7875333" y="2020000"/>
             <a:ext cx="162000" cy="0"/>
           </a:xfrm>
           <a:prstGeom prst="line">
@@ -24336,8 +24658,8 @@
         </p:nvSpPr>
         <p:spPr>
           <a:xfrm>
-            <a:off x="8061333" y="1830000"/>
-            <a:ext cx="3510666" cy="760000"/>
+            <a:off x="8061333" y="1670000"/>
+            <a:ext cx="3510666" cy="700000"/>
           </a:xfrm>
           <a:prstGeom prst="roundRect">
             <a:avLst>
@@ -24386,8 +24708,8 @@
         </p:nvSpPr>
         <p:spPr>
           <a:xfrm>
-            <a:off x="8131333" y="1830000"/>
-            <a:ext cx="3370666" cy="760000"/>
+            <a:off x="8131333" y="1670000"/>
+            <a:ext cx="3370666" cy="700000"/>
           </a:xfrm>
           <a:prstGeom prst="rect">
             <a:avLst/>
@@ -24432,12 +24754,12 @@
         </p:nvSpPr>
         <p:spPr>
           <a:xfrm>
-            <a:off x="620000" y="2950000"/>
-            <a:ext cx="10952000" cy="2070000"/>
+            <a:off x="620000" y="2670000"/>
+            <a:ext cx="10952000" cy="3610000"/>
           </a:xfrm>
           <a:prstGeom prst="roundRect">
             <a:avLst>
-              <a:gd name="adj" fmla="val 6000"/>
+              <a:gd name="adj" fmla="val 4500"/>
             </a:avLst>
           </a:prstGeom>
           <a:solidFill>
@@ -24482,8 +24804,8 @@
         </p:nvSpPr>
         <p:spPr>
           <a:xfrm>
-            <a:off x="650000" y="2974000"/>
-            <a:ext cx="40000" cy="2022000"/>
+            <a:off x="646000" y="2692000"/>
+            <a:ext cx="40000" cy="3566000"/>
           </a:xfrm>
           <a:prstGeom prst="rect">
             <a:avLst/>
@@ -24528,8 +24850,8 @@
         </p:nvSpPr>
         <p:spPr>
           <a:xfrm>
-            <a:off x="880000" y="3190000"/>
-            <a:ext cx="10432000" cy="1670000"/>
+            <a:off x="860000" y="2800000"/>
+            <a:ext cx="10522000" cy="3350000"/>
           </a:xfrm>
           <a:prstGeom prst="rect">
             <a:avLst/>
@@ -24550,14 +24872,14 @@
                 <a:spcPts val="0"/>
               </a:spcBef>
               <a:spcAft>
-                <a:spcPts val="1200"/>
-              </a:spcAft>
-              <a:buNone/>
-            </a:pPr>
-            <a:r>
-              <a:rPr sz="1000" b="1" i="0" spc="180">
-                <a:solidFill>
-                  <a:srgbClr val="74A6FF"/>
+                <a:spcPts val="600"/>
+              </a:spcAft>
+              <a:buNone/>
+            </a:pPr>
+            <a:r>
+              <a:rPr sz="900" b="1" i="0" spc="200">
+                <a:solidFill>
+                  <a:srgbClr val="326CE5"/>
                 </a:solidFill>
                 <a:latin typeface="Segoe UI Semibold"/>
               </a:rPr>
@@ -24565,18 +24887,17 @@
             </a:r>
           </a:p>
           <a:p>
-            <a:pPr algn="l" marL="182880" indent="-182880">
-              <a:lnSpc>
-                <a:spcPct val="120000"/>
-              </a:lnSpc>
-              <a:spcBef>
-                <a:spcPts val="0"/>
-              </a:spcBef>
-              <a:spcAft>
-                <a:spcPts val="700"/>
-              </a:spcAft>
-              <a:buFont typeface="Arial"/>
-              <a:buChar char="•"/>
+            <a:pPr algn="l" marL="0" indent="0">
+              <a:lnSpc>
+                <a:spcPct val="128000"/>
+              </a:lnSpc>
+              <a:spcBef>
+                <a:spcPts val="0"/>
+              </a:spcBef>
+              <a:spcAft>
+                <a:spcPts val="400"/>
+              </a:spcAft>
+              <a:buNone/>
             </a:pPr>
             <a:r>
               <a:rPr sz="1100" b="0" i="0">
@@ -24585,22 +24906,21 @@
                 </a:solidFill>
                 <a:latin typeface="Segoe UI"/>
               </a:rPr>
-              <a:t>El Deployment gestiona VERSIONES: cada cambio en spec.template crea un ReplicaSet nuevo.</a:t>
-            </a:r>
-          </a:p>
-          <a:p>
-            <a:pPr algn="l" marL="182880" indent="-182880">
-              <a:lnSpc>
-                <a:spcPct val="120000"/>
-              </a:lnSpc>
-              <a:spcBef>
-                <a:spcPts val="0"/>
-              </a:spcBef>
-              <a:spcAft>
-                <a:spcPts val="700"/>
-              </a:spcAft>
-              <a:buFont typeface="Arial"/>
-              <a:buChar char="•"/>
+              <a:t>La cadena Deployment → ReplicaSet → Pod separa dos responsabilidades. El ReplicaSet gestiona CANTIDAD: cuenta cuántos Pods casan con su selector y crea o borra hasta llegar a spec.replicas. Es lo que da el self-healing: si borras un Pod, el ReplicaSet lo repone en segundos. Pero un ReplicaSet no sabe hacer rolling update; cambiarle la imagen solo afecta a los Pods que cree a partir de ese momento.</a:t>
+            </a:r>
+          </a:p>
+          <a:p>
+            <a:pPr algn="l" marL="0" indent="0">
+              <a:lnSpc>
+                <a:spcPct val="128000"/>
+              </a:lnSpc>
+              <a:spcBef>
+                <a:spcPts val="0"/>
+              </a:spcBef>
+              <a:spcAft>
+                <a:spcPts val="400"/>
+              </a:spcAft>
+              <a:buNone/>
             </a:pPr>
             <a:r>
               <a:rPr sz="1100" b="0" i="0">
@@ -24609,19 +24929,19 @@
                 </a:solidFill>
                 <a:latin typeface="Segoe UI"/>
               </a:rPr>
-              <a:t>El ReplicaSet gestiona CANTIDAD: cuenta los Pods que casan con su selector y ajusta.</a:t>
+              <a:t>El Deployment gestiona VERSIONES: cada vez que cambias spec.template (imagen, variables, recursos) crea un ReplicaSet nuevo y orquesta la transición gradual del viejo al nuevo. El ReplicaSet anterior no se borra, queda a 0 réplicas, y es lo que permite el rollback inmediato.</a:t>
             </a:r>
           </a:p>
           <a:p>
             <a:pPr algn="l" marL="0" indent="0">
               <a:lnSpc>
-                <a:spcPct val="120000"/>
-              </a:lnSpc>
-              <a:spcBef>
-                <a:spcPts val="0"/>
-              </a:spcBef>
-              <a:spcAft>
-                <a:spcPts val="700"/>
+                <a:spcPct val="128000"/>
+              </a:lnSpc>
+              <a:spcBef>
+                <a:spcPts val="0"/>
+              </a:spcBef>
+              <a:spcAft>
+                <a:spcPts val="400"/>
               </a:spcAft>
               <a:buNone/>
             </a:pPr>
@@ -24630,57 +24950,9 @@
                 <a:solidFill>
                   <a:srgbClr val="BDC9DB"/>
                 </a:solidFill>
-                <a:latin typeface="Consolas"/>
-              </a:rPr>
-              <a:t>kubectl scale cambia spec.replicas, no spec.template: no genera un ReplicaSet nuevo.</a:t>
-            </a:r>
-          </a:p>
-          <a:p>
-            <a:pPr algn="l" marL="182880" indent="-182880">
-              <a:lnSpc>
-                <a:spcPct val="120000"/>
-              </a:lnSpc>
-              <a:spcBef>
-                <a:spcPts val="0"/>
-              </a:spcBef>
-              <a:spcAft>
-                <a:spcPts val="700"/>
-              </a:spcAft>
-              <a:buFont typeface="Arial"/>
-              <a:buChar char="•"/>
-            </a:pPr>
-            <a:r>
-              <a:rPr sz="1100" b="0" i="0">
-                <a:solidFill>
-                  <a:srgbClr val="BDC9DB"/>
-                </a:solidFill>
                 <a:latin typeface="Segoe UI"/>
               </a:rPr>
-              <a:t>Un ReplicaSet NO hace rolling update: cambiar su imagen solo afecta a los Pods futuros.</a:t>
-            </a:r>
-          </a:p>
-          <a:p>
-            <a:pPr algn="l" marL="182880" indent="-182880">
-              <a:lnSpc>
-                <a:spcPct val="120000"/>
-              </a:lnSpc>
-              <a:spcBef>
-                <a:spcPts val="0"/>
-              </a:spcBef>
-              <a:spcAft>
-                <a:spcPts val="700"/>
-              </a:spcAft>
-              <a:buFont typeface="Arial"/>
-              <a:buChar char="•"/>
-            </a:pPr>
-            <a:r>
-              <a:rPr sz="1100" b="0" i="0">
-                <a:solidFill>
-                  <a:srgbClr val="BDC9DB"/>
-                </a:solidFill>
-                <a:latin typeface="Segoe UI"/>
-              </a:rPr>
-              <a:t>Compruébalo tú mismo: k get pod &lt;p&gt; -o jsonpath='{.metadata.ownerReferences}'</a:t>
+              <a:t>kubectl scale toca spec.replicas, que vive en el ReplicaSet activo, así que NO genera un ReplicaSet nuevo. Y la pertenencia se puede comprobar en cualquier Pod leyendo metadata.ownerReferences, que apunta a su ReplicaSet, cuyo ownerReferences a su vez apunta al Deployment.</a:t>
             </a:r>
           </a:p>
         </p:txBody>
@@ -24995,8 +25267,8 @@
         </p:nvSpPr>
         <p:spPr>
           <a:xfrm>
-            <a:off x="620000" y="2138000"/>
-            <a:ext cx="5316000" cy="1332000"/>
+            <a:off x="620000" y="1470000"/>
+            <a:ext cx="5316000" cy="1215000"/>
           </a:xfrm>
           <a:prstGeom prst="roundRect">
             <a:avLst>
@@ -25045,7 +25317,7 @@
         </p:nvSpPr>
         <p:spPr>
           <a:xfrm>
-            <a:off x="644000" y="2138000"/>
+            <a:off x="644000" y="1470000"/>
             <a:ext cx="5268000" cy="46000"/>
           </a:xfrm>
           <a:prstGeom prst="rect">
@@ -25091,7 +25363,7 @@
         </p:nvSpPr>
         <p:spPr>
           <a:xfrm>
-            <a:off x="850000" y="2388000"/>
+            <a:off x="820000" y="1690000"/>
             <a:ext cx="300000" cy="300000"/>
           </a:xfrm>
           <a:prstGeom prst="ellipse">
@@ -25165,7 +25437,7 @@
         </p:blipFill>
         <p:spPr>
           <a:xfrm>
-            <a:off x="5376000" y="2374000"/>
+            <a:off x="5406000" y="1676000"/>
             <a:ext cx="330000" cy="330000"/>
           </a:xfrm>
           <a:prstGeom prst="rect">
@@ -25181,8 +25453,8 @@
         </p:nvSpPr>
         <p:spPr>
           <a:xfrm>
-            <a:off x="1260000" y="2368000"/>
-            <a:ext cx="4256000" cy="340000"/>
+            <a:off x="1230000" y="1670000"/>
+            <a:ext cx="4286000" cy="340000"/>
           </a:xfrm>
           <a:prstGeom prst="rect">
             <a:avLst/>
@@ -25227,8 +25499,8 @@
         </p:nvSpPr>
         <p:spPr>
           <a:xfrm>
-            <a:off x="850000" y="2788000"/>
-            <a:ext cx="4856000" cy="602000"/>
+            <a:off x="820000" y="2030000"/>
+            <a:ext cx="4916000" cy="595000"/>
           </a:xfrm>
           <a:prstGeom prst="rect">
             <a:avLst/>
@@ -25243,18 +25515,18 @@
           <a:p>
             <a:pPr algn="l" marL="0" indent="0">
               <a:lnSpc>
-                <a:spcPct val="118000"/>
-              </a:lnSpc>
-              <a:spcBef>
-                <a:spcPts val="0"/>
-              </a:spcBef>
-              <a:spcAft>
-                <a:spcPts val="0"/>
-              </a:spcAft>
-              <a:buNone/>
-            </a:pPr>
-            <a:r>
-              <a:rPr sz="1100" b="0" i="0">
+                <a:spcPct val="112000"/>
+              </a:lnSpc>
+              <a:spcBef>
+                <a:spcPts val="0"/>
+              </a:spcBef>
+              <a:spcAft>
+                <a:spcPts val="0"/>
+              </a:spcAft>
+              <a:buNone/>
+            </a:pPr>
+            <a:r>
+              <a:rPr sz="1000" b="0" i="0">
                 <a:solidFill>
                   <a:srgbClr val="BDC9DB"/>
                 </a:solidFill>
@@ -25273,8 +25545,8 @@
         </p:nvSpPr>
         <p:spPr>
           <a:xfrm>
-            <a:off x="6256000" y="2138000"/>
-            <a:ext cx="5316000" cy="1332000"/>
+            <a:off x="6256000" y="1470000"/>
+            <a:ext cx="5316000" cy="1215000"/>
           </a:xfrm>
           <a:prstGeom prst="roundRect">
             <a:avLst>
@@ -25323,7 +25595,7 @@
         </p:nvSpPr>
         <p:spPr>
           <a:xfrm>
-            <a:off x="6280000" y="2138000"/>
+            <a:off x="6280000" y="1470000"/>
             <a:ext cx="5268000" cy="46000"/>
           </a:xfrm>
           <a:prstGeom prst="rect">
@@ -25369,7 +25641,7 @@
         </p:nvSpPr>
         <p:spPr>
           <a:xfrm>
-            <a:off x="6486000" y="2388000"/>
+            <a:off x="6456000" y="1690000"/>
             <a:ext cx="300000" cy="300000"/>
           </a:xfrm>
           <a:prstGeom prst="ellipse">
@@ -25443,7 +25715,7 @@
         </p:blipFill>
         <p:spPr>
           <a:xfrm>
-            <a:off x="11012000" y="2374000"/>
+            <a:off x="11042000" y="1676000"/>
             <a:ext cx="330000" cy="330000"/>
           </a:xfrm>
           <a:prstGeom prst="rect">
@@ -25459,8 +25731,8 @@
         </p:nvSpPr>
         <p:spPr>
           <a:xfrm>
-            <a:off x="6896000" y="2368000"/>
-            <a:ext cx="4256000" cy="340000"/>
+            <a:off x="6866000" y="1670000"/>
+            <a:ext cx="4286000" cy="340000"/>
           </a:xfrm>
           <a:prstGeom prst="rect">
             <a:avLst/>
@@ -25505,8 +25777,8 @@
         </p:nvSpPr>
         <p:spPr>
           <a:xfrm>
-            <a:off x="6486000" y="2788000"/>
-            <a:ext cx="4856000" cy="602000"/>
+            <a:off x="6456000" y="2030000"/>
+            <a:ext cx="4916000" cy="595000"/>
           </a:xfrm>
           <a:prstGeom prst="rect">
             <a:avLst/>
@@ -25521,18 +25793,18 @@
           <a:p>
             <a:pPr algn="l" marL="0" indent="0">
               <a:lnSpc>
-                <a:spcPct val="118000"/>
-              </a:lnSpc>
-              <a:spcBef>
-                <a:spcPts val="0"/>
-              </a:spcBef>
-              <a:spcAft>
-                <a:spcPts val="0"/>
-              </a:spcAft>
-              <a:buNone/>
-            </a:pPr>
-            <a:r>
-              <a:rPr sz="1100" b="0" i="0">
+                <a:spcPct val="112000"/>
+              </a:lnSpc>
+              <a:spcBef>
+                <a:spcPts val="0"/>
+              </a:spcBef>
+              <a:spcAft>
+                <a:spcPts val="0"/>
+              </a:spcAft>
+              <a:buNone/>
+            </a:pPr>
+            <a:r>
+              <a:rPr sz="1000" b="0" i="0">
                 <a:solidFill>
                   <a:srgbClr val="BDC9DB"/>
                 </a:solidFill>
@@ -25551,8 +25823,8 @@
         </p:nvSpPr>
         <p:spPr>
           <a:xfrm>
-            <a:off x="620000" y="3710000"/>
-            <a:ext cx="5316000" cy="1332000"/>
+            <a:off x="620000" y="2925000"/>
+            <a:ext cx="5316000" cy="1215000"/>
           </a:xfrm>
           <a:prstGeom prst="roundRect">
             <a:avLst>
@@ -25601,7 +25873,7 @@
         </p:nvSpPr>
         <p:spPr>
           <a:xfrm>
-            <a:off x="644000" y="3710000"/>
+            <a:off x="644000" y="2925000"/>
             <a:ext cx="5268000" cy="46000"/>
           </a:xfrm>
           <a:prstGeom prst="rect">
@@ -25647,7 +25919,7 @@
         </p:nvSpPr>
         <p:spPr>
           <a:xfrm>
-            <a:off x="850000" y="3960000"/>
+            <a:off x="820000" y="3145000"/>
             <a:ext cx="300000" cy="300000"/>
           </a:xfrm>
           <a:prstGeom prst="ellipse">
@@ -25721,7 +25993,7 @@
         </p:blipFill>
         <p:spPr>
           <a:xfrm>
-            <a:off x="5376000" y="3946000"/>
+            <a:off x="5406000" y="3131000"/>
             <a:ext cx="330000" cy="330000"/>
           </a:xfrm>
           <a:prstGeom prst="rect">
@@ -25737,8 +26009,8 @@
         </p:nvSpPr>
         <p:spPr>
           <a:xfrm>
-            <a:off x="1260000" y="3940000"/>
-            <a:ext cx="4256000" cy="340000"/>
+            <a:off x="1230000" y="3125000"/>
+            <a:ext cx="4286000" cy="340000"/>
           </a:xfrm>
           <a:prstGeom prst="rect">
             <a:avLst/>
@@ -25783,8 +26055,8 @@
         </p:nvSpPr>
         <p:spPr>
           <a:xfrm>
-            <a:off x="850000" y="4360000"/>
-            <a:ext cx="4856000" cy="602000"/>
+            <a:off x="820000" y="3485000"/>
+            <a:ext cx="4916000" cy="595000"/>
           </a:xfrm>
           <a:prstGeom prst="rect">
             <a:avLst/>
@@ -25799,18 +26071,18 @@
           <a:p>
             <a:pPr algn="l" marL="0" indent="0">
               <a:lnSpc>
-                <a:spcPct val="118000"/>
-              </a:lnSpc>
-              <a:spcBef>
-                <a:spcPts val="0"/>
-              </a:spcBef>
-              <a:spcAft>
-                <a:spcPts val="0"/>
-              </a:spcAft>
-              <a:buNone/>
-            </a:pPr>
-            <a:r>
-              <a:rPr sz="1100" b="0" i="0">
+                <a:spcPct val="112000"/>
+              </a:lnSpc>
+              <a:spcBef>
+                <a:spcPts val="0"/>
+              </a:spcBef>
+              <a:spcAft>
+                <a:spcPts val="0"/>
+              </a:spcAft>
+              <a:buNone/>
+            </a:pPr>
+            <a:r>
+              <a:rPr sz="1000" b="0" i="0">
                 <a:solidFill>
                   <a:srgbClr val="BDC9DB"/>
                 </a:solidFill>
@@ -25829,8 +26101,8 @@
         </p:nvSpPr>
         <p:spPr>
           <a:xfrm>
-            <a:off x="6256000" y="3710000"/>
-            <a:ext cx="5316000" cy="1332000"/>
+            <a:off x="6256000" y="2925000"/>
+            <a:ext cx="5316000" cy="1215000"/>
           </a:xfrm>
           <a:prstGeom prst="roundRect">
             <a:avLst>
@@ -25879,7 +26151,7 @@
         </p:nvSpPr>
         <p:spPr>
           <a:xfrm>
-            <a:off x="6280000" y="3710000"/>
+            <a:off x="6280000" y="2925000"/>
             <a:ext cx="5268000" cy="46000"/>
           </a:xfrm>
           <a:prstGeom prst="rect">
@@ -25925,7 +26197,7 @@
         </p:nvSpPr>
         <p:spPr>
           <a:xfrm>
-            <a:off x="6486000" y="3960000"/>
+            <a:off x="6456000" y="3145000"/>
             <a:ext cx="300000" cy="300000"/>
           </a:xfrm>
           <a:prstGeom prst="ellipse">
@@ -25999,7 +26271,7 @@
         </p:blipFill>
         <p:spPr>
           <a:xfrm>
-            <a:off x="11012000" y="3946000"/>
+            <a:off x="11042000" y="3131000"/>
             <a:ext cx="330000" cy="330000"/>
           </a:xfrm>
           <a:prstGeom prst="rect">
@@ -26015,8 +26287,8 @@
         </p:nvSpPr>
         <p:spPr>
           <a:xfrm>
-            <a:off x="6896000" y="3940000"/>
-            <a:ext cx="4256000" cy="340000"/>
+            <a:off x="6866000" y="3125000"/>
+            <a:ext cx="4286000" cy="340000"/>
           </a:xfrm>
           <a:prstGeom prst="rect">
             <a:avLst/>
@@ -26061,8 +26333,8 @@
         </p:nvSpPr>
         <p:spPr>
           <a:xfrm>
-            <a:off x="6486000" y="4360000"/>
-            <a:ext cx="4856000" cy="602000"/>
+            <a:off x="6456000" y="3485000"/>
+            <a:ext cx="4916000" cy="595000"/>
           </a:xfrm>
           <a:prstGeom prst="rect">
             <a:avLst/>
@@ -26077,18 +26349,18 @@
           <a:p>
             <a:pPr algn="l" marL="0" indent="0">
               <a:lnSpc>
-                <a:spcPct val="118000"/>
-              </a:lnSpc>
-              <a:spcBef>
-                <a:spcPts val="0"/>
-              </a:spcBef>
-              <a:spcAft>
-                <a:spcPts val="0"/>
-              </a:spcAft>
-              <a:buNone/>
-            </a:pPr>
-            <a:r>
-              <a:rPr sz="1100" b="0" i="0">
+                <a:spcPct val="112000"/>
+              </a:lnSpc>
+              <a:spcBef>
+                <a:spcPts val="0"/>
+              </a:spcBef>
+              <a:spcAft>
+                <a:spcPts val="0"/>
+              </a:spcAft>
+              <a:buNone/>
+            </a:pPr>
+            <a:r>
+              <a:rPr sz="1000" b="0" i="0">
                 <a:solidFill>
                   <a:srgbClr val="BDC9DB"/>
                 </a:solidFill>
@@ -26107,12 +26379,12 @@
         </p:nvSpPr>
         <p:spPr>
           <a:xfrm>
-            <a:off x="620000" y="5860000"/>
-            <a:ext cx="10952000" cy="470000"/>
+            <a:off x="620000" y="4310000"/>
+            <a:ext cx="10952000" cy="2000000"/>
           </a:xfrm>
           <a:prstGeom prst="roundRect">
             <a:avLst>
-              <a:gd name="adj" fmla="val 10000"/>
+              <a:gd name="adj" fmla="val 4500"/>
             </a:avLst>
           </a:prstGeom>
           <a:solidFill>
@@ -26157,8 +26429,8 @@
         </p:nvSpPr>
         <p:spPr>
           <a:xfrm>
-            <a:off x="650000" y="5884000"/>
-            <a:ext cx="40000" cy="422000"/>
+            <a:off x="646000" y="4332000"/>
+            <a:ext cx="40000" cy="1956000"/>
           </a:xfrm>
           <a:prstGeom prst="rect">
             <a:avLst/>
@@ -26203,8 +26475,8 @@
         </p:nvSpPr>
         <p:spPr>
           <a:xfrm>
-            <a:off x="860000" y="5860000"/>
-            <a:ext cx="10482000" cy="470000"/>
+            <a:off x="860000" y="4440000"/>
+            <a:ext cx="10522000" cy="1740000"/>
           </a:xfrm>
           <a:prstGeom prst="rect">
             <a:avLst/>
@@ -26212,31 +26484,100 @@
           <a:noFill/>
         </p:spPr>
         <p:txBody>
-          <a:bodyPr wrap="square" anchor="ctr" lIns="0" rIns="0" tIns="0" bIns="0">
+          <a:bodyPr wrap="square" anchor="t" lIns="0" rIns="0" tIns="0" bIns="0">
             <a:noAutofit/>
           </a:bodyPr>
           <a:lstStyle/>
           <a:p>
             <a:pPr algn="l" marL="0" indent="0">
               <a:lnSpc>
-                <a:spcPct val="116000"/>
-              </a:lnSpc>
-              <a:spcBef>
-                <a:spcPts val="0"/>
-              </a:spcBef>
-              <a:spcAft>
-                <a:spcPts val="0"/>
-              </a:spcAft>
-              <a:buNone/>
-            </a:pPr>
-            <a:r>
-              <a:rPr sz="1100" b="0" i="1">
+                <a:spcPct val="100000"/>
+              </a:lnSpc>
+              <a:spcBef>
+                <a:spcPts val="0"/>
+              </a:spcBef>
+              <a:spcAft>
+                <a:spcPts val="600"/>
+              </a:spcAft>
+              <a:buNone/>
+            </a:pPr>
+            <a:r>
+              <a:rPr sz="900" b="1" i="0" spc="200">
+                <a:solidFill>
+                  <a:srgbClr val="326CE5"/>
+                </a:solidFill>
+                <a:latin typeface="Segoe UI Semibold"/>
+              </a:rPr>
+              <a:t>TEORÍA</a:t>
+            </a:r>
+          </a:p>
+          <a:p>
+            <a:pPr algn="l" marL="0" indent="0">
+              <a:lnSpc>
+                <a:spcPct val="128000"/>
+              </a:lnSpc>
+              <a:spcBef>
+                <a:spcPts val="0"/>
+              </a:spcBef>
+              <a:spcAft>
+                <a:spcPts val="400"/>
+              </a:spcAft>
+              <a:buNone/>
+            </a:pPr>
+            <a:r>
+              <a:rPr sz="1050" b="0" i="0">
                 <a:solidFill>
                   <a:srgbClr val="BDC9DB"/>
                 </a:solidFill>
                 <a:latin typeface="Segoe UI"/>
               </a:rPr>
-              <a:t>Un Pod suelto no se autorrepara. Si te importa que siga existiendo, ponle un controlador detrás.</a:t>
+              <a:t>El controlador elegido codifica las garantías que necesita la carga. El Deployment es para cargas stateless: réplicas intercambiables con nombre aleatorio (hash), sin orden de arranque, con rolling update y rollback. Es la opción por defecto para cualquier aplicación web o API.</a:t>
+            </a:r>
+          </a:p>
+          <a:p>
+            <a:pPr algn="l" marL="0" indent="0">
+              <a:lnSpc>
+                <a:spcPct val="128000"/>
+              </a:lnSpc>
+              <a:spcBef>
+                <a:spcPts val="0"/>
+              </a:spcBef>
+              <a:spcAft>
+                <a:spcPts val="400"/>
+              </a:spcAft>
+              <a:buNone/>
+            </a:pPr>
+            <a:r>
+              <a:rPr sz="1050" b="0" i="0">
+                <a:solidFill>
+                  <a:srgbClr val="BDC9DB"/>
+                </a:solidFill>
+                <a:latin typeface="Segoe UI"/>
+              </a:rPr>
+              <a:t>El StatefulSet es para cargas con estado que necesitan identidad: nombre estable y predecible (web-0, web-1…), arranque y parada en orden, y un volumen persistente propio por réplica creado mediante volumeClaimTemplates. Bases de datos, colas y clusters de consenso.</a:t>
+            </a:r>
+          </a:p>
+          <a:p>
+            <a:pPr algn="l" marL="0" indent="0">
+              <a:lnSpc>
+                <a:spcPct val="128000"/>
+              </a:lnSpc>
+              <a:spcBef>
+                <a:spcPts val="0"/>
+              </a:spcBef>
+              <a:spcAft>
+                <a:spcPts val="400"/>
+              </a:spcAft>
+              <a:buNone/>
+            </a:pPr>
+            <a:r>
+              <a:rPr sz="1050" b="0" i="0">
+                <a:solidFill>
+                  <a:srgbClr val="BDC9DB"/>
+                </a:solidFill>
+                <a:latin typeface="Segoe UI"/>
+              </a:rPr>
+              <a:t>El DaemonSet garantiza exactamente un Pod por nodo (agentes de logs, CNI, exporters de métricas); por eso drain necesita --ignore-daemonsets. El ReplicationController es el antecesor del ReplicaSet, solo referencia histórica. Y un Pod suelto no tiene ningún controlador detrás: si te importa que siga existiendo, no lo crees así.</a:t>
             </a:r>
           </a:p>
         </p:txBody>
@@ -28502,7 +28843,7 @@
         </p:nvSpPr>
         <p:spPr>
           <a:xfrm>
-            <a:off x="620000" y="2349000"/>
+            <a:off x="620000" y="1564000"/>
             <a:ext cx="5316000" cy="2482000"/>
           </a:xfrm>
           <a:prstGeom prst="roundRect">
@@ -28552,7 +28893,7 @@
         </p:nvSpPr>
         <p:spPr>
           <a:xfrm>
-            <a:off x="644000" y="2349000"/>
+            <a:off x="644000" y="1564000"/>
             <a:ext cx="5268000" cy="46000"/>
           </a:xfrm>
           <a:prstGeom prst="rect">
@@ -28598,7 +28939,7 @@
         </p:nvSpPr>
         <p:spPr>
           <a:xfrm>
-            <a:off x="880000" y="2609000"/>
+            <a:off x="880000" y="1824000"/>
             <a:ext cx="4796000" cy="570000"/>
           </a:xfrm>
           <a:prstGeom prst="rect">
@@ -28667,7 +29008,7 @@
         </p:nvSpPr>
         <p:spPr>
           <a:xfrm>
-            <a:off x="880000" y="3179000"/>
+            <a:off x="880000" y="2394000"/>
             <a:ext cx="4796000" cy="1472000"/>
           </a:xfrm>
           <a:prstGeom prst="rect">
@@ -28787,7 +29128,7 @@
         </p:nvSpPr>
         <p:spPr>
           <a:xfrm>
-            <a:off x="6256000" y="2349000"/>
+            <a:off x="6256000" y="1564000"/>
             <a:ext cx="5316000" cy="2482000"/>
           </a:xfrm>
           <a:prstGeom prst="roundRect">
@@ -28837,7 +29178,7 @@
         </p:nvSpPr>
         <p:spPr>
           <a:xfrm>
-            <a:off x="6280000" y="2349000"/>
+            <a:off x="6280000" y="1564000"/>
             <a:ext cx="5268000" cy="46000"/>
           </a:xfrm>
           <a:prstGeom prst="rect">
@@ -28883,7 +29224,7 @@
         </p:nvSpPr>
         <p:spPr>
           <a:xfrm>
-            <a:off x="6516000" y="2609000"/>
+            <a:off x="6516000" y="1824000"/>
             <a:ext cx="4796000" cy="570000"/>
           </a:xfrm>
           <a:prstGeom prst="rect">
@@ -28952,7 +29293,7 @@
         </p:nvSpPr>
         <p:spPr>
           <a:xfrm>
-            <a:off x="6516000" y="3179000"/>
+            <a:off x="6516000" y="2394000"/>
             <a:ext cx="4796000" cy="1472000"/>
           </a:xfrm>
           <a:prstGeom prst="rect">
@@ -29072,12 +29413,12 @@
         </p:nvSpPr>
         <p:spPr>
           <a:xfrm>
-            <a:off x="620000" y="5860000"/>
-            <a:ext cx="10952000" cy="470000"/>
+            <a:off x="620000" y="4310000"/>
+            <a:ext cx="10952000" cy="2000000"/>
           </a:xfrm>
           <a:prstGeom prst="roundRect">
             <a:avLst>
-              <a:gd name="adj" fmla="val 10000"/>
+              <a:gd name="adj" fmla="val 4500"/>
             </a:avLst>
           </a:prstGeom>
           <a:solidFill>
@@ -29122,8 +29463,8 @@
         </p:nvSpPr>
         <p:spPr>
           <a:xfrm>
-            <a:off x="650000" y="5884000"/>
-            <a:ext cx="40000" cy="422000"/>
+            <a:off x="646000" y="4332000"/>
+            <a:ext cx="40000" cy="1956000"/>
           </a:xfrm>
           <a:prstGeom prst="rect">
             <a:avLst/>
@@ -29168,8 +29509,8 @@
         </p:nvSpPr>
         <p:spPr>
           <a:xfrm>
-            <a:off x="860000" y="5860000"/>
-            <a:ext cx="10482000" cy="470000"/>
+            <a:off x="860000" y="4440000"/>
+            <a:ext cx="10522000" cy="1740000"/>
           </a:xfrm>
           <a:prstGeom prst="rect">
             <a:avLst/>
@@ -29177,31 +29518,100 @@
           <a:noFill/>
         </p:spPr>
         <p:txBody>
-          <a:bodyPr wrap="square" anchor="ctr" lIns="0" rIns="0" tIns="0" bIns="0">
+          <a:bodyPr wrap="square" anchor="t" lIns="0" rIns="0" tIns="0" bIns="0">
             <a:noAutofit/>
           </a:bodyPr>
           <a:lstStyle/>
           <a:p>
             <a:pPr algn="l" marL="0" indent="0">
               <a:lnSpc>
-                <a:spcPct val="116000"/>
-              </a:lnSpc>
-              <a:spcBef>
-                <a:spcPts val="0"/>
-              </a:spcBef>
-              <a:spcAft>
-                <a:spcPts val="0"/>
-              </a:spcAft>
-              <a:buNone/>
-            </a:pPr>
-            <a:r>
-              <a:rPr sz="1100" b="0" i="1">
+                <a:spcPct val="100000"/>
+              </a:lnSpc>
+              <a:spcBef>
+                <a:spcPts val="0"/>
+              </a:spcBef>
+              <a:spcAft>
+                <a:spcPts val="600"/>
+              </a:spcAft>
+              <a:buNone/>
+            </a:pPr>
+            <a:r>
+              <a:rPr sz="900" b="1" i="0" spc="200">
+                <a:solidFill>
+                  <a:srgbClr val="326CE5"/>
+                </a:solidFill>
+                <a:latin typeface="Segoe UI Semibold"/>
+              </a:rPr>
+              <a:t>TEORÍA</a:t>
+            </a:r>
+          </a:p>
+          <a:p>
+            <a:pPr algn="l" marL="0" indent="0">
+              <a:lnSpc>
+                <a:spcPct val="128000"/>
+              </a:lnSpc>
+              <a:spcBef>
+                <a:spcPts val="0"/>
+              </a:spcBef>
+              <a:spcAft>
+                <a:spcPts val="400"/>
+              </a:spcAft>
+              <a:buNone/>
+            </a:pPr>
+            <a:r>
+              <a:rPr sz="1000" b="0" i="0">
                 <a:solidFill>
                   <a:srgbClr val="BDC9DB"/>
                 </a:solidFill>
                 <a:latin typeface="Segoe UI"/>
               </a:rPr>
-              <a:t>El volumen comparte el ciclo de vida del Pod, no el del contenedor: si un contenedor se reinicia, los datos siguen ahí.</a:t>
+              <a:t>Un volumen en Kubernetes comparte el ciclo de vida del POD, no el del contenedor: si un contenedor se reinicia dentro del mismo Pod, los datos del volumen siguen ahí. La diferencia clave está en qué pasa cuando el Pod se recrea.</a:t>
+            </a:r>
+          </a:p>
+          <a:p>
+            <a:pPr algn="l" marL="0" indent="0">
+              <a:lnSpc>
+                <a:spcPct val="128000"/>
+              </a:lnSpc>
+              <a:spcBef>
+                <a:spcPts val="0"/>
+              </a:spcBef>
+              <a:spcAft>
+                <a:spcPts val="400"/>
+              </a:spcAft>
+              <a:buNone/>
+            </a:pPr>
+            <a:r>
+              <a:rPr sz="1000" b="0" i="0">
+                <a:solidFill>
+                  <a:srgbClr val="BDC9DB"/>
+                </a:solidFill>
+                <a:latin typeface="Segoe UI"/>
+              </a:rPr>
+              <a:t>emptyDir se crea vacío cuando el Pod arranca en un nodo y se destruye cuando el Pod desaparece de ese nodo. Vive y muere con el Pod. Todos los contenedores del Pod lo comparten, así que es perfecto para caché, ficheros temporales o para pasar datos de un contenedor a otro (un init container prepara algo y el principal lo consume).</a:t>
+            </a:r>
+          </a:p>
+          <a:p>
+            <a:pPr algn="l" marL="0" indent="0">
+              <a:lnSpc>
+                <a:spcPct val="128000"/>
+              </a:lnSpc>
+              <a:spcBef>
+                <a:spcPts val="0"/>
+              </a:spcBef>
+              <a:spcAft>
+                <a:spcPts val="400"/>
+              </a:spcAft>
+              <a:buNone/>
+            </a:pPr>
+            <a:r>
+              <a:rPr sz="1000" b="0" i="0">
+                <a:solidFill>
+                  <a:srgbClr val="BDC9DB"/>
+                </a:solidFill>
+                <a:latin typeface="Segoe UI"/>
+              </a:rPr>
+              <a:t>PersistentVolume y PersistentVolumeClaim desacoplan el almacenamiento del Pod. El PV es el recurso real (un disco, un export NFS, un volumen de nube) y no tiene namespace. El PVC es la solicitud que hace la aplicación —tanto espacio, este modo de acceso— y sí vive en un namespace. El Pod nunca referencia el PV: monta el PVC. Es lo único que se debe usar para datos que importan.</a:t>
             </a:r>
           </a:p>
         </p:txBody>
